--- a/Truecaller_Identity_Rights_Center_Product_Thinking_Deck.pptx
+++ b/Truecaller_Identity_Rights_Center_Product_Thinking_Deck.pptx
@@ -3179,7 +3179,7 @@
               </a:defRPr>
             </a:pPr>
             <a:r>
-              <a:t>TRUECALLER  •  PRIVACY DESIGN THESIS</a:t>
+              <a:t>TRUECALLER  •  PM PRESENTATION</a:t>
             </a:r>
           </a:p>
         </p:txBody>
@@ -3193,7 +3193,7 @@
         <p:spPr>
           <a:xfrm>
             <a:off x="914400" y="2011680"/>
-            <a:ext cx="10058400" cy="1371600"/>
+            <a:ext cx="5943600" cy="1097280"/>
           </a:xfrm>
           <a:prstGeom prst="rect">
             <a:avLst/>
@@ -3207,7 +3207,7 @@
           <a:lstStyle/>
           <a:p>
             <a:pPr>
-              <a:defRPr sz="4600" b="1">
+              <a:defRPr sz="4400" b="1">
                 <a:solidFill>
                   <a:srgbClr val="111318"/>
                 </a:solidFill>
@@ -3228,8 +3228,8 @@
         </p:nvSpPr>
         <p:spPr>
           <a:xfrm>
-            <a:off x="914400" y="3108960"/>
-            <a:ext cx="10058400" cy="914400"/>
+            <a:off x="914400" y="3017520"/>
+            <a:ext cx="5943600" cy="1097280"/>
           </a:xfrm>
           <a:prstGeom prst="rect">
             <a:avLst/>
@@ -3251,64 +3251,21 @@
               </a:defRPr>
             </a:pPr>
             <a:r>
-              <a:t>Designing privacy rights and data agency for people who never signed up.</a:t>
-            </a:r>
-          </a:p>
-        </p:txBody>
-      </p:sp>
-      <p:sp>
-        <p:nvSpPr>
-          <p:cNvPr id="6" name="Rounded Rectangle 5"/>
-          <p:cNvSpPr/>
+              <a:t>Designing privacy rights for people who never signed up.</a:t>
+            </a:r>
+          </a:p>
+        </p:txBody>
+      </p:sp>
+      <p:sp>
+        <p:nvSpPr>
+          <p:cNvPr id="6" name="TextBox 5"/>
+          <p:cNvSpPr txBox="1"/>
           <p:nvPr/>
         </p:nvSpPr>
         <p:spPr>
           <a:xfrm>
             <a:off x="914400" y="4114800"/>
-            <a:ext cx="10332720" cy="1645920"/>
-          </a:xfrm>
-          <a:prstGeom prst="roundRect">
-            <a:avLst/>
-          </a:prstGeom>
-          <a:solidFill>
-            <a:srgbClr val="F5F6F8"/>
-          </a:solidFill>
-          <a:ln>
-            <a:noFill/>
-          </a:ln>
-        </p:spPr>
-        <p:style>
-          <a:lnRef idx="1">
-            <a:schemeClr val="accent1"/>
-          </a:lnRef>
-          <a:fillRef idx="3">
-            <a:schemeClr val="accent1"/>
-          </a:fillRef>
-          <a:effectRef idx="2">
-            <a:schemeClr val="accent1"/>
-          </a:effectRef>
-          <a:fontRef idx="minor">
-            <a:schemeClr val="lt1"/>
-          </a:fontRef>
-        </p:style>
-        <p:txBody>
-          <a:bodyPr rtlCol="0" anchor="ctr"/>
-          <a:lstStyle/>
-          <a:p>
-            <a:pPr algn="ctr"/>
-          </a:p>
-        </p:txBody>
-      </p:sp>
-      <p:sp>
-        <p:nvSpPr>
-          <p:cNvPr id="7" name="TextBox 6"/>
-          <p:cNvSpPr txBox="1"/>
-          <p:nvPr/>
-        </p:nvSpPr>
-        <p:spPr>
-          <a:xfrm>
-            <a:off x="1097280" y="4297680"/>
-            <a:ext cx="9966960" cy="1280160"/>
+            <a:ext cx="5943600" cy="1645920"/>
           </a:xfrm>
           <a:prstGeom prst="rect">
             <a:avLst/>
@@ -3326,10 +3283,11 @@
                 <a:solidFill>
                   <a:srgbClr val="2B5CE0"/>
                 </a:solidFill>
-              </a:defRPr>
-            </a:pPr>
-            <a:r>
-              <a:t>THE PM THESIS</a:t>
+                <a:latin typeface="Inter"/>
+              </a:defRPr>
+            </a:pPr>
+            <a:r>
+              <a:t>PRODUCT THESIS</a:t>
             </a:r>
           </a:p>
           <a:p>
@@ -3337,7 +3295,7 @@
               <a:spcBef>
                 <a:spcPts val="600"/>
               </a:spcBef>
-              <a:defRPr sz="1300">
+              <a:defRPr sz="1400" b="1">
                 <a:solidFill>
                   <a:srgbClr val="111318"/>
                 </a:solidFill>
@@ -3345,11 +3303,35 @@
               </a:defRPr>
             </a:pPr>
             <a:r>
-              <a:t>Truecaller's caller identification network aggregates contact address books, generating identity profile data on millions of non-users who never consented directly. The Identity Rights Center resolves this friction: it establishes a self-serve verification and compliance mechanism under the DPDP Act 2023, building public brand trust without degrading core spam classification integrity.</a:t>
-            </a:r>
-          </a:p>
-        </p:txBody>
-      </p:sp>
+              <a:t>Establishing trust-centric data agency under India's DPDP Act 2023 to preserve caller ID coverage by giving non-users self-serve control over their listed identities.</a:t>
+            </a:r>
+          </a:p>
+        </p:txBody>
+      </p:sp>
+      <p:pic>
+        <p:nvPicPr>
+          <p:cNvPr id="7" name="Picture 6" descr="screenshot_profile.png"/>
+          <p:cNvPicPr>
+            <a:picLocks noChangeAspect="1"/>
+          </p:cNvPicPr>
+          <p:nvPr/>
+        </p:nvPicPr>
+        <p:blipFill>
+          <a:blip r:embed="rId2"/>
+          <a:stretch>
+            <a:fillRect/>
+          </a:stretch>
+        </p:blipFill>
+        <p:spPr>
+          <a:xfrm>
+            <a:off x="7315200" y="1645920"/>
+            <a:ext cx="4114800" cy="4389120"/>
+          </a:xfrm>
+          <a:prstGeom prst="rect">
+            <a:avLst/>
+          </a:prstGeom>
+        </p:spPr>
+      </p:pic>
     </p:spTree>
   </p:cSld>
   <p:clrMapOvr>
@@ -3443,7 +3425,7 @@
               </a:defRPr>
             </a:pPr>
             <a:r>
-              <a:t>Risks &amp; Product Trade-offs</a:t>
+              <a:t>Risks &amp; Accepted Trade-offs Matrix</a:t>
             </a:r>
           </a:p>
         </p:txBody>
@@ -3456,8 +3438,8 @@
         </p:nvSpPr>
         <p:spPr>
           <a:xfrm>
-            <a:off x="731520" y="1645920"/>
-            <a:ext cx="5303520" cy="4389120"/>
+            <a:off x="731520" y="1554480"/>
+            <a:ext cx="2103120" cy="365760"/>
           </a:xfrm>
           <a:prstGeom prst="rect">
             <a:avLst/>
@@ -3478,114 +3460,161 @@
               </a:defRPr>
             </a:pPr>
             <a:r>
-              <a:t>CORE RISKS &amp; PRODUCT DECISIONS</a:t>
-            </a:r>
-          </a:p>
-          <a:p>
-            <a:pPr>
-              <a:spcBef>
-                <a:spcPts val="1200"/>
-              </a:spcBef>
-              <a:defRPr sz="1300" b="1">
-                <a:solidFill>
-                  <a:srgbClr val="111318"/>
-                </a:solidFill>
-              </a:defRPr>
-            </a:pPr>
-            <a:r>
-              <a:t>• Abuse / False Claims: </a:t>
-            </a:r>
-            <a:r>
-              <a:rPr b="0" sz="1250">
-                <a:solidFill>
-                  <a:srgbClr val="4B5160"/>
-                </a:solidFill>
-              </a:rPr>
-              <a:t>Bad actors verifying a stranger's number to unlist or change their name. </a:t>
-            </a:r>
-            <a:r>
-              <a:rPr b="1" sz="1250">
-                <a:solidFill>
-                  <a:srgbClr val="4B5160"/>
-                </a:solidFill>
-              </a:rPr>
-              <a:t>Mitigation: Explicit manual review queue by Trust &amp; Safety (not fully automated) prevents spoofing.</a:t>
-            </a:r>
-          </a:p>
-          <a:p>
-            <a:pPr>
-              <a:spcBef>
-                <a:spcPts val="1200"/>
-              </a:spcBef>
-              <a:defRPr sz="1300" b="1">
-                <a:solidFill>
-                  <a:srgbClr val="111318"/>
-                </a:solidFill>
-              </a:defRPr>
-            </a:pPr>
-            <a:r>
-              <a:t>• Erosion of Spam Database: </a:t>
-            </a:r>
-            <a:r>
-              <a:rPr b="0" sz="1250">
-                <a:solidFill>
-                  <a:srgbClr val="4B5160"/>
-                </a:solidFill>
-              </a:rPr>
-              <a:t>High volume of erasures could degrade spam accuracy for active users. </a:t>
-            </a:r>
-            <a:r>
-              <a:rPr b="1" sz="1250">
-                <a:solidFill>
-                  <a:srgbClr val="4B5160"/>
-                </a:solidFill>
-              </a:rPr>
-              <a:t>Mitigation: Clean unlistings still retain spam flag histories without displaying names.</a:t>
-            </a:r>
-          </a:p>
-          <a:p>
-            <a:pPr>
-              <a:spcBef>
-                <a:spcPts val="1200"/>
-              </a:spcBef>
-              <a:defRPr sz="1300" b="1">
-                <a:solidFill>
-                  <a:srgbClr val="111318"/>
-                </a:solidFill>
-              </a:defRPr>
-            </a:pPr>
-            <a:r>
-              <a:t>• onboarding drop-offs: </a:t>
-            </a:r>
-            <a:r>
-              <a:rPr b="0" sz="1250">
-                <a:solidFill>
-                  <a:srgbClr val="4B5160"/>
-                </a:solidFill>
-              </a:rPr>
-              <a:t>OTP verification requirements create entry friction. </a:t>
-            </a:r>
-            <a:r>
-              <a:rPr b="1" sz="1250">
-                <a:solidFill>
-                  <a:srgbClr val="4B5160"/>
-                </a:solidFill>
-              </a:rPr>
-              <a:t>Mitigation: Transparent, context-aware intro screen front-loads value before number entry.</a:t>
-            </a:r>
-          </a:p>
-        </p:txBody>
-      </p:sp>
-      <p:sp>
-        <p:nvSpPr>
-          <p:cNvPr id="5" name="Rounded Rectangle 4"/>
+              <a:t>Risk Theme</a:t>
+            </a:r>
+          </a:p>
+        </p:txBody>
+      </p:sp>
+      <p:sp>
+        <p:nvSpPr>
+          <p:cNvPr id="5" name="TextBox 4"/>
+          <p:cNvSpPr txBox="1"/>
+          <p:nvPr/>
+        </p:nvSpPr>
+        <p:spPr>
+          <a:xfrm>
+            <a:off x="2926080" y="1554480"/>
+            <a:ext cx="1097280" cy="365760"/>
+          </a:xfrm>
+          <a:prstGeom prst="rect">
+            <a:avLst/>
+          </a:prstGeom>
+          <a:noFill/>
+        </p:spPr>
+        <p:txBody>
+          <a:bodyPr wrap="square">
+            <a:spAutoFit/>
+          </a:bodyPr>
+          <a:lstStyle/>
+          <a:p>
+            <a:pPr>
+              <a:defRPr b="1" sz="1200">
+                <a:solidFill>
+                  <a:srgbClr val="2B5CE0"/>
+                </a:solidFill>
+              </a:defRPr>
+            </a:pPr>
+            <a:r>
+              <a:t>Severity</a:t>
+            </a:r>
+          </a:p>
+        </p:txBody>
+      </p:sp>
+      <p:sp>
+        <p:nvSpPr>
+          <p:cNvPr id="6" name="TextBox 5"/>
+          <p:cNvSpPr txBox="1"/>
+          <p:nvPr/>
+        </p:nvSpPr>
+        <p:spPr>
+          <a:xfrm>
+            <a:off x="4114800" y="1554480"/>
+            <a:ext cx="1097280" cy="365760"/>
+          </a:xfrm>
+          <a:prstGeom prst="rect">
+            <a:avLst/>
+          </a:prstGeom>
+          <a:noFill/>
+        </p:spPr>
+        <p:txBody>
+          <a:bodyPr wrap="square">
+            <a:spAutoFit/>
+          </a:bodyPr>
+          <a:lstStyle/>
+          <a:p>
+            <a:pPr>
+              <a:defRPr b="1" sz="1200">
+                <a:solidFill>
+                  <a:srgbClr val="2B5CE0"/>
+                </a:solidFill>
+              </a:defRPr>
+            </a:pPr>
+            <a:r>
+              <a:t>Likelihood</a:t>
+            </a:r>
+          </a:p>
+        </p:txBody>
+      </p:sp>
+      <p:sp>
+        <p:nvSpPr>
+          <p:cNvPr id="7" name="TextBox 6"/>
+          <p:cNvSpPr txBox="1"/>
+          <p:nvPr/>
+        </p:nvSpPr>
+        <p:spPr>
+          <a:xfrm>
+            <a:off x="5303520" y="1554480"/>
+            <a:ext cx="3017520" cy="365760"/>
+          </a:xfrm>
+          <a:prstGeom prst="rect">
+            <a:avLst/>
+          </a:prstGeom>
+          <a:noFill/>
+        </p:spPr>
+        <p:txBody>
+          <a:bodyPr wrap="square">
+            <a:spAutoFit/>
+          </a:bodyPr>
+          <a:lstStyle/>
+          <a:p>
+            <a:pPr>
+              <a:defRPr b="1" sz="1200">
+                <a:solidFill>
+                  <a:srgbClr val="2B5CE0"/>
+                </a:solidFill>
+              </a:defRPr>
+            </a:pPr>
+            <a:r>
+              <a:t>Product Mitigation</a:t>
+            </a:r>
+          </a:p>
+        </p:txBody>
+      </p:sp>
+      <p:sp>
+        <p:nvSpPr>
+          <p:cNvPr id="8" name="TextBox 7"/>
+          <p:cNvSpPr txBox="1"/>
+          <p:nvPr/>
+        </p:nvSpPr>
+        <p:spPr>
+          <a:xfrm>
+            <a:off x="8412480" y="1554480"/>
+            <a:ext cx="3017520" cy="365760"/>
+          </a:xfrm>
+          <a:prstGeom prst="rect">
+            <a:avLst/>
+          </a:prstGeom>
+          <a:noFill/>
+        </p:spPr>
+        <p:txBody>
+          <a:bodyPr wrap="square">
+            <a:spAutoFit/>
+          </a:bodyPr>
+          <a:lstStyle/>
+          <a:p>
+            <a:pPr>
+              <a:defRPr b="1" sz="1200">
+                <a:solidFill>
+                  <a:srgbClr val="2B5CE0"/>
+                </a:solidFill>
+              </a:defRPr>
+            </a:pPr>
+            <a:r>
+              <a:t>Accepted Trade-off</a:t>
+            </a:r>
+          </a:p>
+        </p:txBody>
+      </p:sp>
+      <p:sp>
+        <p:nvSpPr>
+          <p:cNvPr id="9" name="Rounded Rectangle 8"/>
           <p:cNvSpPr/>
           <p:nvPr/>
         </p:nvSpPr>
         <p:spPr>
           <a:xfrm>
-            <a:off x="6400800" y="1645920"/>
-            <a:ext cx="5029200" cy="4389120"/>
+            <a:off x="731520" y="2011680"/>
+            <a:ext cx="10725912" cy="749808"/>
           </a:xfrm>
           <a:prstGeom prst="roundRect">
             <a:avLst/>
@@ -3621,14 +3650,14 @@
       </p:sp>
       <p:sp>
         <p:nvSpPr>
-          <p:cNvPr id="6" name="TextBox 5"/>
+          <p:cNvPr id="10" name="TextBox 9"/>
           <p:cNvSpPr txBox="1"/>
           <p:nvPr/>
         </p:nvSpPr>
         <p:spPr>
           <a:xfrm>
-            <a:off x="6583680" y="1828800"/>
-            <a:ext cx="4663440" cy="4023360"/>
+            <a:off x="777240" y="2057400"/>
+            <a:ext cx="2103120" cy="731520"/>
           </a:xfrm>
           <a:prstGeom prst="rect">
             <a:avLst/>
@@ -3642,74 +3671,1026 @@
           <a:lstStyle/>
           <a:p>
             <a:pPr>
-              <a:defRPr b="1" sz="1200">
-                <a:solidFill>
-                  <a:srgbClr val="1F9D63"/>
-                </a:solidFill>
-              </a:defRPr>
-            </a:pPr>
-            <a:r>
-              <a:t>WHY THESE TRADE-OFFS ARE ACCEPTABLE</a:t>
-            </a:r>
-          </a:p>
-          <a:p>
-            <a:pPr>
-              <a:spcBef>
-                <a:spcPts val="1200"/>
-              </a:spcBef>
-              <a:defRPr sz="1300">
+              <a:defRPr b="1" sz="1150">
                 <a:solidFill>
                   <a:srgbClr val="111318"/>
                 </a:solidFill>
               </a:defRPr>
             </a:pPr>
             <a:r>
-              <a:t>• Regulatory Compliance: Bypassing DPDP 2023 compliance carries severe penalty exposures and litigation risks.</a:t>
-            </a:r>
-          </a:p>
-          <a:p>
-            <a:pPr>
-              <a:spcBef>
-                <a:spcPts val="1200"/>
-              </a:spcBef>
-              <a:defRPr sz="1300">
+              <a:t>SIM Impersonation / Fake Claims</a:t>
+            </a:r>
+          </a:p>
+        </p:txBody>
+      </p:sp>
+      <p:sp>
+        <p:nvSpPr>
+          <p:cNvPr id="11" name="TextBox 10"/>
+          <p:cNvSpPr txBox="1"/>
+          <p:nvPr/>
+        </p:nvSpPr>
+        <p:spPr>
+          <a:xfrm>
+            <a:off x="2926080" y="2057400"/>
+            <a:ext cx="1097280" cy="731520"/>
+          </a:xfrm>
+          <a:prstGeom prst="rect">
+            <a:avLst/>
+          </a:prstGeom>
+          <a:noFill/>
+        </p:spPr>
+        <p:txBody>
+          <a:bodyPr wrap="square">
+            <a:spAutoFit/>
+          </a:bodyPr>
+          <a:lstStyle/>
+          <a:p>
+            <a:pPr>
+              <a:defRPr b="1" sz="1150">
+                <a:solidFill>
+                  <a:srgbClr val="D33B3B"/>
+                </a:solidFill>
+              </a:defRPr>
+            </a:pPr>
+            <a:r>
+              <a:t>High</a:t>
+            </a:r>
+          </a:p>
+        </p:txBody>
+      </p:sp>
+      <p:sp>
+        <p:nvSpPr>
+          <p:cNvPr id="12" name="TextBox 11"/>
+          <p:cNvSpPr txBox="1"/>
+          <p:nvPr/>
+        </p:nvSpPr>
+        <p:spPr>
+          <a:xfrm>
+            <a:off x="4114800" y="2057400"/>
+            <a:ext cx="1097280" cy="731520"/>
+          </a:xfrm>
+          <a:prstGeom prst="rect">
+            <a:avLst/>
+          </a:prstGeom>
+          <a:noFill/>
+        </p:spPr>
+        <p:txBody>
+          <a:bodyPr wrap="square">
+            <a:spAutoFit/>
+          </a:bodyPr>
+          <a:lstStyle/>
+          <a:p>
+            <a:pPr>
+              <a:defRPr b="1" sz="1150">
+                <a:solidFill>
+                  <a:srgbClr val="C57A11"/>
+                </a:solidFill>
+              </a:defRPr>
+            </a:pPr>
+            <a:r>
+              <a:t>Medium</a:t>
+            </a:r>
+          </a:p>
+        </p:txBody>
+      </p:sp>
+      <p:sp>
+        <p:nvSpPr>
+          <p:cNvPr id="13" name="TextBox 12"/>
+          <p:cNvSpPr txBox="1"/>
+          <p:nvPr/>
+        </p:nvSpPr>
+        <p:spPr>
+          <a:xfrm>
+            <a:off x="5349240" y="2057400"/>
+            <a:ext cx="2926080" cy="731520"/>
+          </a:xfrm>
+          <a:prstGeom prst="rect">
+            <a:avLst/>
+          </a:prstGeom>
+          <a:noFill/>
+        </p:spPr>
+        <p:txBody>
+          <a:bodyPr wrap="square">
+            <a:spAutoFit/>
+          </a:bodyPr>
+          <a:lstStyle/>
+          <a:p>
+            <a:pPr>
+              <a:defRPr sz="1100">
+                <a:solidFill>
+                  <a:srgbClr val="4B5160"/>
+                </a:solidFill>
+              </a:defRPr>
+            </a:pPr>
+            <a:r>
+              <a:t>OTP verification confirms SIM ownership. Reviews prevent rapid bulk edits.</a:t>
+            </a:r>
+          </a:p>
+        </p:txBody>
+      </p:sp>
+      <p:sp>
+        <p:nvSpPr>
+          <p:cNvPr id="14" name="TextBox 13"/>
+          <p:cNvSpPr txBox="1"/>
+          <p:nvPr/>
+        </p:nvSpPr>
+        <p:spPr>
+          <a:xfrm>
+            <a:off x="8458200" y="2057400"/>
+            <a:ext cx="2926080" cy="731520"/>
+          </a:xfrm>
+          <a:prstGeom prst="rect">
+            <a:avLst/>
+          </a:prstGeom>
+          <a:noFill/>
+        </p:spPr>
+        <p:txBody>
+          <a:bodyPr wrap="square">
+            <a:spAutoFit/>
+          </a:bodyPr>
+          <a:lstStyle/>
+          <a:p>
+            <a:pPr>
+              <a:defRPr sz="1100" b="1">
                 <a:solidFill>
                   <a:srgbClr val="111318"/>
                 </a:solidFill>
               </a:defRPr>
             </a:pPr>
             <a:r>
-              <a:t>• Trust Moat: Building long-term public trust outweighs short-term, unconsented database volume gains.</a:t>
-            </a:r>
-          </a:p>
-          <a:p>
-            <a:pPr>
-              <a:spcBef>
-                <a:spcPts val="1200"/>
-              </a:spcBef>
-              <a:defRPr sz="1300">
+              <a:t>Friction slows down turnaround times</a:t>
+            </a:r>
+          </a:p>
+        </p:txBody>
+      </p:sp>
+      <p:sp>
+        <p:nvSpPr>
+          <p:cNvPr id="15" name="Rounded Rectangle 14"/>
+          <p:cNvSpPr/>
+          <p:nvPr/>
+        </p:nvSpPr>
+        <p:spPr>
+          <a:xfrm>
+            <a:off x="731520" y="2834640"/>
+            <a:ext cx="10725912" cy="749808"/>
+          </a:xfrm>
+          <a:prstGeom prst="roundRect">
+            <a:avLst/>
+          </a:prstGeom>
+          <a:solidFill>
+            <a:srgbClr val="F5F6F8"/>
+          </a:solidFill>
+          <a:ln>
+            <a:noFill/>
+          </a:ln>
+        </p:spPr>
+        <p:style>
+          <a:lnRef idx="1">
+            <a:schemeClr val="accent1"/>
+          </a:lnRef>
+          <a:fillRef idx="3">
+            <a:schemeClr val="accent1"/>
+          </a:fillRef>
+          <a:effectRef idx="2">
+            <a:schemeClr val="accent1"/>
+          </a:effectRef>
+          <a:fontRef idx="minor">
+            <a:schemeClr val="lt1"/>
+          </a:fontRef>
+        </p:style>
+        <p:txBody>
+          <a:bodyPr rtlCol="0" anchor="ctr"/>
+          <a:lstStyle/>
+          <a:p>
+            <a:pPr algn="ctr"/>
+          </a:p>
+        </p:txBody>
+      </p:sp>
+      <p:sp>
+        <p:nvSpPr>
+          <p:cNvPr id="16" name="TextBox 15"/>
+          <p:cNvSpPr txBox="1"/>
+          <p:nvPr/>
+        </p:nvSpPr>
+        <p:spPr>
+          <a:xfrm>
+            <a:off x="777240" y="2880360"/>
+            <a:ext cx="2103120" cy="731520"/>
+          </a:xfrm>
+          <a:prstGeom prst="rect">
+            <a:avLst/>
+          </a:prstGeom>
+          <a:noFill/>
+        </p:spPr>
+        <p:txBody>
+          <a:bodyPr wrap="square">
+            <a:spAutoFit/>
+          </a:bodyPr>
+          <a:lstStyle/>
+          <a:p>
+            <a:pPr>
+              <a:defRPr b="1" sz="1150">
                 <a:solidFill>
                   <a:srgbClr val="111318"/>
                 </a:solidFill>
               </a:defRPr>
             </a:pPr>
             <a:r>
-              <a:t>• Future Conversion: Demonstrating extreme privacy control converts skeptical non-users into future active customers.</a:t>
-            </a:r>
-          </a:p>
-          <a:p>
-            <a:pPr>
-              <a:spcBef>
-                <a:spcPts val="1200"/>
-              </a:spcBef>
-              <a:defRPr sz="1300">
+              <a:t>Spam Directory Degradation</a:t>
+            </a:r>
+          </a:p>
+        </p:txBody>
+      </p:sp>
+      <p:sp>
+        <p:nvSpPr>
+          <p:cNvPr id="17" name="TextBox 16"/>
+          <p:cNvSpPr txBox="1"/>
+          <p:nvPr/>
+        </p:nvSpPr>
+        <p:spPr>
+          <a:xfrm>
+            <a:off x="2926080" y="2880360"/>
+            <a:ext cx="1097280" cy="731520"/>
+          </a:xfrm>
+          <a:prstGeom prst="rect">
+            <a:avLst/>
+          </a:prstGeom>
+          <a:noFill/>
+        </p:spPr>
+        <p:txBody>
+          <a:bodyPr wrap="square">
+            <a:spAutoFit/>
+          </a:bodyPr>
+          <a:lstStyle/>
+          <a:p>
+            <a:pPr>
+              <a:defRPr b="1" sz="1150">
+                <a:solidFill>
+                  <a:srgbClr val="D33B3B"/>
+                </a:solidFill>
+              </a:defRPr>
+            </a:pPr>
+            <a:r>
+              <a:t>High</a:t>
+            </a:r>
+          </a:p>
+        </p:txBody>
+      </p:sp>
+      <p:sp>
+        <p:nvSpPr>
+          <p:cNvPr id="18" name="TextBox 17"/>
+          <p:cNvSpPr txBox="1"/>
+          <p:nvPr/>
+        </p:nvSpPr>
+        <p:spPr>
+          <a:xfrm>
+            <a:off x="4114800" y="2880360"/>
+            <a:ext cx="1097280" cy="731520"/>
+          </a:xfrm>
+          <a:prstGeom prst="rect">
+            <a:avLst/>
+          </a:prstGeom>
+          <a:noFill/>
+        </p:spPr>
+        <p:txBody>
+          <a:bodyPr wrap="square">
+            <a:spAutoFit/>
+          </a:bodyPr>
+          <a:lstStyle/>
+          <a:p>
+            <a:pPr>
+              <a:defRPr b="1" sz="1150">
+                <a:solidFill>
+                  <a:srgbClr val="4B5160"/>
+                </a:solidFill>
+              </a:defRPr>
+            </a:pPr>
+            <a:r>
+              <a:t>Low</a:t>
+            </a:r>
+          </a:p>
+        </p:txBody>
+      </p:sp>
+      <p:sp>
+        <p:nvSpPr>
+          <p:cNvPr id="19" name="TextBox 18"/>
+          <p:cNvSpPr txBox="1"/>
+          <p:nvPr/>
+        </p:nvSpPr>
+        <p:spPr>
+          <a:xfrm>
+            <a:off x="5349240" y="2880360"/>
+            <a:ext cx="2926080" cy="731520"/>
+          </a:xfrm>
+          <a:prstGeom prst="rect">
+            <a:avLst/>
+          </a:prstGeom>
+          <a:noFill/>
+        </p:spPr>
+        <p:txBody>
+          <a:bodyPr wrap="square">
+            <a:spAutoFit/>
+          </a:bodyPr>
+          <a:lstStyle/>
+          <a:p>
+            <a:pPr>
+              <a:defRPr sz="1100">
+                <a:solidFill>
+                  <a:srgbClr val="4B5160"/>
+                </a:solidFill>
+              </a:defRPr>
+            </a:pPr>
+            <a:r>
+              <a:t>Erase requests hide displayName listings, but preserve underlying spam signals.</a:t>
+            </a:r>
+          </a:p>
+        </p:txBody>
+      </p:sp>
+      <p:sp>
+        <p:nvSpPr>
+          <p:cNvPr id="20" name="TextBox 19"/>
+          <p:cNvSpPr txBox="1"/>
+          <p:nvPr/>
+        </p:nvSpPr>
+        <p:spPr>
+          <a:xfrm>
+            <a:off x="8458200" y="2880360"/>
+            <a:ext cx="2926080" cy="731520"/>
+          </a:xfrm>
+          <a:prstGeom prst="rect">
+            <a:avLst/>
+          </a:prstGeom>
+          <a:noFill/>
+        </p:spPr>
+        <p:txBody>
+          <a:bodyPr wrap="square">
+            <a:spAutoFit/>
+          </a:bodyPr>
+          <a:lstStyle/>
+          <a:p>
+            <a:pPr>
+              <a:defRPr sz="1100" b="1">
                 <a:solidFill>
                   <a:srgbClr val="111318"/>
                 </a:solidFill>
               </a:defRPr>
             </a:pPr>
             <a:r>
-              <a:t>• Balanced Protection: Erasure unlists public display names but preserves behind-the-scenes spam block metrics.</a:t>
+              <a:t>Reduced contact metadata on unlistings</a:t>
+            </a:r>
+          </a:p>
+        </p:txBody>
+      </p:sp>
+      <p:sp>
+        <p:nvSpPr>
+          <p:cNvPr id="21" name="Rounded Rectangle 20"/>
+          <p:cNvSpPr/>
+          <p:nvPr/>
+        </p:nvSpPr>
+        <p:spPr>
+          <a:xfrm>
+            <a:off x="731520" y="3657600"/>
+            <a:ext cx="10725912" cy="749808"/>
+          </a:xfrm>
+          <a:prstGeom prst="roundRect">
+            <a:avLst/>
+          </a:prstGeom>
+          <a:solidFill>
+            <a:srgbClr val="F5F6F8"/>
+          </a:solidFill>
+          <a:ln>
+            <a:noFill/>
+          </a:ln>
+        </p:spPr>
+        <p:style>
+          <a:lnRef idx="1">
+            <a:schemeClr val="accent1"/>
+          </a:lnRef>
+          <a:fillRef idx="3">
+            <a:schemeClr val="accent1"/>
+          </a:fillRef>
+          <a:effectRef idx="2">
+            <a:schemeClr val="accent1"/>
+          </a:effectRef>
+          <a:fontRef idx="minor">
+            <a:schemeClr val="lt1"/>
+          </a:fontRef>
+        </p:style>
+        <p:txBody>
+          <a:bodyPr rtlCol="0" anchor="ctr"/>
+          <a:lstStyle/>
+          <a:p>
+            <a:pPr algn="ctr"/>
+          </a:p>
+        </p:txBody>
+      </p:sp>
+      <p:sp>
+        <p:nvSpPr>
+          <p:cNvPr id="22" name="TextBox 21"/>
+          <p:cNvSpPr txBox="1"/>
+          <p:nvPr/>
+        </p:nvSpPr>
+        <p:spPr>
+          <a:xfrm>
+            <a:off x="777240" y="3703320"/>
+            <a:ext cx="2103120" cy="731520"/>
+          </a:xfrm>
+          <a:prstGeom prst="rect">
+            <a:avLst/>
+          </a:prstGeom>
+          <a:noFill/>
+        </p:spPr>
+        <p:txBody>
+          <a:bodyPr wrap="square">
+            <a:spAutoFit/>
+          </a:bodyPr>
+          <a:lstStyle/>
+          <a:p>
+            <a:pPr>
+              <a:defRPr b="1" sz="1150">
+                <a:solidFill>
+                  <a:srgbClr val="111318"/>
+                </a:solidFill>
+              </a:defRPr>
+            </a:pPr>
+            <a:r>
+              <a:t>OTP Onboarding Friction</a:t>
+            </a:r>
+          </a:p>
+        </p:txBody>
+      </p:sp>
+      <p:sp>
+        <p:nvSpPr>
+          <p:cNvPr id="23" name="TextBox 22"/>
+          <p:cNvSpPr txBox="1"/>
+          <p:nvPr/>
+        </p:nvSpPr>
+        <p:spPr>
+          <a:xfrm>
+            <a:off x="2926080" y="3703320"/>
+            <a:ext cx="1097280" cy="731520"/>
+          </a:xfrm>
+          <a:prstGeom prst="rect">
+            <a:avLst/>
+          </a:prstGeom>
+          <a:noFill/>
+        </p:spPr>
+        <p:txBody>
+          <a:bodyPr wrap="square">
+            <a:spAutoFit/>
+          </a:bodyPr>
+          <a:lstStyle/>
+          <a:p>
+            <a:pPr>
+              <a:defRPr b="1" sz="1150">
+                <a:solidFill>
+                  <a:srgbClr val="C57A11"/>
+                </a:solidFill>
+              </a:defRPr>
+            </a:pPr>
+            <a:r>
+              <a:t>Medium</a:t>
+            </a:r>
+          </a:p>
+        </p:txBody>
+      </p:sp>
+      <p:sp>
+        <p:nvSpPr>
+          <p:cNvPr id="24" name="TextBox 23"/>
+          <p:cNvSpPr txBox="1"/>
+          <p:nvPr/>
+        </p:nvSpPr>
+        <p:spPr>
+          <a:xfrm>
+            <a:off x="4114800" y="3703320"/>
+            <a:ext cx="1097280" cy="731520"/>
+          </a:xfrm>
+          <a:prstGeom prst="rect">
+            <a:avLst/>
+          </a:prstGeom>
+          <a:noFill/>
+        </p:spPr>
+        <p:txBody>
+          <a:bodyPr wrap="square">
+            <a:spAutoFit/>
+          </a:bodyPr>
+          <a:lstStyle/>
+          <a:p>
+            <a:pPr>
+              <a:defRPr b="1" sz="1150">
+                <a:solidFill>
+                  <a:srgbClr val="D33B3B"/>
+                </a:solidFill>
+              </a:defRPr>
+            </a:pPr>
+            <a:r>
+              <a:t>High</a:t>
+            </a:r>
+          </a:p>
+        </p:txBody>
+      </p:sp>
+      <p:sp>
+        <p:nvSpPr>
+          <p:cNvPr id="25" name="TextBox 24"/>
+          <p:cNvSpPr txBox="1"/>
+          <p:nvPr/>
+        </p:nvSpPr>
+        <p:spPr>
+          <a:xfrm>
+            <a:off x="5349240" y="3703320"/>
+            <a:ext cx="2926080" cy="731520"/>
+          </a:xfrm>
+          <a:prstGeom prst="rect">
+            <a:avLst/>
+          </a:prstGeom>
+          <a:noFill/>
+        </p:spPr>
+        <p:txBody>
+          <a:bodyPr wrap="square">
+            <a:spAutoFit/>
+          </a:bodyPr>
+          <a:lstStyle/>
+          <a:p>
+            <a:pPr>
+              <a:defRPr sz="1100">
+                <a:solidFill>
+                  <a:srgbClr val="4B5160"/>
+                </a:solidFill>
+              </a:defRPr>
+            </a:pPr>
+            <a:r>
+              <a:t>Trust intro cards explain verification rationale before prompting phone entries.</a:t>
+            </a:r>
+          </a:p>
+        </p:txBody>
+      </p:sp>
+      <p:sp>
+        <p:nvSpPr>
+          <p:cNvPr id="26" name="TextBox 25"/>
+          <p:cNvSpPr txBox="1"/>
+          <p:nvPr/>
+        </p:nvSpPr>
+        <p:spPr>
+          <a:xfrm>
+            <a:off x="8458200" y="3703320"/>
+            <a:ext cx="2926080" cy="731520"/>
+          </a:xfrm>
+          <a:prstGeom prst="rect">
+            <a:avLst/>
+          </a:prstGeom>
+          <a:noFill/>
+        </p:spPr>
+        <p:txBody>
+          <a:bodyPr wrap="square">
+            <a:spAutoFit/>
+          </a:bodyPr>
+          <a:lstStyle/>
+          <a:p>
+            <a:pPr>
+              <a:defRPr sz="1100" b="1">
+                <a:solidFill>
+                  <a:srgbClr val="111318"/>
+                </a:solidFill>
+              </a:defRPr>
+            </a:pPr>
+            <a:r>
+              <a:t>Minor drop-off accepted for security check</a:t>
+            </a:r>
+          </a:p>
+        </p:txBody>
+      </p:sp>
+      <p:sp>
+        <p:nvSpPr>
+          <p:cNvPr id="27" name="Rounded Rectangle 26"/>
+          <p:cNvSpPr/>
+          <p:nvPr/>
+        </p:nvSpPr>
+        <p:spPr>
+          <a:xfrm>
+            <a:off x="731520" y="4480560"/>
+            <a:ext cx="10725912" cy="749808"/>
+          </a:xfrm>
+          <a:prstGeom prst="roundRect">
+            <a:avLst/>
+          </a:prstGeom>
+          <a:solidFill>
+            <a:srgbClr val="F5F6F8"/>
+          </a:solidFill>
+          <a:ln>
+            <a:noFill/>
+          </a:ln>
+        </p:spPr>
+        <p:style>
+          <a:lnRef idx="1">
+            <a:schemeClr val="accent1"/>
+          </a:lnRef>
+          <a:fillRef idx="3">
+            <a:schemeClr val="accent1"/>
+          </a:fillRef>
+          <a:effectRef idx="2">
+            <a:schemeClr val="accent1"/>
+          </a:effectRef>
+          <a:fontRef idx="minor">
+            <a:schemeClr val="lt1"/>
+          </a:fontRef>
+        </p:style>
+        <p:txBody>
+          <a:bodyPr rtlCol="0" anchor="ctr"/>
+          <a:lstStyle/>
+          <a:p>
+            <a:pPr algn="ctr"/>
+          </a:p>
+        </p:txBody>
+      </p:sp>
+      <p:sp>
+        <p:nvSpPr>
+          <p:cNvPr id="28" name="TextBox 27"/>
+          <p:cNvSpPr txBox="1"/>
+          <p:nvPr/>
+        </p:nvSpPr>
+        <p:spPr>
+          <a:xfrm>
+            <a:off x="777240" y="4526280"/>
+            <a:ext cx="2103120" cy="731520"/>
+          </a:xfrm>
+          <a:prstGeom prst="rect">
+            <a:avLst/>
+          </a:prstGeom>
+          <a:noFill/>
+        </p:spPr>
+        <p:txBody>
+          <a:bodyPr wrap="square">
+            <a:spAutoFit/>
+          </a:bodyPr>
+          <a:lstStyle/>
+          <a:p>
+            <a:pPr>
+              <a:defRPr b="1" sz="1150">
+                <a:solidFill>
+                  <a:srgbClr val="111318"/>
+                </a:solidFill>
+              </a:defRPr>
+            </a:pPr>
+            <a:r>
+              <a:t>Manual Review Staffing cost</a:t>
+            </a:r>
+          </a:p>
+        </p:txBody>
+      </p:sp>
+      <p:sp>
+        <p:nvSpPr>
+          <p:cNvPr id="29" name="TextBox 28"/>
+          <p:cNvSpPr txBox="1"/>
+          <p:nvPr/>
+        </p:nvSpPr>
+        <p:spPr>
+          <a:xfrm>
+            <a:off x="2926080" y="4526280"/>
+            <a:ext cx="1097280" cy="731520"/>
+          </a:xfrm>
+          <a:prstGeom prst="rect">
+            <a:avLst/>
+          </a:prstGeom>
+          <a:noFill/>
+        </p:spPr>
+        <p:txBody>
+          <a:bodyPr wrap="square">
+            <a:spAutoFit/>
+          </a:bodyPr>
+          <a:lstStyle/>
+          <a:p>
+            <a:pPr>
+              <a:defRPr b="1" sz="1150">
+                <a:solidFill>
+                  <a:srgbClr val="C57A11"/>
+                </a:solidFill>
+              </a:defRPr>
+            </a:pPr>
+            <a:r>
+              <a:t>Medium</a:t>
+            </a:r>
+          </a:p>
+        </p:txBody>
+      </p:sp>
+      <p:sp>
+        <p:nvSpPr>
+          <p:cNvPr id="30" name="TextBox 29"/>
+          <p:cNvSpPr txBox="1"/>
+          <p:nvPr/>
+        </p:nvSpPr>
+        <p:spPr>
+          <a:xfrm>
+            <a:off x="4114800" y="4526280"/>
+            <a:ext cx="1097280" cy="731520"/>
+          </a:xfrm>
+          <a:prstGeom prst="rect">
+            <a:avLst/>
+          </a:prstGeom>
+          <a:noFill/>
+        </p:spPr>
+        <p:txBody>
+          <a:bodyPr wrap="square">
+            <a:spAutoFit/>
+          </a:bodyPr>
+          <a:lstStyle/>
+          <a:p>
+            <a:pPr>
+              <a:defRPr b="1" sz="1150">
+                <a:solidFill>
+                  <a:srgbClr val="D33B3B"/>
+                </a:solidFill>
+              </a:defRPr>
+            </a:pPr>
+            <a:r>
+              <a:t>High</a:t>
+            </a:r>
+          </a:p>
+        </p:txBody>
+      </p:sp>
+      <p:sp>
+        <p:nvSpPr>
+          <p:cNvPr id="31" name="TextBox 30"/>
+          <p:cNvSpPr txBox="1"/>
+          <p:nvPr/>
+        </p:nvSpPr>
+        <p:spPr>
+          <a:xfrm>
+            <a:off x="5349240" y="4526280"/>
+            <a:ext cx="2926080" cy="731520"/>
+          </a:xfrm>
+          <a:prstGeom prst="rect">
+            <a:avLst/>
+          </a:prstGeom>
+          <a:noFill/>
+        </p:spPr>
+        <p:txBody>
+          <a:bodyPr wrap="square">
+            <a:spAutoFit/>
+          </a:bodyPr>
+          <a:lstStyle/>
+          <a:p>
+            <a:pPr>
+              <a:defRPr sz="1100">
+                <a:solidFill>
+                  <a:srgbClr val="4B5160"/>
+                </a:solidFill>
+              </a:defRPr>
+            </a:pPr>
+            <a:r>
+              <a:t>Trigger filters isolate low-risk updates for instant approval (future scope).</a:t>
+            </a:r>
+          </a:p>
+        </p:txBody>
+      </p:sp>
+      <p:sp>
+        <p:nvSpPr>
+          <p:cNvPr id="32" name="TextBox 31"/>
+          <p:cNvSpPr txBox="1"/>
+          <p:nvPr/>
+        </p:nvSpPr>
+        <p:spPr>
+          <a:xfrm>
+            <a:off x="8458200" y="4526280"/>
+            <a:ext cx="2926080" cy="731520"/>
+          </a:xfrm>
+          <a:prstGeom prst="rect">
+            <a:avLst/>
+          </a:prstGeom>
+          <a:noFill/>
+        </p:spPr>
+        <p:txBody>
+          <a:bodyPr wrap="square">
+            <a:spAutoFit/>
+          </a:bodyPr>
+          <a:lstStyle/>
+          <a:p>
+            <a:pPr>
+              <a:defRPr sz="1100" b="1">
+                <a:solidFill>
+                  <a:srgbClr val="111318"/>
+                </a:solidFill>
+              </a:defRPr>
+            </a:pPr>
+            <a:r>
+              <a:t>Higher operational cost for trust reviews</a:t>
+            </a:r>
+          </a:p>
+        </p:txBody>
+      </p:sp>
+      <p:sp>
+        <p:nvSpPr>
+          <p:cNvPr id="33" name="Rounded Rectangle 32"/>
+          <p:cNvSpPr/>
+          <p:nvPr/>
+        </p:nvSpPr>
+        <p:spPr>
+          <a:xfrm>
+            <a:off x="731520" y="5303520"/>
+            <a:ext cx="10725912" cy="749808"/>
+          </a:xfrm>
+          <a:prstGeom prst="roundRect">
+            <a:avLst/>
+          </a:prstGeom>
+          <a:solidFill>
+            <a:srgbClr val="F5F6F8"/>
+          </a:solidFill>
+          <a:ln>
+            <a:noFill/>
+          </a:ln>
+        </p:spPr>
+        <p:style>
+          <a:lnRef idx="1">
+            <a:schemeClr val="accent1"/>
+          </a:lnRef>
+          <a:fillRef idx="3">
+            <a:schemeClr val="accent1"/>
+          </a:fillRef>
+          <a:effectRef idx="2">
+            <a:schemeClr val="accent1"/>
+          </a:effectRef>
+          <a:fontRef idx="minor">
+            <a:schemeClr val="lt1"/>
+          </a:fontRef>
+        </p:style>
+        <p:txBody>
+          <a:bodyPr rtlCol="0" anchor="ctr"/>
+          <a:lstStyle/>
+          <a:p>
+            <a:pPr algn="ctr"/>
+          </a:p>
+        </p:txBody>
+      </p:sp>
+      <p:sp>
+        <p:nvSpPr>
+          <p:cNvPr id="34" name="TextBox 33"/>
+          <p:cNvSpPr txBox="1"/>
+          <p:nvPr/>
+        </p:nvSpPr>
+        <p:spPr>
+          <a:xfrm>
+            <a:off x="777240" y="5349240"/>
+            <a:ext cx="2103120" cy="731520"/>
+          </a:xfrm>
+          <a:prstGeom prst="rect">
+            <a:avLst/>
+          </a:prstGeom>
+          <a:noFill/>
+        </p:spPr>
+        <p:txBody>
+          <a:bodyPr wrap="square">
+            <a:spAutoFit/>
+          </a:bodyPr>
+          <a:lstStyle/>
+          <a:p>
+            <a:pPr>
+              <a:defRPr b="1" sz="1150">
+                <a:solidFill>
+                  <a:srgbClr val="111318"/>
+                </a:solidFill>
+              </a:defRPr>
+            </a:pPr>
+            <a:r>
+              <a:t>Data Provenance Leaks</a:t>
+            </a:r>
+          </a:p>
+        </p:txBody>
+      </p:sp>
+      <p:sp>
+        <p:nvSpPr>
+          <p:cNvPr id="35" name="TextBox 34"/>
+          <p:cNvSpPr txBox="1"/>
+          <p:nvPr/>
+        </p:nvSpPr>
+        <p:spPr>
+          <a:xfrm>
+            <a:off x="2926080" y="5349240"/>
+            <a:ext cx="1097280" cy="731520"/>
+          </a:xfrm>
+          <a:prstGeom prst="rect">
+            <a:avLst/>
+          </a:prstGeom>
+          <a:noFill/>
+        </p:spPr>
+        <p:txBody>
+          <a:bodyPr wrap="square">
+            <a:spAutoFit/>
+          </a:bodyPr>
+          <a:lstStyle/>
+          <a:p>
+            <a:pPr>
+              <a:defRPr b="1" sz="1150">
+                <a:solidFill>
+                  <a:srgbClr val="D33B3B"/>
+                </a:solidFill>
+              </a:defRPr>
+            </a:pPr>
+            <a:r>
+              <a:t>High</a:t>
+            </a:r>
+          </a:p>
+        </p:txBody>
+      </p:sp>
+      <p:sp>
+        <p:nvSpPr>
+          <p:cNvPr id="36" name="TextBox 35"/>
+          <p:cNvSpPr txBox="1"/>
+          <p:nvPr/>
+        </p:nvSpPr>
+        <p:spPr>
+          <a:xfrm>
+            <a:off x="4114800" y="5349240"/>
+            <a:ext cx="1097280" cy="731520"/>
+          </a:xfrm>
+          <a:prstGeom prst="rect">
+            <a:avLst/>
+          </a:prstGeom>
+          <a:noFill/>
+        </p:spPr>
+        <p:txBody>
+          <a:bodyPr wrap="square">
+            <a:spAutoFit/>
+          </a:bodyPr>
+          <a:lstStyle/>
+          <a:p>
+            <a:pPr>
+              <a:defRPr b="1" sz="1150">
+                <a:solidFill>
+                  <a:srgbClr val="4B5160"/>
+                </a:solidFill>
+              </a:defRPr>
+            </a:pPr>
+            <a:r>
+              <a:t>Low</a:t>
+            </a:r>
+          </a:p>
+        </p:txBody>
+      </p:sp>
+      <p:sp>
+        <p:nvSpPr>
+          <p:cNvPr id="37" name="TextBox 36"/>
+          <p:cNvSpPr txBox="1"/>
+          <p:nvPr/>
+        </p:nvSpPr>
+        <p:spPr>
+          <a:xfrm>
+            <a:off x="5349240" y="5349240"/>
+            <a:ext cx="2926080" cy="731520"/>
+          </a:xfrm>
+          <a:prstGeom prst="rect">
+            <a:avLst/>
+          </a:prstGeom>
+          <a:noFill/>
+        </p:spPr>
+        <p:txBody>
+          <a:bodyPr wrap="square">
+            <a:spAutoFit/>
+          </a:bodyPr>
+          <a:lstStyle/>
+          <a:p>
+            <a:pPr>
+              <a:defRPr sz="1100">
+                <a:solidFill>
+                  <a:srgbClr val="4B5160"/>
+                </a:solidFill>
+              </a:defRPr>
+            </a:pPr>
+            <a:r>
+              <a:t>Show aggregated contact listing counts only, protecting uploader identities.</a:t>
+            </a:r>
+          </a:p>
+        </p:txBody>
+      </p:sp>
+      <p:sp>
+        <p:nvSpPr>
+          <p:cNvPr id="38" name="TextBox 37"/>
+          <p:cNvSpPr txBox="1"/>
+          <p:nvPr/>
+        </p:nvSpPr>
+        <p:spPr>
+          <a:xfrm>
+            <a:off x="8458200" y="5349240"/>
+            <a:ext cx="2926080" cy="731520"/>
+          </a:xfrm>
+          <a:prstGeom prst="rect">
+            <a:avLst/>
+          </a:prstGeom>
+          <a:noFill/>
+        </p:spPr>
+        <p:txBody>
+          <a:bodyPr wrap="square">
+            <a:spAutoFit/>
+          </a:bodyPr>
+          <a:lstStyle/>
+          <a:p>
+            <a:pPr>
+              <a:defRPr sz="1100" b="1">
+                <a:solidFill>
+                  <a:srgbClr val="111318"/>
+                </a:solidFill>
+              </a:defRPr>
+            </a:pPr>
+            <a:r>
+              <a:t>Anonymity limits direct listing disputes</a:t>
             </a:r>
           </a:p>
         </p:txBody>
@@ -3771,7 +4752,7 @@
               </a:defRPr>
             </a:pPr>
             <a:r>
-              <a:t>PROBLEM DEFINITION</a:t>
+              <a:t>COMPLIANCE &amp; STRATEGY</a:t>
             </a:r>
           </a:p>
         </p:txBody>
@@ -3821,7 +4802,7 @@
         <p:spPr>
           <a:xfrm>
             <a:off x="731520" y="1645920"/>
-            <a:ext cx="5120640" cy="4389120"/>
+            <a:ext cx="10698480" cy="914400"/>
           </a:xfrm>
           <a:prstGeom prst="roundRect">
             <a:avLst/>
@@ -3863,8 +4844,8 @@
         </p:nvSpPr>
         <p:spPr>
           <a:xfrm>
-            <a:off x="914400" y="1828800"/>
-            <a:ext cx="4754880" cy="4023360"/>
+            <a:off x="914400" y="1737360"/>
+            <a:ext cx="10332720" cy="731520"/>
           </a:xfrm>
           <a:prstGeom prst="rect">
             <a:avLst/>
@@ -3878,22 +4859,7 @@
           <a:lstStyle/>
           <a:p>
             <a:pPr>
-              <a:defRPr sz="1200" b="1">
-                <a:solidFill>
-                  <a:srgbClr val="2B5CE0"/>
-                </a:solidFill>
-              </a:defRPr>
-            </a:pPr>
-            <a:r>
-              <a:t>THE ACTIVE USER (CONSENTER)</a:t>
-            </a:r>
-          </a:p>
-          <a:p>
-            <a:pPr>
-              <a:spcBef>
-                <a:spcPts val="1200"/>
-              </a:spcBef>
-              <a:defRPr sz="1300">
+              <a:defRPr sz="1300" b="1">
                 <a:solidFill>
                   <a:srgbClr val="111318"/>
                 </a:solidFill>
@@ -3901,39 +4867,7 @@
               </a:defRPr>
             </a:pPr>
             <a:r>
-              <a:t>• Explicit transaction: User installs Truecaller and uploads contact lists.</a:t>
-            </a:r>
-          </a:p>
-          <a:p>
-            <a:pPr>
-              <a:spcBef>
-                <a:spcPts val="1200"/>
-              </a:spcBef>
-              <a:defRPr sz="1300">
-                <a:solidFill>
-                  <a:srgbClr val="111318"/>
-                </a:solidFill>
-                <a:latin typeface="Inter"/>
-              </a:defRPr>
-            </a:pPr>
-            <a:r>
-              <a:t>• Benefit: Spam protection and caller ID mapping for themselves.</a:t>
-            </a:r>
-          </a:p>
-          <a:p>
-            <a:pPr>
-              <a:spcBef>
-                <a:spcPts val="1200"/>
-              </a:spcBef>
-              <a:defRPr sz="1300">
-                <a:solidFill>
-                  <a:srgbClr val="111318"/>
-                </a:solidFill>
-                <a:latin typeface="Inter"/>
-              </a:defRPr>
-            </a:pPr>
-            <a:r>
-              <a:t>• Implicit impact: Shares third-party data containing names, employers, tags, and phone numbers without warning the owners.</a:t>
+              <a:t>CORE INSIGHT: The active app user (consenter) and the data principal (subject) are different people. While crowdsourcing aggregates listings, the non-users are left without notices, transparency, or direct recourse.</a:t>
             </a:r>
           </a:p>
         </p:txBody>
@@ -3946,8 +4880,8 @@
         </p:nvSpPr>
         <p:spPr>
           <a:xfrm>
-            <a:off x="6217920" y="1645920"/>
-            <a:ext cx="5212080" cy="4389120"/>
+            <a:off x="731520" y="2743200"/>
+            <a:ext cx="5120640" cy="3291840"/>
           </a:xfrm>
           <a:prstGeom prst="roundRect">
             <a:avLst/>
@@ -3989,8 +4923,8 @@
         </p:nvSpPr>
         <p:spPr>
           <a:xfrm>
-            <a:off x="6400800" y="1828800"/>
-            <a:ext cx="4846320" cy="4023360"/>
+            <a:off x="914400" y="2926080"/>
+            <a:ext cx="4754880" cy="2926080"/>
           </a:xfrm>
           <a:prstGeom prst="rect">
             <a:avLst/>
@@ -4006,18 +4940,19 @@
             <a:pPr>
               <a:defRPr sz="1200" b="1">
                 <a:solidFill>
-                  <a:srgbClr val="D33B3B"/>
-                </a:solidFill>
-              </a:defRPr>
-            </a:pPr>
-            <a:r>
-              <a:t>THE DATA PRINCIPAL (NON-USER)</a:t>
+                  <a:srgbClr val="2B5CE0"/>
+                </a:solidFill>
+                <a:latin typeface="Inter"/>
+              </a:defRPr>
+            </a:pPr>
+            <a:r>
+              <a:t>ACTIVE USER SYNC (CONSENTER)</a:t>
             </a:r>
           </a:p>
           <a:p>
             <a:pPr>
               <a:spcBef>
-                <a:spcPts val="1000"/>
+                <a:spcPts val="1200"/>
               </a:spcBef>
               <a:defRPr sz="1300">
                 <a:solidFill>
@@ -4027,13 +4962,13 @@
               </a:defRPr>
             </a:pPr>
             <a:r>
-              <a:t>• No Consent Transaction: Details listed and circulated to strangers with zero notice or direct opt-in agreements.</a:t>
+              <a:t>• Uploads address books to unlock caller ID lookup.</a:t>
             </a:r>
           </a:p>
           <a:p>
             <a:pPr>
               <a:spcBef>
-                <a:spcPts val="1000"/>
+                <a:spcPts val="1200"/>
               </a:spcBef>
               <a:defRPr sz="1300">
                 <a:solidFill>
@@ -4043,13 +4978,13 @@
               </a:defRPr>
             </a:pPr>
             <a:r>
-              <a:t>• Inaccuracy Damage: Incorrect tags or spam ratings harm reputation, with no direct way to correct or remove.</a:t>
+              <a:t>• Consents only for their own data processing.</a:t>
             </a:r>
           </a:p>
           <a:p>
             <a:pPr>
               <a:spcBef>
-                <a:spcPts val="1000"/>
+                <a:spcPts val="1200"/>
               </a:spcBef>
               <a:defRPr sz="1300">
                 <a:solidFill>
@@ -4059,13 +4994,92 @@
               </a:defRPr>
             </a:pPr>
             <a:r>
-              <a:t>• Vulnerable Exposure: Minors' and vulnerable individuals' details are listed via parental contact syncs.</a:t>
+              <a:t>• Shares third-party numbers, mapping names and spam flags silently.</a:t>
+            </a:r>
+          </a:p>
+        </p:txBody>
+      </p:sp>
+      <p:sp>
+        <p:nvSpPr>
+          <p:cNvPr id="8" name="Rounded Rectangle 7"/>
+          <p:cNvSpPr/>
+          <p:nvPr/>
+        </p:nvSpPr>
+        <p:spPr>
+          <a:xfrm>
+            <a:off x="6217920" y="2743200"/>
+            <a:ext cx="5212080" cy="3291840"/>
+          </a:xfrm>
+          <a:prstGeom prst="roundRect">
+            <a:avLst/>
+          </a:prstGeom>
+          <a:solidFill>
+            <a:srgbClr val="F5F6F8"/>
+          </a:solidFill>
+          <a:ln>
+            <a:noFill/>
+          </a:ln>
+        </p:spPr>
+        <p:style>
+          <a:lnRef idx="1">
+            <a:schemeClr val="accent1"/>
+          </a:lnRef>
+          <a:fillRef idx="3">
+            <a:schemeClr val="accent1"/>
+          </a:fillRef>
+          <a:effectRef idx="2">
+            <a:schemeClr val="accent1"/>
+          </a:effectRef>
+          <a:fontRef idx="minor">
+            <a:schemeClr val="lt1"/>
+          </a:fontRef>
+        </p:style>
+        <p:txBody>
+          <a:bodyPr rtlCol="0" anchor="ctr"/>
+          <a:lstStyle/>
+          <a:p>
+            <a:pPr algn="ctr"/>
+          </a:p>
+        </p:txBody>
+      </p:sp>
+      <p:sp>
+        <p:nvSpPr>
+          <p:cNvPr id="9" name="TextBox 8"/>
+          <p:cNvSpPr txBox="1"/>
+          <p:nvPr/>
+        </p:nvSpPr>
+        <p:spPr>
+          <a:xfrm>
+            <a:off x="6400800" y="2926080"/>
+            <a:ext cx="4846320" cy="2926080"/>
+          </a:xfrm>
+          <a:prstGeom prst="rect">
+            <a:avLst/>
+          </a:prstGeom>
+          <a:noFill/>
+        </p:spPr>
+        <p:txBody>
+          <a:bodyPr wrap="square">
+            <a:spAutoFit/>
+          </a:bodyPr>
+          <a:lstStyle/>
+          <a:p>
+            <a:pPr>
+              <a:defRPr sz="1200" b="1">
+                <a:solidFill>
+                  <a:srgbClr val="D33B3B"/>
+                </a:solidFill>
+                <a:latin typeface="Inter"/>
+              </a:defRPr>
+            </a:pPr>
+            <a:r>
+              <a:t>COMPLIANCE &amp; PRODUCT ASSUMPTIONS</a:t>
             </a:r>
           </a:p>
           <a:p>
             <a:pPr>
               <a:spcBef>
-                <a:spcPts val="1000"/>
+                <a:spcPts val="1200"/>
               </a:spcBef>
               <a:defRPr sz="1300">
                 <a:solidFill>
@@ -4075,7 +5089,39 @@
               </a:defRPr>
             </a:pPr>
             <a:r>
-              <a:t>• Compliance risk: Under India's DPDP Act 2023, data principals hold rights of access, correction, and erasure.</a:t>
+              <a:t>• DPDP Access &amp; Correction Rights: Data subjects must have accessible pathways to check and correct directory inaccuracies.</a:t>
+            </a:r>
+          </a:p>
+          <a:p>
+            <a:pPr>
+              <a:spcBef>
+                <a:spcPts val="1200"/>
+              </a:spcBef>
+              <a:defRPr sz="1300">
+                <a:solidFill>
+                  <a:srgbClr val="111318"/>
+                </a:solidFill>
+                <a:latin typeface="Inter"/>
+              </a:defRPr>
+            </a:pPr>
+            <a:r>
+              <a:t>• Purpose Limitation: Crowdsourced contact listings should not bypass reasonable erasure requests by owners.</a:t>
+            </a:r>
+          </a:p>
+          <a:p>
+            <a:pPr>
+              <a:spcBef>
+                <a:spcPts val="1200"/>
+              </a:spcBef>
+              <a:defRPr sz="1300">
+                <a:solidFill>
+                  <a:srgbClr val="111318"/>
+                </a:solidFill>
+                <a:latin typeface="Inter"/>
+              </a:defRPr>
+            </a:pPr>
+            <a:r>
+              <a:t>• Strategic Trust Advantage: Proactively offering agency avoids litigation risks and converts skeptics to active users.</a:t>
             </a:r>
           </a:p>
         </p:txBody>
@@ -4187,7 +5233,7 @@
         <p:spPr>
           <a:xfrm>
             <a:off x="731520" y="1645920"/>
-            <a:ext cx="3474720" cy="4389120"/>
+            <a:ext cx="4114800" cy="4389120"/>
           </a:xfrm>
           <a:prstGeom prst="roundRect">
             <a:avLst/>
@@ -4230,7 +5276,7 @@
         <p:spPr>
           <a:xfrm>
             <a:off x="914400" y="1828800"/>
-            <a:ext cx="3108960" cy="4023360"/>
+            <a:ext cx="3749039" cy="4023360"/>
           </a:xfrm>
           <a:prstGeom prst="rect">
             <a:avLst/>
@@ -4259,18 +5305,14 @@
               <a:spcBef>
                 <a:spcPts val="400"/>
               </a:spcBef>
-              <a:defRPr sz="1200">
-                <a:solidFill>
-                  <a:srgbClr val="4B5160"/>
-                </a:solidFill>
-              </a:defRPr>
-            </a:pPr>
-            <a:r>
-              <a:t>Operations Manager</a:t>
-            </a:r>
-            <a:br/>
-            <a:r>
-              <a:t>Never installed Truecaller.</a:t>
+              <a:defRPr sz="1200" b="1">
+                <a:solidFill>
+                  <a:srgbClr val="2B5CE0"/>
+                </a:solidFill>
+              </a:defRPr>
+            </a:pPr>
+            <a:r>
+              <a:t>Operations Manager  •  Non-User</a:t>
             </a:r>
           </a:p>
           <a:p>
@@ -4278,28 +5320,94 @@
               <a:spcBef>
                 <a:spcPts val="1600"/>
               </a:spcBef>
-              <a:defRPr sz="1100" i="1">
+              <a:defRPr sz="1250">
                 <a:solidFill>
                   <a:srgbClr val="4B5160"/>
                 </a:solidFill>
               </a:defRPr>
             </a:pPr>
             <a:r>
-              <a:t>"My number is shared in dozens of address books by colleagues, family, and vendors. Occasionally I hear that my calls show up as 'R. Menon' or under wrong company tags. I don't use this app, but it decides how the world identifies me."</a:t>
-            </a:r>
-          </a:p>
-        </p:txBody>
-      </p:sp>
-      <p:sp>
-        <p:nvSpPr>
-          <p:cNvPr id="6" name="TextBox 5"/>
+              <a:t>CONTEXT &amp; TRIGGER:</a:t>
+            </a:r>
+            <a:br/>
+            <a:r>
+              <a:t>A business contact tells Rekha that her calls are popping up as "Spam" or a misspelled name tag on their handset caller ID, directly impacting operational communications and her reputation.</a:t>
+            </a:r>
+          </a:p>
+          <a:p>
+            <a:pPr>
+              <a:spcBef>
+                <a:spcPts val="1600"/>
+              </a:spcBef>
+              <a:defRPr sz="1250" b="1">
+                <a:solidFill>
+                  <a:srgbClr val="111318"/>
+                </a:solidFill>
+              </a:defRPr>
+            </a:pPr>
+            <a:r>
+              <a:t>JOBS TO BE DONE:</a:t>
+            </a:r>
+            <a:br/>
+            <a:r>
+              <a:t>"When my phone number is identified, I want to control the displayed details so that I can maintain my professional reputation and privacy."</a:t>
+            </a:r>
+          </a:p>
+        </p:txBody>
+      </p:sp>
+      <p:sp>
+        <p:nvSpPr>
+          <p:cNvPr id="6" name="Rounded Rectangle 5"/>
+          <p:cNvSpPr/>
+          <p:nvPr/>
+        </p:nvSpPr>
+        <p:spPr>
+          <a:xfrm>
+            <a:off x="5120640" y="1645920"/>
+            <a:ext cx="6309360" cy="4389120"/>
+          </a:xfrm>
+          <a:prstGeom prst="roundRect">
+            <a:avLst/>
+          </a:prstGeom>
+          <a:solidFill>
+            <a:srgbClr val="F5F6F8"/>
+          </a:solidFill>
+          <a:ln>
+            <a:noFill/>
+          </a:ln>
+        </p:spPr>
+        <p:style>
+          <a:lnRef idx="1">
+            <a:schemeClr val="accent1"/>
+          </a:lnRef>
+          <a:fillRef idx="3">
+            <a:schemeClr val="accent1"/>
+          </a:fillRef>
+          <a:effectRef idx="2">
+            <a:schemeClr val="accent1"/>
+          </a:effectRef>
+          <a:fontRef idx="minor">
+            <a:schemeClr val="lt1"/>
+          </a:fontRef>
+        </p:style>
+        <p:txBody>
+          <a:bodyPr rtlCol="0" anchor="ctr"/>
+          <a:lstStyle/>
+          <a:p>
+            <a:pPr algn="ctr"/>
+          </a:p>
+        </p:txBody>
+      </p:sp>
+      <p:sp>
+        <p:nvSpPr>
+          <p:cNvPr id="7" name="TextBox 6"/>
           <p:cNvSpPr txBox="1"/>
           <p:nvPr/>
         </p:nvSpPr>
         <p:spPr>
           <a:xfrm>
-            <a:off x="4572000" y="1645920"/>
-            <a:ext cx="6858000" cy="4389120"/>
+            <a:off x="5303520" y="1828800"/>
+            <a:ext cx="5943600" cy="4023360"/>
           </a:xfrm>
           <a:prstGeom prst="rect">
             <a:avLst/>
@@ -4313,106 +5421,104 @@
           <a:lstStyle/>
           <a:p>
             <a:pPr>
-              <a:defRPr sz="1200" b="1">
+              <a:defRPr sz="1300" b="1">
                 <a:solidFill>
                   <a:srgbClr val="2B5CE0"/>
                 </a:solidFill>
               </a:defRPr>
             </a:pPr>
             <a:r>
-              <a:t>CORE PAIN POINTS &amp; STRATEGIC IMPORTANCE</a:t>
+              <a:t>TOP 3 CONCRETE PAIN POINTS</a:t>
             </a:r>
           </a:p>
           <a:p>
             <a:pPr>
               <a:spcBef>
-                <a:spcPts val="1200"/>
+                <a:spcPts val="1400"/>
               </a:spcBef>
-              <a:defRPr sz="1300" b="1">
+              <a:defRPr sz="1350" b="1">
                 <a:solidFill>
                   <a:srgbClr val="111318"/>
                 </a:solidFill>
               </a:defRPr>
             </a:pPr>
             <a:r>
-              <a:t>• Opaque Directory footprint: </a:t>
-            </a:r>
-            <a:r>
-              <a:rPr b="0" sz="1300">
+              <a:t>1. Zero Notice of Exposure</a:t>
+            </a:r>
+          </a:p>
+          <a:p>
+            <a:pPr>
+              <a:spcBef>
+                <a:spcPts val="200"/>
+              </a:spcBef>
+              <a:defRPr sz="1200">
                 <a:solidFill>
                   <a:srgbClr val="4B5160"/>
                 </a:solidFill>
-              </a:rPr>
-              <a:t>No direct notification is sent to people when their details are added or tagged in the lookup directory.</a:t>
+              </a:defRPr>
+            </a:pPr>
+            <a:r>
+              <a:t>No direct notifications are dispatched when crowdsourced contact lists list their details on search directories.</a:t>
             </a:r>
           </a:p>
           <a:p>
             <a:pPr>
               <a:spcBef>
-                <a:spcPts val="1200"/>
+                <a:spcPts val="1400"/>
               </a:spcBef>
-              <a:defRPr sz="1300" b="1">
+              <a:defRPr sz="1350" b="1">
                 <a:solidFill>
                   <a:srgbClr val="111318"/>
                 </a:solidFill>
               </a:defRPr>
             </a:pPr>
             <a:r>
-              <a:t>• Buried Correction Pathways: </a:t>
-            </a:r>
-            <a:r>
-              <a:rPr b="0" sz="1300">
+              <a:t>2. Hidden Recourse Pathways</a:t>
+            </a:r>
+          </a:p>
+          <a:p>
+            <a:pPr>
+              <a:spcBef>
+                <a:spcPts val="200"/>
+              </a:spcBef>
+              <a:defRPr sz="1200">
                 <a:solidFill>
                   <a:srgbClr val="4B5160"/>
                 </a:solidFill>
-              </a:rPr>
-              <a:t>Fixing incorrect spellings or spam flags historically required navigating complex, buried support ticketers.</a:t>
+              </a:defRPr>
+            </a:pPr>
+            <a:r>
+              <a:t>Opt-out links are historically buried, requiring manual grievance ticketing rather than self-serve panels.</a:t>
             </a:r>
           </a:p>
           <a:p>
             <a:pPr>
               <a:spcBef>
-                <a:spcPts val="1200"/>
+                <a:spcPts val="1400"/>
               </a:spcBef>
-              <a:defRPr sz="1300" b="1">
+              <a:defRPr sz="1350" b="1">
                 <a:solidFill>
                   <a:srgbClr val="111318"/>
                 </a:solidFill>
               </a:defRPr>
             </a:pPr>
             <a:r>
-              <a:t>• Lack of Provenance: </a:t>
-            </a:r>
-            <a:r>
-              <a:rPr b="0" sz="1300">
+              <a:t>3. Opaque Data Provenance</a:t>
+            </a:r>
+          </a:p>
+          <a:p>
+            <a:pPr>
+              <a:spcBef>
+                <a:spcPts val="200"/>
+              </a:spcBef>
+              <a:defRPr sz="1200">
                 <a:solidFill>
                   <a:srgbClr val="4B5160"/>
                 </a:solidFill>
-              </a:rPr>
-              <a:t>Subjects cannot trace why they were tagged or how many contact syncs contributed to their classification status.</a:t>
-            </a:r>
-          </a:p>
-          <a:p>
-            <a:pPr>
-              <a:spcBef>
-                <a:spcPts val="1200"/>
-              </a:spcBef>
-              <a:defRPr sz="1300" b="1">
-                <a:solidFill>
-                  <a:srgbClr val="111318"/>
-                </a:solidFill>
-              </a:defRPr>
-            </a:pPr>
-            <a:r>
-              <a:t>• Ownership Authentication Friction: </a:t>
-            </a:r>
-            <a:r>
-              <a:rPr b="0" sz="1300">
-                <a:solidFill>
-                  <a:srgbClr val="4B5160"/>
-                </a:solidFill>
-              </a:rPr>
-              <a:t>Proving a SIM card belongs to you to request erasure without creating security spoofing vectors.</a:t>
+              </a:defRPr>
+            </a:pPr>
+            <a:r>
+              <a:t>Subjects cannot discover where directory data comes from or track how many syncs contribute to spam tags.</a:t>
             </a:r>
           </a:p>
         </p:txBody>
@@ -4510,7 +5616,7 @@
               </a:defRPr>
             </a:pPr>
             <a:r>
-              <a:t>The Current Journey: Opaque Directory Surfacing</a:t>
+              <a:t>The Current Journey: Friction &amp; Recourse Gaps</a:t>
             </a:r>
           </a:p>
         </p:txBody>
@@ -4524,7 +5630,7 @@
         <p:spPr>
           <a:xfrm>
             <a:off x="731520" y="2011680"/>
-            <a:ext cx="3291840" cy="3657600"/>
+            <a:ext cx="1645920" cy="2194560"/>
           </a:xfrm>
           <a:prstGeom prst="roundRect">
             <a:avLst/>
@@ -4566,8 +5672,8 @@
         </p:nvSpPr>
         <p:spPr>
           <a:xfrm>
-            <a:off x="822960" y="2103120"/>
-            <a:ext cx="3108960" cy="3474720"/>
+            <a:off x="777240" y="2103120"/>
+            <a:ext cx="1554480" cy="2011680"/>
           </a:xfrm>
           <a:prstGeom prst="rect">
             <a:avLst/>
@@ -4581,14 +5687,14 @@
           <a:lstStyle/>
           <a:p>
             <a:pPr>
-              <a:defRPr b="1" sz="1300">
-                <a:solidFill>
-                  <a:srgbClr val="2B5CE0"/>
-                </a:solidFill>
-              </a:defRPr>
-            </a:pPr>
-            <a:r>
-              <a:t>1. HARVEST &amp; CLASSIFY</a:t>
+              <a:defRPr sz="1400" b="1">
+                <a:solidFill>
+                  <a:srgbClr val="111318"/>
+                </a:solidFill>
+              </a:defRPr>
+            </a:pPr>
+            <a:r>
+              <a:t>01</a:t>
             </a:r>
           </a:p>
           <a:p>
@@ -4596,28 +5702,86 @@
               <a:spcBef>
                 <a:spcPts val="800"/>
               </a:spcBef>
-              <a:defRPr sz="1200">
+              <a:defRPr sz="1300" b="1">
+                <a:solidFill>
+                  <a:srgbClr val="111318"/>
+                </a:solidFill>
+              </a:defRPr>
+            </a:pPr>
+            <a:r>
+              <a:t>Data Contributed</a:t>
+            </a:r>
+          </a:p>
+          <a:p>
+            <a:pPr>
+              <a:spcBef>
+                <a:spcPts val="800"/>
+              </a:spcBef>
+              <a:defRPr sz="1100">
                 <a:solidFill>
                   <a:srgbClr val="4B5160"/>
                 </a:solidFill>
               </a:defRPr>
             </a:pPr>
             <a:r>
-              <a:t>Contacts uploaded in bulk. Name records aggregated, assigning a visual identity or spam label. The affected subject has zero notice.</a:t>
-            </a:r>
-          </a:p>
-        </p:txBody>
-      </p:sp>
-      <p:sp>
-        <p:nvSpPr>
-          <p:cNvPr id="6" name="Rounded Rectangle 5"/>
+              <a:t>Contacts synced silently</a:t>
+            </a:r>
+          </a:p>
+        </p:txBody>
+      </p:sp>
+      <p:sp>
+        <p:nvSpPr>
+          <p:cNvPr id="6" name="Right Arrow 5"/>
           <p:cNvSpPr/>
           <p:nvPr/>
         </p:nvSpPr>
         <p:spPr>
           <a:xfrm>
-            <a:off x="4389120" y="2011680"/>
-            <a:ext cx="3291840" cy="3657600"/>
+            <a:off x="2395728" y="2926080"/>
+            <a:ext cx="146304" cy="365760"/>
+          </a:xfrm>
+          <a:prstGeom prst="rightArrow">
+            <a:avLst/>
+          </a:prstGeom>
+          <a:solidFill>
+            <a:srgbClr val="E4E7EC"/>
+          </a:solidFill>
+          <a:ln>
+            <a:noFill/>
+          </a:ln>
+        </p:spPr>
+        <p:style>
+          <a:lnRef idx="1">
+            <a:schemeClr val="accent1"/>
+          </a:lnRef>
+          <a:fillRef idx="3">
+            <a:schemeClr val="accent1"/>
+          </a:fillRef>
+          <a:effectRef idx="2">
+            <a:schemeClr val="accent1"/>
+          </a:effectRef>
+          <a:fontRef idx="minor">
+            <a:schemeClr val="lt1"/>
+          </a:fontRef>
+        </p:style>
+        <p:txBody>
+          <a:bodyPr rtlCol="0" anchor="ctr"/>
+          <a:lstStyle/>
+          <a:p>
+            <a:pPr algn="ctr"/>
+          </a:p>
+        </p:txBody>
+      </p:sp>
+      <p:sp>
+        <p:nvSpPr>
+          <p:cNvPr id="7" name="Rounded Rectangle 6"/>
+          <p:cNvSpPr/>
+          <p:nvPr/>
+        </p:nvSpPr>
+        <p:spPr>
+          <a:xfrm>
+            <a:off x="2560320" y="2011680"/>
+            <a:ext cx="1645920" cy="2194560"/>
           </a:xfrm>
           <a:prstGeom prst="roundRect">
             <a:avLst/>
@@ -4653,14 +5817,14 @@
       </p:sp>
       <p:sp>
         <p:nvSpPr>
-          <p:cNvPr id="7" name="TextBox 6"/>
+          <p:cNvPr id="8" name="TextBox 7"/>
           <p:cNvSpPr txBox="1"/>
           <p:nvPr/>
         </p:nvSpPr>
         <p:spPr>
           <a:xfrm>
-            <a:off x="4480560" y="2103120"/>
-            <a:ext cx="3108960" cy="3474720"/>
+            <a:off x="2606040" y="2103120"/>
+            <a:ext cx="1554480" cy="2011680"/>
           </a:xfrm>
           <a:prstGeom prst="rect">
             <a:avLst/>
@@ -4674,14 +5838,14 @@
           <a:lstStyle/>
           <a:p>
             <a:pPr>
-              <a:defRPr b="1" sz="1300">
-                <a:solidFill>
-                  <a:srgbClr val="2B5CE0"/>
-                </a:solidFill>
-              </a:defRPr>
-            </a:pPr>
-            <a:r>
-              <a:t>2. PUBLIC EXPOSURE</a:t>
+              <a:defRPr sz="1400" b="1">
+                <a:solidFill>
+                  <a:srgbClr val="111318"/>
+                </a:solidFill>
+              </a:defRPr>
+            </a:pPr>
+            <a:r>
+              <a:t>02</a:t>
             </a:r>
           </a:p>
           <a:p>
@@ -4689,28 +5853,86 @@
               <a:spcBef>
                 <a:spcPts val="800"/>
               </a:spcBef>
-              <a:defRPr sz="1200">
+              <a:defRPr sz="1300" b="1">
+                <a:solidFill>
+                  <a:srgbClr val="111318"/>
+                </a:solidFill>
+              </a:defRPr>
+            </a:pPr>
+            <a:r>
+              <a:t>Identity Inferred</a:t>
+            </a:r>
+          </a:p>
+          <a:p>
+            <a:pPr>
+              <a:spcBef>
+                <a:spcPts val="800"/>
+              </a:spcBef>
+              <a:defRPr sz="1100">
                 <a:solidFill>
                   <a:srgbClr val="4B5160"/>
                 </a:solidFill>
               </a:defRPr>
             </a:pPr>
             <a:r>
-              <a:t>Strangers see incorrect spellings or tags when receiving calls from the subject. The subject only learns of the issue via external complaints.</a:t>
-            </a:r>
-          </a:p>
-        </p:txBody>
-      </p:sp>
-      <p:sp>
-        <p:nvSpPr>
-          <p:cNvPr id="8" name="Rounded Rectangle 7"/>
+              <a:t>Listing generated</a:t>
+            </a:r>
+          </a:p>
+        </p:txBody>
+      </p:sp>
+      <p:sp>
+        <p:nvSpPr>
+          <p:cNvPr id="9" name="Right Arrow 8"/>
           <p:cNvSpPr/>
           <p:nvPr/>
         </p:nvSpPr>
         <p:spPr>
           <a:xfrm>
-            <a:off x="8046720" y="2011680"/>
-            <a:ext cx="3383280" cy="3657600"/>
+            <a:off x="4224528" y="2926080"/>
+            <a:ext cx="146304" cy="365760"/>
+          </a:xfrm>
+          <a:prstGeom prst="rightArrow">
+            <a:avLst/>
+          </a:prstGeom>
+          <a:solidFill>
+            <a:srgbClr val="E4E7EC"/>
+          </a:solidFill>
+          <a:ln>
+            <a:noFill/>
+          </a:ln>
+        </p:spPr>
+        <p:style>
+          <a:lnRef idx="1">
+            <a:schemeClr val="accent1"/>
+          </a:lnRef>
+          <a:fillRef idx="3">
+            <a:schemeClr val="accent1"/>
+          </a:fillRef>
+          <a:effectRef idx="2">
+            <a:schemeClr val="accent1"/>
+          </a:effectRef>
+          <a:fontRef idx="minor">
+            <a:schemeClr val="lt1"/>
+          </a:fontRef>
+        </p:style>
+        <p:txBody>
+          <a:bodyPr rtlCol="0" anchor="ctr"/>
+          <a:lstStyle/>
+          <a:p>
+            <a:pPr algn="ctr"/>
+          </a:p>
+        </p:txBody>
+      </p:sp>
+      <p:sp>
+        <p:nvSpPr>
+          <p:cNvPr id="10" name="Rounded Rectangle 9"/>
+          <p:cNvSpPr/>
+          <p:nvPr/>
+        </p:nvSpPr>
+        <p:spPr>
+          <a:xfrm>
+            <a:off x="4389120" y="2011680"/>
+            <a:ext cx="1645920" cy="2194560"/>
           </a:xfrm>
           <a:prstGeom prst="roundRect">
             <a:avLst/>
@@ -4746,14 +5968,14 @@
       </p:sp>
       <p:sp>
         <p:nvSpPr>
-          <p:cNvPr id="9" name="TextBox 8"/>
+          <p:cNvPr id="11" name="TextBox 10"/>
           <p:cNvSpPr txBox="1"/>
           <p:nvPr/>
         </p:nvSpPr>
         <p:spPr>
           <a:xfrm>
-            <a:off x="8138160" y="2103120"/>
-            <a:ext cx="3200400" cy="3474720"/>
+            <a:off x="4434840" y="2103120"/>
+            <a:ext cx="1554480" cy="2011680"/>
           </a:xfrm>
           <a:prstGeom prst="rect">
             <a:avLst/>
@@ -4767,14 +5989,14 @@
           <a:lstStyle/>
           <a:p>
             <a:pPr>
-              <a:defRPr b="1" sz="1300">
-                <a:solidFill>
-                  <a:srgbClr val="D33B3B"/>
-                </a:solidFill>
-              </a:defRPr>
-            </a:pPr>
-            <a:r>
-              <a:t>3. OPAQUE RECOURSE</a:t>
+              <a:defRPr sz="1400" b="1">
+                <a:solidFill>
+                  <a:srgbClr val="111318"/>
+                </a:solidFill>
+              </a:defRPr>
+            </a:pPr>
+            <a:r>
+              <a:t>03</a:t>
             </a:r>
           </a:p>
           <a:p>
@@ -4782,14 +6004,525 @@
               <a:spcBef>
                 <a:spcPts val="800"/>
               </a:spcBef>
-              <a:defRPr sz="1200">
+              <a:defRPr sz="1300" b="1">
+                <a:solidFill>
+                  <a:srgbClr val="111318"/>
+                </a:solidFill>
+              </a:defRPr>
+            </a:pPr>
+            <a:r>
+              <a:t>Caller ID Surfaced</a:t>
+            </a:r>
+          </a:p>
+          <a:p>
+            <a:pPr>
+              <a:spcBef>
+                <a:spcPts val="800"/>
+              </a:spcBef>
+              <a:defRPr sz="1100">
                 <a:solidFill>
                   <a:srgbClr val="4B5160"/>
                 </a:solidFill>
               </a:defRPr>
             </a:pPr>
             <a:r>
-              <a:t>Opt-out links are buried. Proving SIM ownership to request unlisting causes friction. Status updates are hidden, leaving users anxious.</a:t>
+              <a:t>Strangers see tags</a:t>
+            </a:r>
+          </a:p>
+        </p:txBody>
+      </p:sp>
+      <p:sp>
+        <p:nvSpPr>
+          <p:cNvPr id="12" name="Right Arrow 11"/>
+          <p:cNvSpPr/>
+          <p:nvPr/>
+        </p:nvSpPr>
+        <p:spPr>
+          <a:xfrm>
+            <a:off x="6053328" y="2926080"/>
+            <a:ext cx="146304" cy="365760"/>
+          </a:xfrm>
+          <a:prstGeom prst="rightArrow">
+            <a:avLst/>
+          </a:prstGeom>
+          <a:solidFill>
+            <a:srgbClr val="E4E7EC"/>
+          </a:solidFill>
+          <a:ln>
+            <a:noFill/>
+          </a:ln>
+        </p:spPr>
+        <p:style>
+          <a:lnRef idx="1">
+            <a:schemeClr val="accent1"/>
+          </a:lnRef>
+          <a:fillRef idx="3">
+            <a:schemeClr val="accent1"/>
+          </a:fillRef>
+          <a:effectRef idx="2">
+            <a:schemeClr val="accent1"/>
+          </a:effectRef>
+          <a:fontRef idx="minor">
+            <a:schemeClr val="lt1"/>
+          </a:fontRef>
+        </p:style>
+        <p:txBody>
+          <a:bodyPr rtlCol="0" anchor="ctr"/>
+          <a:lstStyle/>
+          <a:p>
+            <a:pPr algn="ctr"/>
+          </a:p>
+        </p:txBody>
+      </p:sp>
+      <p:sp>
+        <p:nvSpPr>
+          <p:cNvPr id="13" name="Rounded Rectangle 12"/>
+          <p:cNvSpPr/>
+          <p:nvPr/>
+        </p:nvSpPr>
+        <p:spPr>
+          <a:xfrm>
+            <a:off x="6217920" y="2011680"/>
+            <a:ext cx="1645920" cy="2194560"/>
+          </a:xfrm>
+          <a:prstGeom prst="roundRect">
+            <a:avLst/>
+          </a:prstGeom>
+          <a:solidFill>
+            <a:srgbClr val="C57A11"/>
+          </a:solidFill>
+          <a:ln>
+            <a:noFill/>
+          </a:ln>
+        </p:spPr>
+        <p:style>
+          <a:lnRef idx="1">
+            <a:schemeClr val="accent1"/>
+          </a:lnRef>
+          <a:fillRef idx="3">
+            <a:schemeClr val="accent1"/>
+          </a:fillRef>
+          <a:effectRef idx="2">
+            <a:schemeClr val="accent1"/>
+          </a:effectRef>
+          <a:fontRef idx="minor">
+            <a:schemeClr val="lt1"/>
+          </a:fontRef>
+        </p:style>
+        <p:txBody>
+          <a:bodyPr rtlCol="0" anchor="ctr"/>
+          <a:lstStyle/>
+          <a:p>
+            <a:pPr algn="ctr"/>
+          </a:p>
+        </p:txBody>
+      </p:sp>
+      <p:sp>
+        <p:nvSpPr>
+          <p:cNvPr id="14" name="TextBox 13"/>
+          <p:cNvSpPr txBox="1"/>
+          <p:nvPr/>
+        </p:nvSpPr>
+        <p:spPr>
+          <a:xfrm>
+            <a:off x="6263640" y="2103120"/>
+            <a:ext cx="1554480" cy="2011680"/>
+          </a:xfrm>
+          <a:prstGeom prst="rect">
+            <a:avLst/>
+          </a:prstGeom>
+          <a:noFill/>
+        </p:spPr>
+        <p:txBody>
+          <a:bodyPr wrap="square">
+            <a:spAutoFit/>
+          </a:bodyPr>
+          <a:lstStyle/>
+          <a:p>
+            <a:pPr>
+              <a:defRPr sz="1400" b="1">
+                <a:solidFill>
+                  <a:srgbClr val="FFFFFF"/>
+                </a:solidFill>
+              </a:defRPr>
+            </a:pPr>
+            <a:r>
+              <a:t>04</a:t>
+            </a:r>
+          </a:p>
+          <a:p>
+            <a:pPr>
+              <a:spcBef>
+                <a:spcPts val="800"/>
+              </a:spcBef>
+              <a:defRPr sz="1300" b="1">
+                <a:solidFill>
+                  <a:srgbClr val="FFFFFF"/>
+                </a:solidFill>
+              </a:defRPr>
+            </a:pPr>
+            <a:r>
+              <a:t>Subject Discovers</a:t>
+            </a:r>
+          </a:p>
+          <a:p>
+            <a:pPr>
+              <a:spcBef>
+                <a:spcPts val="800"/>
+              </a:spcBef>
+              <a:defRPr sz="1100">
+                <a:solidFill>
+                  <a:srgbClr val="FFFFFF"/>
+                </a:solidFill>
+              </a:defRPr>
+            </a:pPr>
+            <a:r>
+              <a:t>Learns indirectly</a:t>
+            </a:r>
+          </a:p>
+        </p:txBody>
+      </p:sp>
+      <p:sp>
+        <p:nvSpPr>
+          <p:cNvPr id="15" name="Right Arrow 14"/>
+          <p:cNvSpPr/>
+          <p:nvPr/>
+        </p:nvSpPr>
+        <p:spPr>
+          <a:xfrm>
+            <a:off x="7882128" y="2926080"/>
+            <a:ext cx="146304" cy="365760"/>
+          </a:xfrm>
+          <a:prstGeom prst="rightArrow">
+            <a:avLst/>
+          </a:prstGeom>
+          <a:solidFill>
+            <a:srgbClr val="E4E7EC"/>
+          </a:solidFill>
+          <a:ln>
+            <a:noFill/>
+          </a:ln>
+        </p:spPr>
+        <p:style>
+          <a:lnRef idx="1">
+            <a:schemeClr val="accent1"/>
+          </a:lnRef>
+          <a:fillRef idx="3">
+            <a:schemeClr val="accent1"/>
+          </a:fillRef>
+          <a:effectRef idx="2">
+            <a:schemeClr val="accent1"/>
+          </a:effectRef>
+          <a:fontRef idx="minor">
+            <a:schemeClr val="lt1"/>
+          </a:fontRef>
+        </p:style>
+        <p:txBody>
+          <a:bodyPr rtlCol="0" anchor="ctr"/>
+          <a:lstStyle/>
+          <a:p>
+            <a:pPr algn="ctr"/>
+          </a:p>
+        </p:txBody>
+      </p:sp>
+      <p:sp>
+        <p:nvSpPr>
+          <p:cNvPr id="16" name="Rounded Rectangle 15"/>
+          <p:cNvSpPr/>
+          <p:nvPr/>
+        </p:nvSpPr>
+        <p:spPr>
+          <a:xfrm>
+            <a:off x="8046720" y="2011680"/>
+            <a:ext cx="1645920" cy="2194560"/>
+          </a:xfrm>
+          <a:prstGeom prst="roundRect">
+            <a:avLst/>
+          </a:prstGeom>
+          <a:solidFill>
+            <a:srgbClr val="D33B3B"/>
+          </a:solidFill>
+          <a:ln>
+            <a:noFill/>
+          </a:ln>
+        </p:spPr>
+        <p:style>
+          <a:lnRef idx="1">
+            <a:schemeClr val="accent1"/>
+          </a:lnRef>
+          <a:fillRef idx="3">
+            <a:schemeClr val="accent1"/>
+          </a:fillRef>
+          <a:effectRef idx="2">
+            <a:schemeClr val="accent1"/>
+          </a:effectRef>
+          <a:fontRef idx="minor">
+            <a:schemeClr val="lt1"/>
+          </a:fontRef>
+        </p:style>
+        <p:txBody>
+          <a:bodyPr rtlCol="0" anchor="ctr"/>
+          <a:lstStyle/>
+          <a:p>
+            <a:pPr algn="ctr"/>
+          </a:p>
+        </p:txBody>
+      </p:sp>
+      <p:sp>
+        <p:nvSpPr>
+          <p:cNvPr id="17" name="TextBox 16"/>
+          <p:cNvSpPr txBox="1"/>
+          <p:nvPr/>
+        </p:nvSpPr>
+        <p:spPr>
+          <a:xfrm>
+            <a:off x="8092440" y="2103120"/>
+            <a:ext cx="1554480" cy="2011680"/>
+          </a:xfrm>
+          <a:prstGeom prst="rect">
+            <a:avLst/>
+          </a:prstGeom>
+          <a:noFill/>
+        </p:spPr>
+        <p:txBody>
+          <a:bodyPr wrap="square">
+            <a:spAutoFit/>
+          </a:bodyPr>
+          <a:lstStyle/>
+          <a:p>
+            <a:pPr>
+              <a:defRPr sz="1400" b="1">
+                <a:solidFill>
+                  <a:srgbClr val="FFFFFF"/>
+                </a:solidFill>
+              </a:defRPr>
+            </a:pPr>
+            <a:r>
+              <a:t>05</a:t>
+            </a:r>
+          </a:p>
+          <a:p>
+            <a:pPr>
+              <a:spcBef>
+                <a:spcPts val="800"/>
+              </a:spcBef>
+              <a:defRPr sz="1300" b="1">
+                <a:solidFill>
+                  <a:srgbClr val="FFFFFF"/>
+                </a:solidFill>
+              </a:defRPr>
+            </a:pPr>
+            <a:r>
+              <a:t>Recourse Search</a:t>
+            </a:r>
+          </a:p>
+          <a:p>
+            <a:pPr>
+              <a:spcBef>
+                <a:spcPts val="800"/>
+              </a:spcBef>
+              <a:defRPr sz="1100">
+                <a:solidFill>
+                  <a:srgbClr val="FFFFFF"/>
+                </a:solidFill>
+              </a:defRPr>
+            </a:pPr>
+            <a:r>
+              <a:t>Buried opt-out forms</a:t>
+            </a:r>
+          </a:p>
+        </p:txBody>
+      </p:sp>
+      <p:sp>
+        <p:nvSpPr>
+          <p:cNvPr id="18" name="Right Arrow 17"/>
+          <p:cNvSpPr/>
+          <p:nvPr/>
+        </p:nvSpPr>
+        <p:spPr>
+          <a:xfrm>
+            <a:off x="9710928" y="2926080"/>
+            <a:ext cx="146304" cy="365760"/>
+          </a:xfrm>
+          <a:prstGeom prst="rightArrow">
+            <a:avLst/>
+          </a:prstGeom>
+          <a:solidFill>
+            <a:srgbClr val="E4E7EC"/>
+          </a:solidFill>
+          <a:ln>
+            <a:noFill/>
+          </a:ln>
+        </p:spPr>
+        <p:style>
+          <a:lnRef idx="1">
+            <a:schemeClr val="accent1"/>
+          </a:lnRef>
+          <a:fillRef idx="3">
+            <a:schemeClr val="accent1"/>
+          </a:fillRef>
+          <a:effectRef idx="2">
+            <a:schemeClr val="accent1"/>
+          </a:effectRef>
+          <a:fontRef idx="minor">
+            <a:schemeClr val="lt1"/>
+          </a:fontRef>
+        </p:style>
+        <p:txBody>
+          <a:bodyPr rtlCol="0" anchor="ctr"/>
+          <a:lstStyle/>
+          <a:p>
+            <a:pPr algn="ctr"/>
+          </a:p>
+        </p:txBody>
+      </p:sp>
+      <p:sp>
+        <p:nvSpPr>
+          <p:cNvPr id="19" name="Rounded Rectangle 18"/>
+          <p:cNvSpPr/>
+          <p:nvPr/>
+        </p:nvSpPr>
+        <p:spPr>
+          <a:xfrm>
+            <a:off x="9875520" y="2011680"/>
+            <a:ext cx="1645920" cy="2194560"/>
+          </a:xfrm>
+          <a:prstGeom prst="roundRect">
+            <a:avLst/>
+          </a:prstGeom>
+          <a:solidFill>
+            <a:srgbClr val="D33B3B"/>
+          </a:solidFill>
+          <a:ln>
+            <a:noFill/>
+          </a:ln>
+        </p:spPr>
+        <p:style>
+          <a:lnRef idx="1">
+            <a:schemeClr val="accent1"/>
+          </a:lnRef>
+          <a:fillRef idx="3">
+            <a:schemeClr val="accent1"/>
+          </a:fillRef>
+          <a:effectRef idx="2">
+            <a:schemeClr val="accent1"/>
+          </a:effectRef>
+          <a:fontRef idx="minor">
+            <a:schemeClr val="lt1"/>
+          </a:fontRef>
+        </p:style>
+        <p:txBody>
+          <a:bodyPr rtlCol="0" anchor="ctr"/>
+          <a:lstStyle/>
+          <a:p>
+            <a:pPr algn="ctr"/>
+          </a:p>
+        </p:txBody>
+      </p:sp>
+      <p:sp>
+        <p:nvSpPr>
+          <p:cNvPr id="20" name="TextBox 19"/>
+          <p:cNvSpPr txBox="1"/>
+          <p:nvPr/>
+        </p:nvSpPr>
+        <p:spPr>
+          <a:xfrm>
+            <a:off x="9921240" y="2103120"/>
+            <a:ext cx="1554480" cy="2011680"/>
+          </a:xfrm>
+          <a:prstGeom prst="rect">
+            <a:avLst/>
+          </a:prstGeom>
+          <a:noFill/>
+        </p:spPr>
+        <p:txBody>
+          <a:bodyPr wrap="square">
+            <a:spAutoFit/>
+          </a:bodyPr>
+          <a:lstStyle/>
+          <a:p>
+            <a:pPr>
+              <a:defRPr sz="1400" b="1">
+                <a:solidFill>
+                  <a:srgbClr val="FFFFFF"/>
+                </a:solidFill>
+              </a:defRPr>
+            </a:pPr>
+            <a:r>
+              <a:t>06</a:t>
+            </a:r>
+          </a:p>
+          <a:p>
+            <a:pPr>
+              <a:spcBef>
+                <a:spcPts val="800"/>
+              </a:spcBef>
+              <a:defRPr sz="1300" b="1">
+                <a:solidFill>
+                  <a:srgbClr val="FFFFFF"/>
+                </a:solidFill>
+              </a:defRPr>
+            </a:pPr>
+            <a:r>
+              <a:t>Unclear Status</a:t>
+            </a:r>
+          </a:p>
+          <a:p>
+            <a:pPr>
+              <a:spcBef>
+                <a:spcPts val="800"/>
+              </a:spcBef>
+              <a:defRPr sz="1100">
+                <a:solidFill>
+                  <a:srgbClr val="FFFFFF"/>
+                </a:solidFill>
+              </a:defRPr>
+            </a:pPr>
+            <a:r>
+              <a:t>Anxious ticket delays</a:t>
+            </a:r>
+          </a:p>
+        </p:txBody>
+      </p:sp>
+      <p:sp>
+        <p:nvSpPr>
+          <p:cNvPr id="21" name="TextBox 20"/>
+          <p:cNvSpPr txBox="1"/>
+          <p:nvPr/>
+        </p:nvSpPr>
+        <p:spPr>
+          <a:xfrm>
+            <a:off x="731520" y="4572000"/>
+            <a:ext cx="10698480" cy="548640"/>
+          </a:xfrm>
+          <a:prstGeom prst="rect">
+            <a:avLst/>
+          </a:prstGeom>
+          <a:noFill/>
+        </p:spPr>
+        <p:txBody>
+          <a:bodyPr wrap="square">
+            <a:spAutoFit/>
+          </a:bodyPr>
+          <a:lstStyle/>
+          <a:p>
+            <a:pPr>
+              <a:defRPr sz="1100" b="1">
+                <a:solidFill>
+                  <a:srgbClr val="D33B3B"/>
+                </a:solidFill>
+              </a:defRPr>
+            </a:pPr>
+            <a:r>
+              <a:t>CRITICAL FRICTION POINTS:</a:t>
+            </a:r>
+            <a:r>
+              <a:rPr b="0">
+                <a:solidFill>
+                  <a:srgbClr val="4B5160"/>
+                </a:solidFill>
+              </a:rPr>
+              <a:t> Discovery happens via embarrassing third-party alerts. Seeking recourse is blocked by buried opt-out screens. Zero visibility on review updates creates user anxiety.</a:t>
             </a:r>
           </a:p>
         </p:txBody>
@@ -4887,148 +6620,21 @@
               </a:defRPr>
             </a:pPr>
             <a:r>
-              <a:t>Self-Serve Privacy Agency: Identity Rights Center</a:t>
-            </a:r>
-          </a:p>
-        </p:txBody>
-      </p:sp>
-      <p:sp>
-        <p:nvSpPr>
-          <p:cNvPr id="4" name="TextBox 3"/>
-          <p:cNvSpPr txBox="1"/>
-          <p:nvPr/>
-        </p:nvSpPr>
-        <p:spPr>
-          <a:xfrm>
-            <a:off x="731520" y="1645920"/>
-            <a:ext cx="5303520" cy="4389120"/>
-          </a:xfrm>
-          <a:prstGeom prst="rect">
-            <a:avLst/>
-          </a:prstGeom>
-          <a:noFill/>
-        </p:spPr>
-        <p:txBody>
-          <a:bodyPr wrap="square">
-            <a:spAutoFit/>
-          </a:bodyPr>
-          <a:lstStyle/>
-          <a:p>
-            <a:pPr>
-              <a:defRPr b="1" sz="1200">
-                <a:solidFill>
-                  <a:srgbClr val="2B5CE0"/>
-                </a:solidFill>
-              </a:defRPr>
-            </a:pPr>
-            <a:r>
-              <a:t>CORE ARCHITECTURE PILLARS</a:t>
-            </a:r>
-          </a:p>
-          <a:p>
-            <a:pPr>
-              <a:spcBef>
-                <a:spcPts val="1000"/>
-              </a:spcBef>
-              <a:defRPr sz="1300" b="1">
-                <a:solidFill>
-                  <a:srgbClr val="111318"/>
-                </a:solidFill>
-              </a:defRPr>
-            </a:pPr>
-            <a:r>
-              <a:t>• Verify (OTP Secure): </a:t>
-            </a:r>
-            <a:r>
-              <a:rPr b="0" sz="1250">
-                <a:solidFill>
-                  <a:srgbClr val="4B5160"/>
-                </a:solidFill>
-              </a:rPr>
-              <a:t>10-digit entry + 6-digit passcode auto-advance grids confirm physical SIM card ownership safely.</a:t>
-            </a:r>
-          </a:p>
-          <a:p>
-            <a:pPr>
-              <a:spcBef>
-                <a:spcPts val="1000"/>
-              </a:spcBef>
-              <a:defRPr sz="1300" b="1">
-                <a:solidFill>
-                  <a:srgbClr val="111318"/>
-                </a:solidFill>
-              </a:defRPr>
-            </a:pPr>
-            <a:r>
-              <a:t>• Discover (Data Transparency): </a:t>
-            </a:r>
-            <a:r>
-              <a:rPr b="0" sz="1250">
-                <a:solidFill>
-                  <a:srgbClr val="4B5160"/>
-                </a:solidFill>
-              </a:rPr>
-              <a:t>Shows listed displayName, exact contributing address-book uploads count, and spam scores.</a:t>
-            </a:r>
-          </a:p>
-          <a:p>
-            <a:pPr>
-              <a:spcBef>
-                <a:spcPts val="1000"/>
-              </a:spcBef>
-              <a:defRPr sz="1300" b="1">
-                <a:solidFill>
-                  <a:srgbClr val="111318"/>
-                </a:solidFill>
-              </a:defRPr>
-            </a:pPr>
-            <a:r>
-              <a:t>• Control (Correction &amp; Erasure): </a:t>
-            </a:r>
-            <a:r>
-              <a:rPr b="0" sz="1250">
-                <a:solidFill>
-                  <a:srgbClr val="4B5160"/>
-                </a:solidFill>
-              </a:rPr>
-              <a:t>Correct listings spelling or trigger unlisting requests. Features progressive-disclosure warnings explaining call-protection trade-offs.</a:t>
-            </a:r>
-          </a:p>
-          <a:p>
-            <a:pPr>
-              <a:spcBef>
-                <a:spcPts val="1000"/>
-              </a:spcBef>
-              <a:defRPr sz="1300" b="1">
-                <a:solidFill>
-                  <a:srgbClr val="111318"/>
-                </a:solidFill>
-              </a:defRPr>
-            </a:pPr>
-            <a:r>
-              <a:t>• Track (Ticket Stepper &amp; Undo): </a:t>
-            </a:r>
-            <a:r>
-              <a:rPr b="0" sz="1250">
-                <a:solidFill>
-                  <a:srgbClr val="4B5160"/>
-                </a:solidFill>
-              </a:rPr>
-              <a:t>Status stepper connectors (Submitted -&gt; Review -&gt; Resolved) visual timeline. Includes a 5-second undo delay to recall submissions.</a:t>
-            </a:r>
-          </a:p>
-        </p:txBody>
-      </p:sp>
-      <p:sp>
-        <p:nvSpPr>
-          <p:cNvPr id="5" name="Rounded Rectangle 4"/>
+              <a:t>Interactive Prototype Flow: Verify → Understand → Control → Track</a:t>
+            </a:r>
+          </a:p>
+        </p:txBody>
+      </p:sp>
+      <p:sp>
+        <p:nvSpPr>
+          <p:cNvPr id="4" name="Rounded Rectangle 3"/>
           <p:cNvSpPr/>
           <p:nvPr/>
         </p:nvSpPr>
         <p:spPr>
           <a:xfrm>
-            <a:off x="6583680" y="1645920"/>
-            <a:ext cx="4846320" cy="4389120"/>
+            <a:off x="694944" y="1609344"/>
+            <a:ext cx="2542032" cy="4251960"/>
           </a:xfrm>
           <a:prstGeom prst="roundRect">
             <a:avLst/>
@@ -5036,8 +6642,10 @@
           <a:solidFill>
             <a:srgbClr val="F5F6F8"/>
           </a:solidFill>
-          <a:ln>
-            <a:noFill/>
+          <a:ln w="19050">
+            <a:solidFill>
+              <a:srgbClr val="E4E7EC"/>
+            </a:solidFill>
           </a:ln>
         </p:spPr>
         <p:style>
@@ -5062,6 +6670,30 @@
           </a:p>
         </p:txBody>
       </p:sp>
+      <p:pic>
+        <p:nvPicPr>
+          <p:cNvPr id="5" name="Picture 4" descr="screenshot_landing.png"/>
+          <p:cNvPicPr>
+            <a:picLocks noChangeAspect="1"/>
+          </p:cNvPicPr>
+          <p:nvPr/>
+        </p:nvPicPr>
+        <p:blipFill>
+          <a:blip r:embed="rId2"/>
+          <a:stretch>
+            <a:fillRect/>
+          </a:stretch>
+        </p:blipFill>
+        <p:spPr>
+          <a:xfrm>
+            <a:off x="731520" y="1645920"/>
+            <a:ext cx="2468880" cy="3291840"/>
+          </a:xfrm>
+          <a:prstGeom prst="rect">
+            <a:avLst/>
+          </a:prstGeom>
+        </p:spPr>
+      </p:pic>
       <p:sp>
         <p:nvSpPr>
           <p:cNvPr id="6" name="TextBox 5"/>
@@ -5070,8 +6702,8 @@
         </p:nvSpPr>
         <p:spPr>
           <a:xfrm>
-            <a:off x="6766560" y="1828800"/>
-            <a:ext cx="4480560" cy="4023360"/>
+            <a:off x="731520" y="5010912"/>
+            <a:ext cx="2468880" cy="731520"/>
           </a:xfrm>
           <a:prstGeom prst="rect">
             <a:avLst/>
@@ -5084,107 +6716,375 @@
           </a:bodyPr>
           <a:lstStyle/>
           <a:p>
-            <a:pPr>
-              <a:defRPr b="1" sz="1200">
-                <a:solidFill>
-                  <a:srgbClr val="1F9D63"/>
-                </a:solidFill>
-              </a:defRPr>
-            </a:pPr>
-            <a:r>
-              <a:t>DELIGHT &amp; EMPATHY HIGHLIGHTS</a:t>
-            </a:r>
-          </a:p>
-          <a:p>
-            <a:pPr>
-              <a:spcBef>
-                <a:spcPts val="1000"/>
-              </a:spcBef>
-              <a:defRPr sz="1300" b="1">
-                <a:solidFill>
-                  <a:srgbClr val="111318"/>
-                </a:solidFill>
-              </a:defRPr>
-            </a:pPr>
-            <a:r>
-              <a:t>• Trust Intro screen: </a:t>
-            </a:r>
-            <a:r>
-              <a:rPr b="0" sz="1250">
+            <a:pPr algn="ctr">
+              <a:defRPr sz="1200" b="1">
+                <a:solidFill>
+                  <a:srgbClr val="2B5CE0"/>
+                </a:solidFill>
+              </a:defRPr>
+            </a:pPr>
+            <a:r>
+              <a:t>1. VERIFY</a:t>
+            </a:r>
+          </a:p>
+          <a:p>
+            <a:pPr algn="ctr">
+              <a:defRPr sz="1100">
                 <a:solidFill>
                   <a:srgbClr val="4B5160"/>
                 </a:solidFill>
-              </a:rPr>
-              <a:t>Front-loads context on why Truecaller has their data, before prompting for number details.</a:t>
-            </a:r>
-          </a:p>
-          <a:p>
-            <a:pPr>
-              <a:spcBef>
-                <a:spcPts val="1000"/>
-              </a:spcBef>
-              <a:defRPr sz="1300" b="1">
-                <a:solidFill>
-                  <a:srgbClr val="111318"/>
-                </a:solidFill>
-              </a:defRPr>
-            </a:pPr>
-            <a:r>
-              <a:t>• Empathetic Microcopy: </a:t>
-            </a:r>
-            <a:r>
-              <a:rPr b="0" sz="1250">
+              </a:defRPr>
+            </a:pPr>
+            <a:r>
+              <a:t>OTP Passcode Sheet</a:t>
+            </a:r>
+          </a:p>
+        </p:txBody>
+      </p:sp>
+      <p:sp>
+        <p:nvSpPr>
+          <p:cNvPr id="7" name="Rounded Rectangle 6"/>
+          <p:cNvSpPr/>
+          <p:nvPr/>
+        </p:nvSpPr>
+        <p:spPr>
+          <a:xfrm>
+            <a:off x="3346704" y="1609344"/>
+            <a:ext cx="2542032" cy="4251960"/>
+          </a:xfrm>
+          <a:prstGeom prst="roundRect">
+            <a:avLst/>
+          </a:prstGeom>
+          <a:solidFill>
+            <a:srgbClr val="F5F6F8"/>
+          </a:solidFill>
+          <a:ln w="19050">
+            <a:solidFill>
+              <a:srgbClr val="E4E7EC"/>
+            </a:solidFill>
+          </a:ln>
+        </p:spPr>
+        <p:style>
+          <a:lnRef idx="1">
+            <a:schemeClr val="accent1"/>
+          </a:lnRef>
+          <a:fillRef idx="3">
+            <a:schemeClr val="accent1"/>
+          </a:fillRef>
+          <a:effectRef idx="2">
+            <a:schemeClr val="accent1"/>
+          </a:effectRef>
+          <a:fontRef idx="minor">
+            <a:schemeClr val="lt1"/>
+          </a:fontRef>
+        </p:style>
+        <p:txBody>
+          <a:bodyPr rtlCol="0" anchor="ctr"/>
+          <a:lstStyle/>
+          <a:p>
+            <a:pPr algn="ctr"/>
+          </a:p>
+        </p:txBody>
+      </p:sp>
+      <p:pic>
+        <p:nvPicPr>
+          <p:cNvPr id="8" name="Picture 7" descr="screenshot_sources.png"/>
+          <p:cNvPicPr>
+            <a:picLocks noChangeAspect="1"/>
+          </p:cNvPicPr>
+          <p:nvPr/>
+        </p:nvPicPr>
+        <p:blipFill>
+          <a:blip r:embed="rId3"/>
+          <a:stretch>
+            <a:fillRect/>
+          </a:stretch>
+        </p:blipFill>
+        <p:spPr>
+          <a:xfrm>
+            <a:off x="3383280" y="1645920"/>
+            <a:ext cx="2468880" cy="3291840"/>
+          </a:xfrm>
+          <a:prstGeom prst="rect">
+            <a:avLst/>
+          </a:prstGeom>
+        </p:spPr>
+      </p:pic>
+      <p:sp>
+        <p:nvSpPr>
+          <p:cNvPr id="9" name="TextBox 8"/>
+          <p:cNvSpPr txBox="1"/>
+          <p:nvPr/>
+        </p:nvSpPr>
+        <p:spPr>
+          <a:xfrm>
+            <a:off x="3383280" y="5010912"/>
+            <a:ext cx="2468880" cy="731520"/>
+          </a:xfrm>
+          <a:prstGeom prst="rect">
+            <a:avLst/>
+          </a:prstGeom>
+          <a:noFill/>
+        </p:spPr>
+        <p:txBody>
+          <a:bodyPr wrap="square">
+            <a:spAutoFit/>
+          </a:bodyPr>
+          <a:lstStyle/>
+          <a:p>
+            <a:pPr algn="ctr">
+              <a:defRPr sz="1200" b="1">
+                <a:solidFill>
+                  <a:srgbClr val="2B5CE0"/>
+                </a:solidFill>
+              </a:defRPr>
+            </a:pPr>
+            <a:r>
+              <a:t>2. UNDERSTAND</a:t>
+            </a:r>
+          </a:p>
+          <a:p>
+            <a:pPr algn="ctr">
+              <a:defRPr sz="1100">
                 <a:solidFill>
                   <a:srgbClr val="4B5160"/>
                 </a:solidFill>
-              </a:rPr>
-              <a:t>Context-aware greetings on first load reassure users: "This is your data, presented clearly — take your time."</a:t>
-            </a:r>
-          </a:p>
-          <a:p>
-            <a:pPr>
-              <a:spcBef>
-                <a:spcPts val="1000"/>
-              </a:spcBef>
-              <a:defRPr sz="1300" b="1">
-                <a:solidFill>
-                  <a:srgbClr val="111318"/>
-                </a:solidFill>
-              </a:defRPr>
-            </a:pPr>
-            <a:r>
-              <a:t>• Mobile Bottom Sheet: </a:t>
-            </a:r>
-            <a:r>
-              <a:rPr b="0" sz="1250">
+              </a:defRPr>
+            </a:pPr>
+            <a:r>
+              <a:t>Sources &amp; Sync Data</a:t>
+            </a:r>
+          </a:p>
+        </p:txBody>
+      </p:sp>
+      <p:sp>
+        <p:nvSpPr>
+          <p:cNvPr id="10" name="Rounded Rectangle 9"/>
+          <p:cNvSpPr/>
+          <p:nvPr/>
+        </p:nvSpPr>
+        <p:spPr>
+          <a:xfrm>
+            <a:off x="5998464" y="1609344"/>
+            <a:ext cx="2542032" cy="4251960"/>
+          </a:xfrm>
+          <a:prstGeom prst="roundRect">
+            <a:avLst/>
+          </a:prstGeom>
+          <a:solidFill>
+            <a:srgbClr val="F5F6F8"/>
+          </a:solidFill>
+          <a:ln w="19050">
+            <a:solidFill>
+              <a:srgbClr val="E4E7EC"/>
+            </a:solidFill>
+          </a:ln>
+        </p:spPr>
+        <p:style>
+          <a:lnRef idx="1">
+            <a:schemeClr val="accent1"/>
+          </a:lnRef>
+          <a:fillRef idx="3">
+            <a:schemeClr val="accent1"/>
+          </a:fillRef>
+          <a:effectRef idx="2">
+            <a:schemeClr val="accent1"/>
+          </a:effectRef>
+          <a:fontRef idx="minor">
+            <a:schemeClr val="lt1"/>
+          </a:fontRef>
+        </p:style>
+        <p:txBody>
+          <a:bodyPr rtlCol="0" anchor="ctr"/>
+          <a:lstStyle/>
+          <a:p>
+            <a:pPr algn="ctr"/>
+          </a:p>
+        </p:txBody>
+      </p:sp>
+      <p:pic>
+        <p:nvPicPr>
+          <p:cNvPr id="11" name="Picture 10" descr="screenshot_profile.png"/>
+          <p:cNvPicPr>
+            <a:picLocks noChangeAspect="1"/>
+          </p:cNvPicPr>
+          <p:nvPr/>
+        </p:nvPicPr>
+        <p:blipFill>
+          <a:blip r:embed="rId4"/>
+          <a:stretch>
+            <a:fillRect/>
+          </a:stretch>
+        </p:blipFill>
+        <p:spPr>
+          <a:xfrm>
+            <a:off x="6035040" y="1645920"/>
+            <a:ext cx="2468880" cy="3291840"/>
+          </a:xfrm>
+          <a:prstGeom prst="rect">
+            <a:avLst/>
+          </a:prstGeom>
+        </p:spPr>
+      </p:pic>
+      <p:sp>
+        <p:nvSpPr>
+          <p:cNvPr id="12" name="TextBox 11"/>
+          <p:cNvSpPr txBox="1"/>
+          <p:nvPr/>
+        </p:nvSpPr>
+        <p:spPr>
+          <a:xfrm>
+            <a:off x="6035040" y="5010912"/>
+            <a:ext cx="2468880" cy="731520"/>
+          </a:xfrm>
+          <a:prstGeom prst="rect">
+            <a:avLst/>
+          </a:prstGeom>
+          <a:noFill/>
+        </p:spPr>
+        <p:txBody>
+          <a:bodyPr wrap="square">
+            <a:spAutoFit/>
+          </a:bodyPr>
+          <a:lstStyle/>
+          <a:p>
+            <a:pPr algn="ctr">
+              <a:defRPr sz="1200" b="1">
+                <a:solidFill>
+                  <a:srgbClr val="2B5CE0"/>
+                </a:solidFill>
+              </a:defRPr>
+            </a:pPr>
+            <a:r>
+              <a:t>3. CONTROL</a:t>
+            </a:r>
+          </a:p>
+          <a:p>
+            <a:pPr algn="ctr">
+              <a:defRPr sz="1100">
                 <a:solidFill>
                   <a:srgbClr val="4B5160"/>
                 </a:solidFill>
-              </a:rPr>
-              <a:t>Visual sheet formats adjust automatically below tablet breakpoints to match modern settings menus.</a:t>
-            </a:r>
-          </a:p>
-          <a:p>
-            <a:pPr>
-              <a:spcBef>
-                <a:spcPts val="1000"/>
-              </a:spcBef>
-              <a:defRPr sz="1300" b="1">
-                <a:solidFill>
-                  <a:srgbClr val="111318"/>
-                </a:solidFill>
-              </a:defRPr>
-            </a:pPr>
-            <a:r>
-              <a:t>• Grievance Redressal: </a:t>
-            </a:r>
-            <a:r>
-              <a:rPr b="0" sz="1250">
+              </a:defRPr>
+            </a:pPr>
+            <a:r>
+              <a:t>Identity Dashboard</a:t>
+            </a:r>
+          </a:p>
+        </p:txBody>
+      </p:sp>
+      <p:sp>
+        <p:nvSpPr>
+          <p:cNvPr id="13" name="Rounded Rectangle 12"/>
+          <p:cNvSpPr/>
+          <p:nvPr/>
+        </p:nvSpPr>
+        <p:spPr>
+          <a:xfrm>
+            <a:off x="8650224" y="1609344"/>
+            <a:ext cx="2542032" cy="4251960"/>
+          </a:xfrm>
+          <a:prstGeom prst="roundRect">
+            <a:avLst/>
+          </a:prstGeom>
+          <a:solidFill>
+            <a:srgbClr val="F5F6F8"/>
+          </a:solidFill>
+          <a:ln w="19050">
+            <a:solidFill>
+              <a:srgbClr val="E4E7EC"/>
+            </a:solidFill>
+          </a:ln>
+        </p:spPr>
+        <p:style>
+          <a:lnRef idx="1">
+            <a:schemeClr val="accent1"/>
+          </a:lnRef>
+          <a:fillRef idx="3">
+            <a:schemeClr val="accent1"/>
+          </a:fillRef>
+          <a:effectRef idx="2">
+            <a:schemeClr val="accent1"/>
+          </a:effectRef>
+          <a:fontRef idx="minor">
+            <a:schemeClr val="lt1"/>
+          </a:fontRef>
+        </p:style>
+        <p:txBody>
+          <a:bodyPr rtlCol="0" anchor="ctr"/>
+          <a:lstStyle/>
+          <a:p>
+            <a:pPr algn="ctr"/>
+          </a:p>
+        </p:txBody>
+      </p:sp>
+      <p:pic>
+        <p:nvPicPr>
+          <p:cNvPr id="14" name="Picture 13" descr="screenshot_sources.png"/>
+          <p:cNvPicPr>
+            <a:picLocks noChangeAspect="1"/>
+          </p:cNvPicPr>
+          <p:nvPr/>
+        </p:nvPicPr>
+        <p:blipFill>
+          <a:blip r:embed="rId3"/>
+          <a:stretch>
+            <a:fillRect/>
+          </a:stretch>
+        </p:blipFill>
+        <p:spPr>
+          <a:xfrm>
+            <a:off x="8686800" y="1645920"/>
+            <a:ext cx="2468880" cy="3291840"/>
+          </a:xfrm>
+          <a:prstGeom prst="rect">
+            <a:avLst/>
+          </a:prstGeom>
+        </p:spPr>
+      </p:pic>
+      <p:sp>
+        <p:nvSpPr>
+          <p:cNvPr id="15" name="TextBox 14"/>
+          <p:cNvSpPr txBox="1"/>
+          <p:nvPr/>
+        </p:nvSpPr>
+        <p:spPr>
+          <a:xfrm>
+            <a:off x="8686800" y="5010912"/>
+            <a:ext cx="2468880" cy="731520"/>
+          </a:xfrm>
+          <a:prstGeom prst="rect">
+            <a:avLst/>
+          </a:prstGeom>
+          <a:noFill/>
+        </p:spPr>
+        <p:txBody>
+          <a:bodyPr wrap="square">
+            <a:spAutoFit/>
+          </a:bodyPr>
+          <a:lstStyle/>
+          <a:p>
+            <a:pPr algn="ctr">
+              <a:defRPr sz="1200" b="1">
+                <a:solidFill>
+                  <a:srgbClr val="2B5CE0"/>
+                </a:solidFill>
+              </a:defRPr>
+            </a:pPr>
+            <a:r>
+              <a:t>4. TRACK</a:t>
+            </a:r>
+          </a:p>
+          <a:p>
+            <a:pPr algn="ctr">
+              <a:defRPr sz="1100">
                 <a:solidFill>
                   <a:srgbClr val="4B5160"/>
                 </a:solidFill>
-              </a:rPr>
-              <a:t>Dedicated compliance pages link directly to the designated Data Grievance Officer, aligning with DPDP guidelines.</a:t>
+              </a:defRPr>
+            </a:pPr>
+            <a:r>
+              <a:t>Stepper Steer Detail</a:t>
             </a:r>
           </a:p>
         </p:txBody>
@@ -5246,7 +7146,7 @@
               </a:defRPr>
             </a:pPr>
             <a:r>
-              <a:t>PRODUCT ANALYTICS</a:t>
+              <a:t>PRODUCT SUCCESS METRICS</a:t>
             </a:r>
           </a:p>
         </p:txBody>
@@ -5282,7 +7182,7 @@
               </a:defRPr>
             </a:pPr>
             <a:r>
-              <a:t>Product Success Model: Metrics &amp; Guardrails</a:t>
+              <a:t>Product Success Model: Agency &amp; Privacy Guardrails</a:t>
             </a:r>
           </a:p>
         </p:txBody>
@@ -5296,7 +7196,7 @@
         <p:spPr>
           <a:xfrm>
             <a:off x="731520" y="1645920"/>
-            <a:ext cx="3291840" cy="4389120"/>
+            <a:ext cx="10698480" cy="1097280"/>
           </a:xfrm>
           <a:prstGeom prst="roundRect">
             <a:avLst/>
@@ -5338,8 +7238,8 @@
         </p:nvSpPr>
         <p:spPr>
           <a:xfrm>
-            <a:off x="822960" y="1737360"/>
-            <a:ext cx="3108960" cy="4206240"/>
+            <a:off x="914400" y="1737360"/>
+            <a:ext cx="10332720" cy="914400"/>
           </a:xfrm>
           <a:prstGeom prst="rect">
             <a:avLst/>
@@ -5353,44 +7253,34 @@
           <a:lstStyle/>
           <a:p>
             <a:pPr>
-              <a:defRPr b="1" sz="1200">
+              <a:defRPr sz="1200" b="1">
                 <a:solidFill>
                   <a:srgbClr val="2B5CE0"/>
                 </a:solidFill>
-              </a:defRPr>
-            </a:pPr>
-            <a:r>
-              <a:t>NORTH STAR METRIC</a:t>
+                <a:latin typeface="Inter"/>
+              </a:defRPr>
+            </a:pPr>
+            <a:r>
+              <a:t>NORTH STAR METRIC: VERIFIED DATA AGENCY RATE</a:t>
             </a:r>
           </a:p>
           <a:p>
             <a:pPr>
               <a:spcBef>
-                <a:spcPts val="1400"/>
+                <a:spcPts val="400"/>
               </a:spcBef>
-              <a:defRPr b="1" sz="1400">
+              <a:defRPr sz="1250" b="1">
                 <a:solidFill>
                   <a:srgbClr val="111318"/>
                 </a:solidFill>
               </a:defRPr>
             </a:pPr>
             <a:r>
-              <a:t>% Active Directory Listings with Verified Consent Status</a:t>
-            </a:r>
-          </a:p>
-          <a:p>
-            <a:pPr>
-              <a:spcBef>
-                <a:spcPts val="800"/>
-              </a:spcBef>
-              <a:defRPr sz="1200">
-                <a:solidFill>
-                  <a:srgbClr val="4B5160"/>
-                </a:solidFill>
-              </a:defRPr>
-            </a:pPr>
-            <a:r>
-              <a:t>Measures the ratio of phone numbers whose identification tags have been verified or corrected by their owners, compared to unverified listings. Tracks progress in moving from bulk crowdsourced syncs to verified, consent-backed directories.</a:t>
+              <a:t>Definition: % of verified portal visitors who successfully complete their intended rights action (Correction or Erasure).</a:t>
+            </a:r>
+            <a:br/>
+            <a:r>
+              <a:t>Formulated to measure successful self-serve agency execution rather than general directory stats.</a:t>
             </a:r>
           </a:p>
         </p:txBody>
@@ -5403,8 +7293,8 @@
         </p:nvSpPr>
         <p:spPr>
           <a:xfrm>
-            <a:off x="4389120" y="1645920"/>
-            <a:ext cx="3291840" cy="4389120"/>
+            <a:off x="731520" y="2926080"/>
+            <a:ext cx="3383280" cy="3108960"/>
           </a:xfrm>
           <a:prstGeom prst="roundRect">
             <a:avLst/>
@@ -5446,8 +7336,8 @@
         </p:nvSpPr>
         <p:spPr>
           <a:xfrm>
-            <a:off x="4480560" y="1737360"/>
-            <a:ext cx="3108960" cy="4206240"/>
+            <a:off x="822960" y="3017520"/>
+            <a:ext cx="3200400" cy="2926080"/>
           </a:xfrm>
           <a:prstGeom prst="rect">
             <a:avLst/>
@@ -5461,83 +7351,74 @@
           <a:lstStyle/>
           <a:p>
             <a:pPr>
-              <a:defRPr b="1" sz="1200">
-                <a:solidFill>
-                  <a:srgbClr val="1F9D63"/>
-                </a:solidFill>
-              </a:defRPr>
-            </a:pPr>
-            <a:r>
-              <a:t>FUNNEL SUPPORTING METRICS</a:t>
+              <a:defRPr b="1" sz="1100">
+                <a:solidFill>
+                  <a:srgbClr val="2B5CE0"/>
+                </a:solidFill>
+              </a:defRPr>
+            </a:pPr>
+            <a:r>
+              <a:t>SUPPORTING METRICS</a:t>
             </a:r>
           </a:p>
           <a:p>
             <a:pPr>
               <a:spcBef>
-                <a:spcPts val="1200"/>
+                <a:spcPts val="800"/>
               </a:spcBef>
-              <a:defRPr b="1" sz="1300">
+              <a:defRPr sz="1150">
                 <a:solidFill>
                   <a:srgbClr val="111318"/>
                 </a:solidFill>
               </a:defRPr>
             </a:pPr>
             <a:r>
-              <a:t>• OTP Verification Success Rate:</a:t>
-            </a:r>
-            <a:r>
-              <a:rPr b="0" sz="1200">
-                <a:solidFill>
-                  <a:srgbClr val="4B5160"/>
-                </a:solidFill>
-              </a:rPr>
-              <a:t> Tracks onboarding drop-offs to check SMS delivery or code input friction.</a:t>
+              <a:t>• OTP Success Rate: Onboarding drop-offs.</a:t>
             </a:r>
           </a:p>
           <a:p>
             <a:pPr>
               <a:spcBef>
-                <a:spcPts val="1000"/>
+                <a:spcPts val="800"/>
               </a:spcBef>
-              <a:defRPr b="1" sz="1300">
+              <a:defRPr sz="1150">
                 <a:solidFill>
                   <a:srgbClr val="111318"/>
                 </a:solidFill>
               </a:defRPr>
             </a:pPr>
             <a:r>
-              <a:t>• Ticket Resolution SLA:</a:t>
-            </a:r>
-            <a:r>
-              <a:rPr b="0" sz="1200">
-                <a:solidFill>
-                  <a:srgbClr val="4B5160"/>
-                </a:solidFill>
-              </a:rPr>
-              <a:t> Median time to resolve a ticket. Target: &lt; 5 business days.</a:t>
+              <a:t>• Rights Action rate: correction vs erasure.</a:t>
             </a:r>
           </a:p>
           <a:p>
             <a:pPr>
               <a:spcBef>
-                <a:spcPts val="1000"/>
+                <a:spcPts val="800"/>
               </a:spcBef>
-              <a:defRPr b="1" sz="1300">
+              <a:defRPr sz="1150">
                 <a:solidFill>
                   <a:srgbClr val="111318"/>
                 </a:solidFill>
               </a:defRPr>
             </a:pPr>
             <a:r>
-              <a:t>• Ticket Cancellation Rate:</a:t>
-            </a:r>
-            <a:r>
-              <a:rPr b="0" sz="1200">
-                <a:solidFill>
-                  <a:srgbClr val="4B5160"/>
-                </a:solidFill>
-              </a:rPr>
-              <a:t> Percentage of reviews cancelled by users, indicating user anxiety.</a:t>
+              <a:t>• Median Resolution SLA: Target &lt; 3 days.</a:t>
+            </a:r>
+          </a:p>
+          <a:p>
+            <a:pPr>
+              <a:spcBef>
+                <a:spcPts val="800"/>
+              </a:spcBef>
+              <a:defRPr sz="1150">
+                <a:solidFill>
+                  <a:srgbClr val="111318"/>
+                </a:solidFill>
+              </a:defRPr>
+            </a:pPr>
+            <a:r>
+              <a:t>• Reopen / Repeat Rate: Follow-up complaints.</a:t>
             </a:r>
           </a:p>
         </p:txBody>
@@ -5550,8 +7431,8 @@
         </p:nvSpPr>
         <p:spPr>
           <a:xfrm>
-            <a:off x="8046720" y="1645920"/>
-            <a:ext cx="3383280" cy="4389120"/>
+            <a:off x="4389120" y="2926080"/>
+            <a:ext cx="3383280" cy="3108960"/>
           </a:xfrm>
           <a:prstGeom prst="roundRect">
             <a:avLst/>
@@ -5593,8 +7474,8 @@
         </p:nvSpPr>
         <p:spPr>
           <a:xfrm>
-            <a:off x="8138160" y="1737360"/>
-            <a:ext cx="3200400" cy="4206240"/>
+            <a:off x="4480560" y="3017520"/>
+            <a:ext cx="3200400" cy="2926080"/>
           </a:xfrm>
           <a:prstGeom prst="rect">
             <a:avLst/>
@@ -5608,60 +7489,212 @@
           <a:lstStyle/>
           <a:p>
             <a:pPr>
-              <a:defRPr b="1" sz="1200">
-                <a:solidFill>
-                  <a:srgbClr val="C57A11"/>
-                </a:solidFill>
-              </a:defRPr>
-            </a:pPr>
-            <a:r>
-              <a:t>GUARDRAIL METRICS</a:t>
+              <a:defRPr b="1" sz="1100">
+                <a:solidFill>
+                  <a:srgbClr val="D33B3B"/>
+                </a:solidFill>
+              </a:defRPr>
+            </a:pPr>
+            <a:r>
+              <a:t>PRIVACY GUARDRAILS</a:t>
             </a:r>
           </a:p>
           <a:p>
             <a:pPr>
               <a:spcBef>
-                <a:spcPts val="1200"/>
+                <a:spcPts val="800"/>
               </a:spcBef>
-              <a:defRPr b="1" sz="1300">
+              <a:defRPr sz="1150">
                 <a:solidFill>
                   <a:srgbClr val="111318"/>
                 </a:solidFill>
               </a:defRPr>
             </a:pPr>
             <a:r>
-              <a:t>• Spam Detection Accuracy:</a:t>
-            </a:r>
-            <a:r>
-              <a:rPr b="0" sz="1200">
-                <a:solidFill>
-                  <a:srgbClr val="4B5160"/>
-                </a:solidFill>
-              </a:rPr>
-              <a:t> Unlisting must not degrade spam accuracy by more than 0.5% (ensuring bad actors don't erase valid blocks).</a:t>
+              <a:t>• Spam Detection Precision: False positive spam rate change should stay &lt; 0.2% post-erasure.</a:t>
             </a:r>
           </a:p>
           <a:p>
             <a:pPr>
               <a:spcBef>
-                <a:spcPts val="1000"/>
+                <a:spcPts val="800"/>
               </a:spcBef>
-              <a:defRPr b="1" sz="1300">
+              <a:defRPr sz="1150">
                 <a:solidFill>
                   <a:srgbClr val="111318"/>
                 </a:solidFill>
               </a:defRPr>
             </a:pPr>
             <a:r>
-              <a:t>• Contact Upload Sync Rates:</a:t>
-            </a:r>
-            <a:r>
-              <a:rPr b="0" sz="1200">
-                <a:solidFill>
-                  <a:srgbClr val="4B5160"/>
-                </a:solidFill>
-              </a:rPr>
-              <a:t> Consent UI changes must not decrease sync permissions from active app users.</a:t>
+              <a:t>• Fraudulent Claim Rate: Unlisting claim disputes.</a:t>
+            </a:r>
+          </a:p>
+          <a:p>
+            <a:pPr>
+              <a:spcBef>
+                <a:spcPts val="800"/>
+              </a:spcBef>
+              <a:defRPr sz="1150">
+                <a:solidFill>
+                  <a:srgbClr val="111318"/>
+                </a:solidFill>
+              </a:defRPr>
+            </a:pPr>
+            <a:r>
+              <a:t>• Contact Sync permission: Permission opt-in rate by active app uploaders.</a:t>
+            </a:r>
+          </a:p>
+        </p:txBody>
+      </p:sp>
+      <p:sp>
+        <p:nvSpPr>
+          <p:cNvPr id="10" name="Rounded Rectangle 9"/>
+          <p:cNvSpPr/>
+          <p:nvPr/>
+        </p:nvSpPr>
+        <p:spPr>
+          <a:xfrm>
+            <a:off x="8046720" y="2926080"/>
+            <a:ext cx="3383280" cy="3108960"/>
+          </a:xfrm>
+          <a:prstGeom prst="roundRect">
+            <a:avLst/>
+          </a:prstGeom>
+          <a:solidFill>
+            <a:srgbClr val="F5F6F8"/>
+          </a:solidFill>
+          <a:ln>
+            <a:noFill/>
+          </a:ln>
+        </p:spPr>
+        <p:style>
+          <a:lnRef idx="1">
+            <a:schemeClr val="accent1"/>
+          </a:lnRef>
+          <a:fillRef idx="3">
+            <a:schemeClr val="accent1"/>
+          </a:fillRef>
+          <a:effectRef idx="2">
+            <a:schemeClr val="accent1"/>
+          </a:effectRef>
+          <a:fontRef idx="minor">
+            <a:schemeClr val="lt1"/>
+          </a:fontRef>
+        </p:style>
+        <p:txBody>
+          <a:bodyPr rtlCol="0" anchor="ctr"/>
+          <a:lstStyle/>
+          <a:p>
+            <a:pPr algn="ctr"/>
+          </a:p>
+        </p:txBody>
+      </p:sp>
+      <p:sp>
+        <p:nvSpPr>
+          <p:cNvPr id="11" name="TextBox 10"/>
+          <p:cNvSpPr txBox="1"/>
+          <p:nvPr/>
+        </p:nvSpPr>
+        <p:spPr>
+          <a:xfrm>
+            <a:off x="8138160" y="3017520"/>
+            <a:ext cx="3200400" cy="2926080"/>
+          </a:xfrm>
+          <a:prstGeom prst="rect">
+            <a:avLst/>
+          </a:prstGeom>
+          <a:noFill/>
+        </p:spPr>
+        <p:txBody>
+          <a:bodyPr wrap="square">
+            <a:spAutoFit/>
+          </a:bodyPr>
+          <a:lstStyle/>
+          <a:p>
+            <a:pPr>
+              <a:defRPr b="1" sz="1100">
+                <a:solidFill>
+                  <a:srgbClr val="1F9D63"/>
+                </a:solidFill>
+              </a:defRPr>
+            </a:pPr>
+            <a:r>
+              <a:t>90-DAY SUCCESS CRITERIA</a:t>
+            </a:r>
+          </a:p>
+          <a:p>
+            <a:pPr>
+              <a:spcBef>
+                <a:spcPts val="600"/>
+              </a:spcBef>
+              <a:defRPr sz="1150">
+                <a:solidFill>
+                  <a:srgbClr val="111318"/>
+                </a:solidFill>
+              </a:defRPr>
+            </a:pPr>
+            <a:r>
+              <a:t>• Verified Agency Rate: &gt; 75% target.</a:t>
+            </a:r>
+          </a:p>
+          <a:p>
+            <a:pPr>
+              <a:spcBef>
+                <a:spcPts val="600"/>
+              </a:spcBef>
+              <a:defRPr sz="1150">
+                <a:solidFill>
+                  <a:srgbClr val="111318"/>
+                </a:solidFill>
+              </a:defRPr>
+            </a:pPr>
+            <a:r>
+              <a:t>• OTP Success Rate: &gt; 85% target.</a:t>
+            </a:r>
+          </a:p>
+          <a:p>
+            <a:pPr>
+              <a:spcBef>
+                <a:spcPts val="600"/>
+              </a:spcBef>
+              <a:defRPr sz="1150">
+                <a:solidFill>
+                  <a:srgbClr val="111318"/>
+                </a:solidFill>
+              </a:defRPr>
+            </a:pPr>
+            <a:r>
+              <a:t>• Median SLA: &lt; 3 business days target.</a:t>
+            </a:r>
+          </a:p>
+          <a:p>
+            <a:pPr>
+              <a:spcBef>
+                <a:spcPts val="600"/>
+              </a:spcBef>
+              <a:defRPr sz="1150">
+                <a:solidFill>
+                  <a:srgbClr val="111318"/>
+                </a:solidFill>
+              </a:defRPr>
+            </a:pPr>
+            <a:r>
+              <a:t>• Portal CSAT: &gt; 85% positive rating.</a:t>
+            </a:r>
+          </a:p>
+          <a:p>
+            <a:pPr>
+              <a:spcBef>
+                <a:spcPts val="600"/>
+              </a:spcBef>
+              <a:defRPr sz="1150">
+                <a:solidFill>
+                  <a:srgbClr val="111318"/>
+                </a:solidFill>
+              </a:defRPr>
+            </a:pPr>
+            <a:r>
+              <a:t>• Illustrative targets based on soft-launch models.</a:t>
             </a:r>
           </a:p>
         </p:txBody>
@@ -5723,7 +7756,7 @@
               </a:defRPr>
             </a:pPr>
             <a:r>
-              <a:t>STRATEGIC INCIDENT RESPONSE</a:t>
+              <a:t>OPERATIONAL INCIDENT ISOLATION</a:t>
             </a:r>
           </a:p>
         </p:txBody>
@@ -5759,7 +7792,7 @@
               </a:defRPr>
             </a:pPr>
             <a:r>
-              <a:t>Diagnostic Thinking: Investigating a 15% Verification Drop</a:t>
+              <a:t>Diagnostic Thinking: Isolating a 15% Verification Drop</a:t>
             </a:r>
           </a:p>
         </p:txBody>
@@ -5772,8 +7805,642 @@
         </p:nvSpPr>
         <p:spPr>
           <a:xfrm>
-            <a:off x="731520" y="1645920"/>
-            <a:ext cx="5303520" cy="4389120"/>
+            <a:off x="731520" y="2011680"/>
+            <a:ext cx="3200400" cy="914400"/>
+          </a:xfrm>
+          <a:prstGeom prst="roundRect">
+            <a:avLst/>
+          </a:prstGeom>
+          <a:solidFill>
+            <a:srgbClr val="D33B3B"/>
+          </a:solidFill>
+          <a:ln>
+            <a:noFill/>
+          </a:ln>
+        </p:spPr>
+        <p:style>
+          <a:lnRef idx="1">
+            <a:schemeClr val="accent1"/>
+          </a:lnRef>
+          <a:fillRef idx="3">
+            <a:schemeClr val="accent1"/>
+          </a:fillRef>
+          <a:effectRef idx="2">
+            <a:schemeClr val="accent1"/>
+          </a:effectRef>
+          <a:fontRef idx="minor">
+            <a:schemeClr val="lt1"/>
+          </a:fontRef>
+        </p:style>
+        <p:txBody>
+          <a:bodyPr rtlCol="0" anchor="ctr"/>
+          <a:lstStyle/>
+          <a:p>
+            <a:pPr algn="ctr"/>
+          </a:p>
+        </p:txBody>
+      </p:sp>
+      <p:sp>
+        <p:nvSpPr>
+          <p:cNvPr id="5" name="TextBox 4"/>
+          <p:cNvSpPr txBox="1"/>
+          <p:nvPr/>
+        </p:nvSpPr>
+        <p:spPr>
+          <a:xfrm>
+            <a:off x="822960" y="2103120"/>
+            <a:ext cx="3017520" cy="731520"/>
+          </a:xfrm>
+          <a:prstGeom prst="rect">
+            <a:avLst/>
+          </a:prstGeom>
+          <a:noFill/>
+        </p:spPr>
+        <p:txBody>
+          <a:bodyPr wrap="square">
+            <a:spAutoFit/>
+          </a:bodyPr>
+          <a:lstStyle/>
+          <a:p>
+            <a:pPr algn="ctr">
+              <a:defRPr b="1" sz="1300">
+                <a:solidFill>
+                  <a:srgbClr val="FFFFFF"/>
+                </a:solidFill>
+              </a:defRPr>
+            </a:pPr>
+            <a:r>
+              <a:t>ROOT ISSUE</a:t>
+            </a:r>
+            <a:br/>
+            <a:r>
+              <a:t>Verification Rate ↓15%</a:t>
+            </a:r>
+          </a:p>
+        </p:txBody>
+      </p:sp>
+      <p:sp>
+        <p:nvSpPr>
+          <p:cNvPr id="6" name="Rounded Rectangle 5"/>
+          <p:cNvSpPr/>
+          <p:nvPr/>
+        </p:nvSpPr>
+        <p:spPr>
+          <a:xfrm>
+            <a:off x="4389120" y="1645920"/>
+            <a:ext cx="3200400" cy="914400"/>
+          </a:xfrm>
+          <a:prstGeom prst="roundRect">
+            <a:avLst/>
+          </a:prstGeom>
+          <a:solidFill>
+            <a:srgbClr val="F5F6F8"/>
+          </a:solidFill>
+          <a:ln w="19050">
+            <a:solidFill>
+              <a:srgbClr val="E4E7EC"/>
+            </a:solidFill>
+          </a:ln>
+        </p:spPr>
+        <p:style>
+          <a:lnRef idx="1">
+            <a:schemeClr val="accent1"/>
+          </a:lnRef>
+          <a:fillRef idx="3">
+            <a:schemeClr val="accent1"/>
+          </a:fillRef>
+          <a:effectRef idx="2">
+            <a:schemeClr val="accent1"/>
+          </a:effectRef>
+          <a:fontRef idx="minor">
+            <a:schemeClr val="lt1"/>
+          </a:fontRef>
+        </p:style>
+        <p:txBody>
+          <a:bodyPr rtlCol="0" anchor="ctr"/>
+          <a:lstStyle/>
+          <a:p>
+            <a:pPr algn="ctr"/>
+          </a:p>
+        </p:txBody>
+      </p:sp>
+      <p:sp>
+        <p:nvSpPr>
+          <p:cNvPr id="7" name="TextBox 6"/>
+          <p:cNvSpPr txBox="1"/>
+          <p:nvPr/>
+        </p:nvSpPr>
+        <p:spPr>
+          <a:xfrm>
+            <a:off x="4434840" y="1691640"/>
+            <a:ext cx="3108960" cy="822960"/>
+          </a:xfrm>
+          <a:prstGeom prst="rect">
+            <a:avLst/>
+          </a:prstGeom>
+          <a:noFill/>
+        </p:spPr>
+        <p:txBody>
+          <a:bodyPr wrap="square">
+            <a:spAutoFit/>
+          </a:bodyPr>
+          <a:lstStyle/>
+          <a:p>
+            <a:pPr>
+              <a:defRPr b="1" sz="1200">
+                <a:solidFill>
+                  <a:srgbClr val="2B5CE0"/>
+                </a:solidFill>
+              </a:defRPr>
+            </a:pPr>
+            <a:r>
+              <a:t>A. Traffic mix</a:t>
+            </a:r>
+          </a:p>
+          <a:p>
+            <a:pPr>
+              <a:spcBef>
+                <a:spcPts val="200"/>
+              </a:spcBef>
+              <a:defRPr sz="1100">
+                <a:solidFill>
+                  <a:srgbClr val="4B5160"/>
+                </a:solidFill>
+              </a:defRPr>
+            </a:pPr>
+            <a:r>
+              <a:t>Shift in ad referrals vs organic checks</a:t>
+            </a:r>
+          </a:p>
+        </p:txBody>
+      </p:sp>
+      <p:sp>
+        <p:nvSpPr>
+          <p:cNvPr id="8" name="Right Arrow 7"/>
+          <p:cNvSpPr/>
+          <p:nvPr/>
+        </p:nvSpPr>
+        <p:spPr>
+          <a:xfrm>
+            <a:off x="4023360" y="1965960"/>
+            <a:ext cx="274320" cy="182880"/>
+          </a:xfrm>
+          <a:prstGeom prst="rightArrow">
+            <a:avLst/>
+          </a:prstGeom>
+          <a:solidFill>
+            <a:srgbClr val="E4E7EC"/>
+          </a:solidFill>
+          <a:ln>
+            <a:noFill/>
+          </a:ln>
+        </p:spPr>
+        <p:style>
+          <a:lnRef idx="1">
+            <a:schemeClr val="accent1"/>
+          </a:lnRef>
+          <a:fillRef idx="3">
+            <a:schemeClr val="accent1"/>
+          </a:fillRef>
+          <a:effectRef idx="2">
+            <a:schemeClr val="accent1"/>
+          </a:effectRef>
+          <a:fontRef idx="minor">
+            <a:schemeClr val="lt1"/>
+          </a:fontRef>
+        </p:style>
+        <p:txBody>
+          <a:bodyPr rtlCol="0" anchor="ctr"/>
+          <a:lstStyle/>
+          <a:p>
+            <a:pPr algn="ctr"/>
+          </a:p>
+        </p:txBody>
+      </p:sp>
+      <p:sp>
+        <p:nvSpPr>
+          <p:cNvPr id="9" name="Rounded Rectangle 8"/>
+          <p:cNvSpPr/>
+          <p:nvPr/>
+        </p:nvSpPr>
+        <p:spPr>
+          <a:xfrm>
+            <a:off x="4389120" y="2743200"/>
+            <a:ext cx="3200400" cy="914400"/>
+          </a:xfrm>
+          <a:prstGeom prst="roundRect">
+            <a:avLst/>
+          </a:prstGeom>
+          <a:solidFill>
+            <a:srgbClr val="F5F6F8"/>
+          </a:solidFill>
+          <a:ln w="19050">
+            <a:solidFill>
+              <a:srgbClr val="E4E7EC"/>
+            </a:solidFill>
+          </a:ln>
+        </p:spPr>
+        <p:style>
+          <a:lnRef idx="1">
+            <a:schemeClr val="accent1"/>
+          </a:lnRef>
+          <a:fillRef idx="3">
+            <a:schemeClr val="accent1"/>
+          </a:fillRef>
+          <a:effectRef idx="2">
+            <a:schemeClr val="accent1"/>
+          </a:effectRef>
+          <a:fontRef idx="minor">
+            <a:schemeClr val="lt1"/>
+          </a:fontRef>
+        </p:style>
+        <p:txBody>
+          <a:bodyPr rtlCol="0" anchor="ctr"/>
+          <a:lstStyle/>
+          <a:p>
+            <a:pPr algn="ctr"/>
+          </a:p>
+        </p:txBody>
+      </p:sp>
+      <p:sp>
+        <p:nvSpPr>
+          <p:cNvPr id="10" name="TextBox 9"/>
+          <p:cNvSpPr txBox="1"/>
+          <p:nvPr/>
+        </p:nvSpPr>
+        <p:spPr>
+          <a:xfrm>
+            <a:off x="4434840" y="2788920"/>
+            <a:ext cx="3108960" cy="822960"/>
+          </a:xfrm>
+          <a:prstGeom prst="rect">
+            <a:avLst/>
+          </a:prstGeom>
+          <a:noFill/>
+        </p:spPr>
+        <p:txBody>
+          <a:bodyPr wrap="square">
+            <a:spAutoFit/>
+          </a:bodyPr>
+          <a:lstStyle/>
+          <a:p>
+            <a:pPr>
+              <a:defRPr b="1" sz="1200">
+                <a:solidFill>
+                  <a:srgbClr val="2B5CE0"/>
+                </a:solidFill>
+              </a:defRPr>
+            </a:pPr>
+            <a:r>
+              <a:t>B. Phone entry UX</a:t>
+            </a:r>
+          </a:p>
+          <a:p>
+            <a:pPr>
+              <a:spcBef>
+                <a:spcPts val="200"/>
+              </a:spcBef>
+              <a:defRPr sz="1100">
+                <a:solidFill>
+                  <a:srgbClr val="4B5160"/>
+                </a:solidFill>
+              </a:defRPr>
+            </a:pPr>
+            <a:r>
+              <a:t>Browser keypress blocks / formatting bugs</a:t>
+            </a:r>
+          </a:p>
+        </p:txBody>
+      </p:sp>
+      <p:sp>
+        <p:nvSpPr>
+          <p:cNvPr id="11" name="Right Arrow 10"/>
+          <p:cNvSpPr/>
+          <p:nvPr/>
+        </p:nvSpPr>
+        <p:spPr>
+          <a:xfrm>
+            <a:off x="4023360" y="3063240"/>
+            <a:ext cx="274320" cy="182880"/>
+          </a:xfrm>
+          <a:prstGeom prst="rightArrow">
+            <a:avLst/>
+          </a:prstGeom>
+          <a:solidFill>
+            <a:srgbClr val="E4E7EC"/>
+          </a:solidFill>
+          <a:ln>
+            <a:noFill/>
+          </a:ln>
+        </p:spPr>
+        <p:style>
+          <a:lnRef idx="1">
+            <a:schemeClr val="accent1"/>
+          </a:lnRef>
+          <a:fillRef idx="3">
+            <a:schemeClr val="accent1"/>
+          </a:fillRef>
+          <a:effectRef idx="2">
+            <a:schemeClr val="accent1"/>
+          </a:effectRef>
+          <a:fontRef idx="minor">
+            <a:schemeClr val="lt1"/>
+          </a:fontRef>
+        </p:style>
+        <p:txBody>
+          <a:bodyPr rtlCol="0" anchor="ctr"/>
+          <a:lstStyle/>
+          <a:p>
+            <a:pPr algn="ctr"/>
+          </a:p>
+        </p:txBody>
+      </p:sp>
+      <p:sp>
+        <p:nvSpPr>
+          <p:cNvPr id="12" name="Rounded Rectangle 11"/>
+          <p:cNvSpPr/>
+          <p:nvPr/>
+        </p:nvSpPr>
+        <p:spPr>
+          <a:xfrm>
+            <a:off x="4389120" y="3840480"/>
+            <a:ext cx="3200400" cy="914400"/>
+          </a:xfrm>
+          <a:prstGeom prst="roundRect">
+            <a:avLst/>
+          </a:prstGeom>
+          <a:solidFill>
+            <a:srgbClr val="F5F6F8"/>
+          </a:solidFill>
+          <a:ln w="19050">
+            <a:solidFill>
+              <a:srgbClr val="E4E7EC"/>
+            </a:solidFill>
+          </a:ln>
+        </p:spPr>
+        <p:style>
+          <a:lnRef idx="1">
+            <a:schemeClr val="accent1"/>
+          </a:lnRef>
+          <a:fillRef idx="3">
+            <a:schemeClr val="accent1"/>
+          </a:fillRef>
+          <a:effectRef idx="2">
+            <a:schemeClr val="accent1"/>
+          </a:effectRef>
+          <a:fontRef idx="minor">
+            <a:schemeClr val="lt1"/>
+          </a:fontRef>
+        </p:style>
+        <p:txBody>
+          <a:bodyPr rtlCol="0" anchor="ctr"/>
+          <a:lstStyle/>
+          <a:p>
+            <a:pPr algn="ctr"/>
+          </a:p>
+        </p:txBody>
+      </p:sp>
+      <p:sp>
+        <p:nvSpPr>
+          <p:cNvPr id="13" name="TextBox 12"/>
+          <p:cNvSpPr txBox="1"/>
+          <p:nvPr/>
+        </p:nvSpPr>
+        <p:spPr>
+          <a:xfrm>
+            <a:off x="4434840" y="3886200"/>
+            <a:ext cx="3108960" cy="822960"/>
+          </a:xfrm>
+          <a:prstGeom prst="rect">
+            <a:avLst/>
+          </a:prstGeom>
+          <a:noFill/>
+        </p:spPr>
+        <p:txBody>
+          <a:bodyPr wrap="square">
+            <a:spAutoFit/>
+          </a:bodyPr>
+          <a:lstStyle/>
+          <a:p>
+            <a:pPr>
+              <a:defRPr b="1" sz="1200">
+                <a:solidFill>
+                  <a:srgbClr val="2B5CE0"/>
+                </a:solidFill>
+              </a:defRPr>
+            </a:pPr>
+            <a:r>
+              <a:t>C. OTP Delivery</a:t>
+            </a:r>
+          </a:p>
+          <a:p>
+            <a:pPr>
+              <a:spcBef>
+                <a:spcPts val="200"/>
+              </a:spcBef>
+              <a:defRPr sz="1100">
+                <a:solidFill>
+                  <a:srgbClr val="4B5160"/>
+                </a:solidFill>
+              </a:defRPr>
+            </a:pPr>
+            <a:r>
+              <a:t>Carrier SMS routing delays / timeouts</a:t>
+            </a:r>
+          </a:p>
+        </p:txBody>
+      </p:sp>
+      <p:sp>
+        <p:nvSpPr>
+          <p:cNvPr id="14" name="Right Arrow 13"/>
+          <p:cNvSpPr/>
+          <p:nvPr/>
+        </p:nvSpPr>
+        <p:spPr>
+          <a:xfrm>
+            <a:off x="4023360" y="4160520"/>
+            <a:ext cx="274320" cy="182880"/>
+          </a:xfrm>
+          <a:prstGeom prst="rightArrow">
+            <a:avLst/>
+          </a:prstGeom>
+          <a:solidFill>
+            <a:srgbClr val="E4E7EC"/>
+          </a:solidFill>
+          <a:ln>
+            <a:noFill/>
+          </a:ln>
+        </p:spPr>
+        <p:style>
+          <a:lnRef idx="1">
+            <a:schemeClr val="accent1"/>
+          </a:lnRef>
+          <a:fillRef idx="3">
+            <a:schemeClr val="accent1"/>
+          </a:fillRef>
+          <a:effectRef idx="2">
+            <a:schemeClr val="accent1"/>
+          </a:effectRef>
+          <a:fontRef idx="minor">
+            <a:schemeClr val="lt1"/>
+          </a:fontRef>
+        </p:style>
+        <p:txBody>
+          <a:bodyPr rtlCol="0" anchor="ctr"/>
+          <a:lstStyle/>
+          <a:p>
+            <a:pPr algn="ctr"/>
+          </a:p>
+        </p:txBody>
+      </p:sp>
+      <p:sp>
+        <p:nvSpPr>
+          <p:cNvPr id="15" name="Rounded Rectangle 14"/>
+          <p:cNvSpPr/>
+          <p:nvPr/>
+        </p:nvSpPr>
+        <p:spPr>
+          <a:xfrm>
+            <a:off x="4389120" y="4937760"/>
+            <a:ext cx="3200400" cy="914400"/>
+          </a:xfrm>
+          <a:prstGeom prst="roundRect">
+            <a:avLst/>
+          </a:prstGeom>
+          <a:solidFill>
+            <a:srgbClr val="F5F6F8"/>
+          </a:solidFill>
+          <a:ln w="19050">
+            <a:solidFill>
+              <a:srgbClr val="E4E7EC"/>
+            </a:solidFill>
+          </a:ln>
+        </p:spPr>
+        <p:style>
+          <a:lnRef idx="1">
+            <a:schemeClr val="accent1"/>
+          </a:lnRef>
+          <a:fillRef idx="3">
+            <a:schemeClr val="accent1"/>
+          </a:fillRef>
+          <a:effectRef idx="2">
+            <a:schemeClr val="accent1"/>
+          </a:effectRef>
+          <a:fontRef idx="minor">
+            <a:schemeClr val="lt1"/>
+          </a:fontRef>
+        </p:style>
+        <p:txBody>
+          <a:bodyPr rtlCol="0" anchor="ctr"/>
+          <a:lstStyle/>
+          <a:p>
+            <a:pPr algn="ctr"/>
+          </a:p>
+        </p:txBody>
+      </p:sp>
+      <p:sp>
+        <p:nvSpPr>
+          <p:cNvPr id="16" name="TextBox 15"/>
+          <p:cNvSpPr txBox="1"/>
+          <p:nvPr/>
+        </p:nvSpPr>
+        <p:spPr>
+          <a:xfrm>
+            <a:off x="4434840" y="4983480"/>
+            <a:ext cx="3108960" cy="822960"/>
+          </a:xfrm>
+          <a:prstGeom prst="rect">
+            <a:avLst/>
+          </a:prstGeom>
+          <a:noFill/>
+        </p:spPr>
+        <p:txBody>
+          <a:bodyPr wrap="square">
+            <a:spAutoFit/>
+          </a:bodyPr>
+          <a:lstStyle/>
+          <a:p>
+            <a:pPr>
+              <a:defRPr b="1" sz="1200">
+                <a:solidFill>
+                  <a:srgbClr val="2B5CE0"/>
+                </a:solidFill>
+              </a:defRPr>
+            </a:pPr>
+            <a:r>
+              <a:t>D. OTP Validation</a:t>
+            </a:r>
+          </a:p>
+          <a:p>
+            <a:pPr>
+              <a:spcBef>
+                <a:spcPts val="200"/>
+              </a:spcBef>
+              <a:defRPr sz="1100">
+                <a:solidFill>
+                  <a:srgbClr val="4B5160"/>
+                </a:solidFill>
+              </a:defRPr>
+            </a:pPr>
+            <a:r>
+              <a:t>Digit auto-advance focus regressions</a:t>
+            </a:r>
+          </a:p>
+        </p:txBody>
+      </p:sp>
+      <p:sp>
+        <p:nvSpPr>
+          <p:cNvPr id="17" name="Right Arrow 16"/>
+          <p:cNvSpPr/>
+          <p:nvPr/>
+        </p:nvSpPr>
+        <p:spPr>
+          <a:xfrm>
+            <a:off x="4023360" y="5257800"/>
+            <a:ext cx="274320" cy="182880"/>
+          </a:xfrm>
+          <a:prstGeom prst="rightArrow">
+            <a:avLst/>
+          </a:prstGeom>
+          <a:solidFill>
+            <a:srgbClr val="E4E7EC"/>
+          </a:solidFill>
+          <a:ln>
+            <a:noFill/>
+          </a:ln>
+        </p:spPr>
+        <p:style>
+          <a:lnRef idx="1">
+            <a:schemeClr val="accent1"/>
+          </a:lnRef>
+          <a:fillRef idx="3">
+            <a:schemeClr val="accent1"/>
+          </a:fillRef>
+          <a:effectRef idx="2">
+            <a:schemeClr val="accent1"/>
+          </a:effectRef>
+          <a:fontRef idx="minor">
+            <a:schemeClr val="lt1"/>
+          </a:fontRef>
+        </p:style>
+        <p:txBody>
+          <a:bodyPr rtlCol="0" anchor="ctr"/>
+          <a:lstStyle/>
+          <a:p>
+            <a:pPr algn="ctr"/>
+          </a:p>
+        </p:txBody>
+      </p:sp>
+      <p:sp>
+        <p:nvSpPr>
+          <p:cNvPr id="18" name="Rounded Rectangle 17"/>
+          <p:cNvSpPr/>
+          <p:nvPr/>
+        </p:nvSpPr>
+        <p:spPr>
+          <a:xfrm>
+            <a:off x="8046720" y="1645920"/>
+            <a:ext cx="3383280" cy="4206240"/>
           </a:xfrm>
           <a:prstGeom prst="roundRect">
             <a:avLst/>
@@ -5809,14 +8476,14 @@
       </p:sp>
       <p:sp>
         <p:nvSpPr>
-          <p:cNvPr id="5" name="TextBox 4"/>
+          <p:cNvPr id="19" name="TextBox 18"/>
           <p:cNvSpPr txBox="1"/>
           <p:nvPr/>
         </p:nvSpPr>
         <p:spPr>
           <a:xfrm>
-            <a:off x="914400" y="1828800"/>
-            <a:ext cx="4937760" cy="4023360"/>
+            <a:off x="8138160" y="1737360"/>
+            <a:ext cx="3200400" cy="4023360"/>
           </a:xfrm>
           <a:prstGeom prst="rect">
             <a:avLst/>
@@ -5832,251 +8499,102 @@
             <a:pPr>
               <a:defRPr b="1" sz="1200">
                 <a:solidFill>
-                  <a:srgbClr val="2B5CE0"/>
-                </a:solidFill>
-              </a:defRPr>
-            </a:pPr>
-            <a:r>
-              <a:t>THE ROOT CAUSE HYPOTHESIS TREE</a:t>
+                  <a:srgbClr val="1F9D63"/>
+                </a:solidFill>
+              </a:defRPr>
+            </a:pPr>
+            <a:r>
+              <a:t>INVESTIGATION PROTOCOL</a:t>
             </a:r>
           </a:p>
           <a:p>
             <a:pPr>
               <a:spcBef>
-                <a:spcPts val="1400"/>
+                <a:spcPts val="800"/>
               </a:spcBef>
-              <a:defRPr sz="1300" b="1">
+              <a:defRPr sz="1200">
                 <a:solidFill>
                   <a:srgbClr val="111318"/>
                 </a:solidFill>
               </a:defRPr>
             </a:pPr>
             <a:r>
-              <a:t>• H1: Onboarding SMS latency: </a:t>
-            </a:r>
-            <a:r>
-              <a:rPr b="0" sz="1250">
-                <a:solidFill>
-                  <a:srgbClr val="4B5160"/>
-                </a:solidFill>
-              </a:rPr>
-              <a:t>OTP delivery is dropping due to carrier routing delays in specific regions, causing users to abandon the funnel.</a:t>
+              <a:t>1. Validate telemetry data integrity.</a:t>
             </a:r>
           </a:p>
           <a:p>
             <a:pPr>
               <a:spcBef>
-                <a:spcPts val="1400"/>
+                <a:spcPts val="800"/>
               </a:spcBef>
-              <a:defRPr sz="1300" b="1">
+              <a:defRPr sz="1200">
                 <a:solidFill>
                   <a:srgbClr val="111318"/>
                 </a:solidFill>
               </a:defRPr>
             </a:pPr>
             <a:r>
-              <a:t>• H2: Erasure warning anxiety: </a:t>
-            </a:r>
-            <a:r>
-              <a:rPr b="0" sz="1250">
-                <a:solidFill>
-                  <a:srgbClr val="4B5160"/>
-                </a:solidFill>
-              </a:rPr>
-              <a:t>The Call-Protection Warning modal copy is too alarming, causing users to abandon unlisting requests.</a:t>
+              <a:t>2. Segment rates by carrier &amp; browser.</a:t>
             </a:r>
           </a:p>
           <a:p>
             <a:pPr>
               <a:spcBef>
-                <a:spcPts val="1400"/>
+                <a:spcPts val="800"/>
               </a:spcBef>
-              <a:defRPr sz="1300" b="1">
+              <a:defRPr sz="1200">
                 <a:solidFill>
                   <a:srgbClr val="111318"/>
                 </a:solidFill>
               </a:defRPr>
             </a:pPr>
             <a:r>
-              <a:t>• H3: Ticket review SLA delays: </a:t>
-            </a:r>
-            <a:r>
-              <a:rPr b="0" sz="1250">
-                <a:solidFill>
-                  <a:srgbClr val="4B5160"/>
-                </a:solidFill>
-              </a:rPr>
-              <a:t>Slow manual review queues lead to ticket backlog, prompting users to cancel active requests in frustration.</a:t>
-            </a:r>
-          </a:p>
-        </p:txBody>
-      </p:sp>
-      <p:sp>
-        <p:nvSpPr>
-          <p:cNvPr id="6" name="Rounded Rectangle 5"/>
-          <p:cNvSpPr/>
-          <p:nvPr/>
-        </p:nvSpPr>
-        <p:spPr>
-          <a:xfrm>
-            <a:off x="6400800" y="1645920"/>
-            <a:ext cx="5029200" cy="4389120"/>
-          </a:xfrm>
-          <a:prstGeom prst="roundRect">
-            <a:avLst/>
-          </a:prstGeom>
-          <a:solidFill>
-            <a:srgbClr val="F5F6F8"/>
-          </a:solidFill>
-          <a:ln>
-            <a:noFill/>
-          </a:ln>
-        </p:spPr>
-        <p:style>
-          <a:lnRef idx="1">
-            <a:schemeClr val="accent1"/>
-          </a:lnRef>
-          <a:fillRef idx="3">
-            <a:schemeClr val="accent1"/>
-          </a:fillRef>
-          <a:effectRef idx="2">
-            <a:schemeClr val="accent1"/>
-          </a:effectRef>
-          <a:fontRef idx="minor">
-            <a:schemeClr val="lt1"/>
-          </a:fontRef>
-        </p:style>
-        <p:txBody>
-          <a:bodyPr rtlCol="0" anchor="ctr"/>
-          <a:lstStyle/>
-          <a:p>
-            <a:pPr algn="ctr"/>
-          </a:p>
-        </p:txBody>
-      </p:sp>
-      <p:sp>
-        <p:nvSpPr>
-          <p:cNvPr id="7" name="TextBox 6"/>
-          <p:cNvSpPr txBox="1"/>
-          <p:nvPr/>
-        </p:nvSpPr>
-        <p:spPr>
-          <a:xfrm>
-            <a:off x="6583680" y="1828800"/>
-            <a:ext cx="4663440" cy="4023360"/>
-          </a:xfrm>
-          <a:prstGeom prst="rect">
-            <a:avLst/>
-          </a:prstGeom>
-          <a:noFill/>
-        </p:spPr>
-        <p:txBody>
-          <a:bodyPr wrap="square">
-            <a:spAutoFit/>
-          </a:bodyPr>
-          <a:lstStyle/>
-          <a:p>
-            <a:pPr>
-              <a:defRPr b="1" sz="1200">
-                <a:solidFill>
-                  <a:srgbClr val="1F9D63"/>
-                </a:solidFill>
-              </a:defRPr>
-            </a:pPr>
-            <a:r>
-              <a:t>DIAGNOSTIC PROTOCOL</a:t>
+              <a:t>3. Isolate exact step drop-off ratios.</a:t>
             </a:r>
           </a:p>
           <a:p>
             <a:pPr>
               <a:spcBef>
-                <a:spcPts val="1000"/>
+                <a:spcPts val="800"/>
               </a:spcBef>
-              <a:defRPr sz="1300" b="1">
+              <a:defRPr sz="1200">
                 <a:solidFill>
                   <a:srgbClr val="111318"/>
                 </a:solidFill>
               </a:defRPr>
             </a:pPr>
             <a:r>
-              <a:t>• Segment Funnel Analytics: </a:t>
-            </a:r>
-            <a:r>
-              <a:rPr b="0" sz="1250">
-                <a:solidFill>
-                  <a:srgbClr val="4B5160"/>
-                </a:solidFill>
-              </a:rPr>
-              <a:t>Evaluate conversion drop-offs specifically at Phone Entry -&gt; OTP vs. OTP -&gt; Dashboard vs. Action Submitted.</a:t>
+              <a:t>4. Check operational logs &amp; SMS latency.</a:t>
             </a:r>
           </a:p>
           <a:p>
             <a:pPr>
               <a:spcBef>
-                <a:spcPts val="1000"/>
+                <a:spcPts val="800"/>
               </a:spcBef>
-              <a:defRPr sz="1300" b="1">
+              <a:defRPr sz="1200">
                 <a:solidFill>
                   <a:srgbClr val="111318"/>
                 </a:solidFill>
               </a:defRPr>
             </a:pPr>
             <a:r>
-              <a:t>• Verify carrier SMS logs: </a:t>
-            </a:r>
-            <a:r>
-              <a:rPr b="0" sz="1250">
-                <a:solidFill>
-                  <a:srgbClr val="4B5160"/>
-                </a:solidFill>
-              </a:rPr>
-              <a:t>Cross-check OTP resend click volumes and OTP retry counts to isolate network latencies.</a:t>
+              <a:t>5. Apply mitigations (SMS provider hotfix).</a:t>
             </a:r>
           </a:p>
           <a:p>
             <a:pPr>
               <a:spcBef>
-                <a:spcPts val="1000"/>
+                <a:spcPts val="800"/>
               </a:spcBef>
-              <a:defRPr sz="1300" b="1">
+              <a:defRPr sz="1200">
                 <a:solidFill>
                   <a:srgbClr val="111318"/>
                 </a:solidFill>
               </a:defRPr>
             </a:pPr>
             <a:r>
-              <a:t>• Test warning disclosures: </a:t>
-            </a:r>
-            <a:r>
-              <a:rPr b="0" sz="1250">
-                <a:solidFill>
-                  <a:srgbClr val="4B5160"/>
-                </a:solidFill>
-              </a:rPr>
-              <a:t>Compare modal drop-off rates before and after expanding the progressive trade-off disclosures.</a:t>
-            </a:r>
-          </a:p>
-          <a:p>
-            <a:pPr>
-              <a:spcBef>
-                <a:spcPts val="1000"/>
-              </a:spcBef>
-              <a:defRPr sz="1300" b="1">
-                <a:solidFill>
-                  <a:srgbClr val="111318"/>
-                </a:solidFill>
-              </a:defRPr>
-            </a:pPr>
-            <a:r>
-              <a:t>• Inspect queue backlog SLAs: </a:t>
-            </a:r>
-            <a:r>
-              <a:rPr b="0" sz="1250">
-                <a:solidFill>
-                  <a:srgbClr val="4B5160"/>
-                </a:solidFill>
-              </a:rPr>
-              <a:t>Review median ticket wait times to confirm if manual reviews are exceeding the 5-day SLA.</a:t>
+              <a:t>6. Monitor dashboard recovery metrics.</a:t>
             </a:r>
           </a:p>
         </p:txBody>
@@ -6138,7 +8656,7 @@
               </a:defRPr>
             </a:pPr>
             <a:r>
-              <a:t>PORTAL ANALYTICS</a:t>
+              <a:t>PORTAL PERFORMANCE</a:t>
             </a:r>
           </a:p>
         </p:txBody>
@@ -6174,7 +8692,7 @@
               </a:defRPr>
             </a:pPr>
             <a:r>
-              <a:t>Product Dashboard: Core Privacy Performance Metrics</a:t>
+              <a:t>PM Analytics: Dashboard Performance (Illustrative Data)</a:t>
             </a:r>
           </a:p>
         </p:txBody>
@@ -6187,8 +8705,8 @@
         </p:nvSpPr>
         <p:spPr>
           <a:xfrm>
-            <a:off x="731520" y="1645920"/>
-            <a:ext cx="10698480" cy="4389120"/>
+            <a:off x="731520" y="1554480"/>
+            <a:ext cx="2514600" cy="1051560"/>
           </a:xfrm>
           <a:prstGeom prst="roundRect">
             <a:avLst/>
@@ -6230,8 +8748,8 @@
         </p:nvSpPr>
         <p:spPr>
           <a:xfrm>
-            <a:off x="914400" y="1828800"/>
-            <a:ext cx="10332720" cy="4023360"/>
+            <a:off x="731520" y="1645920"/>
+            <a:ext cx="2514600" cy="914400"/>
           </a:xfrm>
           <a:prstGeom prst="rect">
             <a:avLst/>
@@ -6244,6 +8762,378 @@
           </a:bodyPr>
           <a:lstStyle/>
           <a:p>
+            <a:pPr algn="ctr">
+              <a:defRPr sz="1100" b="1">
+                <a:solidFill>
+                  <a:srgbClr val="4B5160"/>
+                </a:solidFill>
+              </a:defRPr>
+            </a:pPr>
+            <a:r>
+              <a:t>Verified Agency Rate</a:t>
+            </a:r>
+          </a:p>
+          <a:p>
+            <a:pPr algn="ctr">
+              <a:spcBef>
+                <a:spcPts val="400"/>
+              </a:spcBef>
+              <a:defRPr sz="2200" b="1">
+                <a:solidFill>
+                  <a:srgbClr val="2B5CE0"/>
+                </a:solidFill>
+              </a:defRPr>
+            </a:pPr>
+            <a:r>
+              <a:t>78.4%</a:t>
+            </a:r>
+          </a:p>
+        </p:txBody>
+      </p:sp>
+      <p:sp>
+        <p:nvSpPr>
+          <p:cNvPr id="6" name="Rounded Rectangle 5"/>
+          <p:cNvSpPr/>
+          <p:nvPr/>
+        </p:nvSpPr>
+        <p:spPr>
+          <a:xfrm>
+            <a:off x="3429000" y="1554480"/>
+            <a:ext cx="2514600" cy="1051560"/>
+          </a:xfrm>
+          <a:prstGeom prst="roundRect">
+            <a:avLst/>
+          </a:prstGeom>
+          <a:solidFill>
+            <a:srgbClr val="F5F6F8"/>
+          </a:solidFill>
+          <a:ln>
+            <a:noFill/>
+          </a:ln>
+        </p:spPr>
+        <p:style>
+          <a:lnRef idx="1">
+            <a:schemeClr val="accent1"/>
+          </a:lnRef>
+          <a:fillRef idx="3">
+            <a:schemeClr val="accent1"/>
+          </a:fillRef>
+          <a:effectRef idx="2">
+            <a:schemeClr val="accent1"/>
+          </a:effectRef>
+          <a:fontRef idx="minor">
+            <a:schemeClr val="lt1"/>
+          </a:fontRef>
+        </p:style>
+        <p:txBody>
+          <a:bodyPr rtlCol="0" anchor="ctr"/>
+          <a:lstStyle/>
+          <a:p>
+            <a:pPr algn="ctr"/>
+          </a:p>
+        </p:txBody>
+      </p:sp>
+      <p:sp>
+        <p:nvSpPr>
+          <p:cNvPr id="7" name="TextBox 6"/>
+          <p:cNvSpPr txBox="1"/>
+          <p:nvPr/>
+        </p:nvSpPr>
+        <p:spPr>
+          <a:xfrm>
+            <a:off x="3429000" y="1645920"/>
+            <a:ext cx="2514600" cy="914400"/>
+          </a:xfrm>
+          <a:prstGeom prst="rect">
+            <a:avLst/>
+          </a:prstGeom>
+          <a:noFill/>
+        </p:spPr>
+        <p:txBody>
+          <a:bodyPr wrap="square">
+            <a:spAutoFit/>
+          </a:bodyPr>
+          <a:lstStyle/>
+          <a:p>
+            <a:pPr algn="ctr">
+              <a:defRPr sz="1100" b="1">
+                <a:solidFill>
+                  <a:srgbClr val="4B5160"/>
+                </a:solidFill>
+              </a:defRPr>
+            </a:pPr>
+            <a:r>
+              <a:t>OTP Success Rate</a:t>
+            </a:r>
+          </a:p>
+          <a:p>
+            <a:pPr algn="ctr">
+              <a:spcBef>
+                <a:spcPts val="400"/>
+              </a:spcBef>
+              <a:defRPr sz="2200" b="1">
+                <a:solidFill>
+                  <a:srgbClr val="1F9D63"/>
+                </a:solidFill>
+              </a:defRPr>
+            </a:pPr>
+            <a:r>
+              <a:t>87.1%</a:t>
+            </a:r>
+          </a:p>
+        </p:txBody>
+      </p:sp>
+      <p:sp>
+        <p:nvSpPr>
+          <p:cNvPr id="8" name="Rounded Rectangle 7"/>
+          <p:cNvSpPr/>
+          <p:nvPr/>
+        </p:nvSpPr>
+        <p:spPr>
+          <a:xfrm>
+            <a:off x="6126480" y="1554480"/>
+            <a:ext cx="2514600" cy="1051560"/>
+          </a:xfrm>
+          <a:prstGeom prst="roundRect">
+            <a:avLst/>
+          </a:prstGeom>
+          <a:solidFill>
+            <a:srgbClr val="F5F6F8"/>
+          </a:solidFill>
+          <a:ln>
+            <a:noFill/>
+          </a:ln>
+        </p:spPr>
+        <p:style>
+          <a:lnRef idx="1">
+            <a:schemeClr val="accent1"/>
+          </a:lnRef>
+          <a:fillRef idx="3">
+            <a:schemeClr val="accent1"/>
+          </a:fillRef>
+          <a:effectRef idx="2">
+            <a:schemeClr val="accent1"/>
+          </a:effectRef>
+          <a:fontRef idx="minor">
+            <a:schemeClr val="lt1"/>
+          </a:fontRef>
+        </p:style>
+        <p:txBody>
+          <a:bodyPr rtlCol="0" anchor="ctr"/>
+          <a:lstStyle/>
+          <a:p>
+            <a:pPr algn="ctr"/>
+          </a:p>
+        </p:txBody>
+      </p:sp>
+      <p:sp>
+        <p:nvSpPr>
+          <p:cNvPr id="9" name="TextBox 8"/>
+          <p:cNvSpPr txBox="1"/>
+          <p:nvPr/>
+        </p:nvSpPr>
+        <p:spPr>
+          <a:xfrm>
+            <a:off x="6126480" y="1645920"/>
+            <a:ext cx="2514600" cy="914400"/>
+          </a:xfrm>
+          <a:prstGeom prst="rect">
+            <a:avLst/>
+          </a:prstGeom>
+          <a:noFill/>
+        </p:spPr>
+        <p:txBody>
+          <a:bodyPr wrap="square">
+            <a:spAutoFit/>
+          </a:bodyPr>
+          <a:lstStyle/>
+          <a:p>
+            <a:pPr algn="ctr">
+              <a:defRPr sz="1100" b="1">
+                <a:solidFill>
+                  <a:srgbClr val="4B5160"/>
+                </a:solidFill>
+              </a:defRPr>
+            </a:pPr>
+            <a:r>
+              <a:t>Median SLA</a:t>
+            </a:r>
+          </a:p>
+          <a:p>
+            <a:pPr algn="ctr">
+              <a:spcBef>
+                <a:spcPts val="400"/>
+              </a:spcBef>
+              <a:defRPr sz="2200" b="1">
+                <a:solidFill>
+                  <a:srgbClr val="C57A11"/>
+                </a:solidFill>
+              </a:defRPr>
+            </a:pPr>
+            <a:r>
+              <a:t>3.2 Days</a:t>
+            </a:r>
+          </a:p>
+        </p:txBody>
+      </p:sp>
+      <p:sp>
+        <p:nvSpPr>
+          <p:cNvPr id="10" name="Rounded Rectangle 9"/>
+          <p:cNvSpPr/>
+          <p:nvPr/>
+        </p:nvSpPr>
+        <p:spPr>
+          <a:xfrm>
+            <a:off x="8823960" y="1554480"/>
+            <a:ext cx="2514600" cy="1051560"/>
+          </a:xfrm>
+          <a:prstGeom prst="roundRect">
+            <a:avLst/>
+          </a:prstGeom>
+          <a:solidFill>
+            <a:srgbClr val="F5F6F8"/>
+          </a:solidFill>
+          <a:ln>
+            <a:noFill/>
+          </a:ln>
+        </p:spPr>
+        <p:style>
+          <a:lnRef idx="1">
+            <a:schemeClr val="accent1"/>
+          </a:lnRef>
+          <a:fillRef idx="3">
+            <a:schemeClr val="accent1"/>
+          </a:fillRef>
+          <a:effectRef idx="2">
+            <a:schemeClr val="accent1"/>
+          </a:effectRef>
+          <a:fontRef idx="minor">
+            <a:schemeClr val="lt1"/>
+          </a:fontRef>
+        </p:style>
+        <p:txBody>
+          <a:bodyPr rtlCol="0" anchor="ctr"/>
+          <a:lstStyle/>
+          <a:p>
+            <a:pPr algn="ctr"/>
+          </a:p>
+        </p:txBody>
+      </p:sp>
+      <p:sp>
+        <p:nvSpPr>
+          <p:cNvPr id="11" name="TextBox 10"/>
+          <p:cNvSpPr txBox="1"/>
+          <p:nvPr/>
+        </p:nvSpPr>
+        <p:spPr>
+          <a:xfrm>
+            <a:off x="8823960" y="1645920"/>
+            <a:ext cx="2514600" cy="914400"/>
+          </a:xfrm>
+          <a:prstGeom prst="rect">
+            <a:avLst/>
+          </a:prstGeom>
+          <a:noFill/>
+        </p:spPr>
+        <p:txBody>
+          <a:bodyPr wrap="square">
+            <a:spAutoFit/>
+          </a:bodyPr>
+          <a:lstStyle/>
+          <a:p>
+            <a:pPr algn="ctr">
+              <a:defRPr sz="1100" b="1">
+                <a:solidFill>
+                  <a:srgbClr val="4B5160"/>
+                </a:solidFill>
+              </a:defRPr>
+            </a:pPr>
+            <a:r>
+              <a:t>CSAT Score</a:t>
+            </a:r>
+          </a:p>
+          <a:p>
+            <a:pPr algn="ctr">
+              <a:spcBef>
+                <a:spcPts val="400"/>
+              </a:spcBef>
+              <a:defRPr sz="2200" b="1">
+                <a:solidFill>
+                  <a:srgbClr val="1F9D63"/>
+                </a:solidFill>
+              </a:defRPr>
+            </a:pPr>
+            <a:r>
+              <a:t>86.4%</a:t>
+            </a:r>
+          </a:p>
+        </p:txBody>
+      </p:sp>
+      <p:sp>
+        <p:nvSpPr>
+          <p:cNvPr id="12" name="Rounded Rectangle 11"/>
+          <p:cNvSpPr/>
+          <p:nvPr/>
+        </p:nvSpPr>
+        <p:spPr>
+          <a:xfrm>
+            <a:off x="731520" y="2834640"/>
+            <a:ext cx="5303520" cy="3291840"/>
+          </a:xfrm>
+          <a:prstGeom prst="roundRect">
+            <a:avLst/>
+          </a:prstGeom>
+          <a:solidFill>
+            <a:srgbClr val="F5F6F8"/>
+          </a:solidFill>
+          <a:ln>
+            <a:noFill/>
+          </a:ln>
+        </p:spPr>
+        <p:style>
+          <a:lnRef idx="1">
+            <a:schemeClr val="accent1"/>
+          </a:lnRef>
+          <a:fillRef idx="3">
+            <a:schemeClr val="accent1"/>
+          </a:fillRef>
+          <a:effectRef idx="2">
+            <a:schemeClr val="accent1"/>
+          </a:effectRef>
+          <a:fontRef idx="minor">
+            <a:schemeClr val="lt1"/>
+          </a:fontRef>
+        </p:style>
+        <p:txBody>
+          <a:bodyPr rtlCol="0" anchor="ctr"/>
+          <a:lstStyle/>
+          <a:p>
+            <a:pPr algn="ctr"/>
+          </a:p>
+        </p:txBody>
+      </p:sp>
+      <p:sp>
+        <p:nvSpPr>
+          <p:cNvPr id="13" name="TextBox 12"/>
+          <p:cNvSpPr txBox="1"/>
+          <p:nvPr/>
+        </p:nvSpPr>
+        <p:spPr>
+          <a:xfrm>
+            <a:off x="822960" y="2926080"/>
+            <a:ext cx="5120640" cy="3108960"/>
+          </a:xfrm>
+          <a:prstGeom prst="rect">
+            <a:avLst/>
+          </a:prstGeom>
+          <a:noFill/>
+        </p:spPr>
+        <p:txBody>
+          <a:bodyPr wrap="square">
+            <a:spAutoFit/>
+          </a:bodyPr>
+          <a:lstStyle/>
+          <a:p>
             <a:pPr>
               <a:defRPr b="1" sz="1200">
                 <a:solidFill>
@@ -6252,7 +9142,177 @@
               </a:defRPr>
             </a:pPr>
             <a:r>
-              <a:t>PORTAL ANALYTICS MOCK (WEEKLY REVIEWS)</a:t>
+              <a:t>CONVERSION FUNNEL (MOCKUP)</a:t>
+            </a:r>
+          </a:p>
+          <a:p>
+            <a:pPr>
+              <a:spcBef>
+                <a:spcPts val="800"/>
+              </a:spcBef>
+              <a:defRPr b="1" sz="1200">
+                <a:solidFill>
+                  <a:srgbClr val="111318"/>
+                </a:solidFill>
+              </a:defRPr>
+            </a:pPr>
+            <a:r>
+              <a:t>1. Intro Visits: </a:t>
+            </a:r>
+            <a:r>
+              <a:rPr b="0">
+                <a:solidFill>
+                  <a:srgbClr val="4B5160"/>
+                </a:solidFill>
+              </a:rPr>
+              <a:t>128,450 (100%)</a:t>
+            </a:r>
+          </a:p>
+          <a:p>
+            <a:pPr>
+              <a:spcBef>
+                <a:spcPts val="800"/>
+              </a:spcBef>
+              <a:defRPr b="1" sz="1200">
+                <a:solidFill>
+                  <a:srgbClr val="111318"/>
+                </a:solidFill>
+              </a:defRPr>
+            </a:pPr>
+            <a:r>
+              <a:t>2. Phone Entered: </a:t>
+            </a:r>
+            <a:r>
+              <a:rPr b="0">
+                <a:solidFill>
+                  <a:srgbClr val="4B5160"/>
+                </a:solidFill>
+              </a:rPr>
+              <a:t>100,700 (78.4%)</a:t>
+            </a:r>
+          </a:p>
+          <a:p>
+            <a:pPr>
+              <a:spcBef>
+                <a:spcPts val="800"/>
+              </a:spcBef>
+              <a:defRPr b="1" sz="1200">
+                <a:solidFill>
+                  <a:srgbClr val="111318"/>
+                </a:solidFill>
+              </a:defRPr>
+            </a:pPr>
+            <a:r>
+              <a:t>3. OTP Verified: </a:t>
+            </a:r>
+            <a:r>
+              <a:rPr b="0">
+                <a:solidFill>
+                  <a:srgbClr val="4B5160"/>
+                </a:solidFill>
+              </a:rPr>
+              <a:t>79,800 (62.1%)</a:t>
+            </a:r>
+          </a:p>
+          <a:p>
+            <a:pPr>
+              <a:spcBef>
+                <a:spcPts val="800"/>
+              </a:spcBef>
+              <a:defRPr b="1" sz="1200">
+                <a:solidFill>
+                  <a:srgbClr val="111318"/>
+                </a:solidFill>
+              </a:defRPr>
+            </a:pPr>
+            <a:r>
+              <a:t>4. Action Submitted: </a:t>
+            </a:r>
+            <a:r>
+              <a:rPr b="0">
+                <a:solidFill>
+                  <a:srgbClr val="4B5160"/>
+                </a:solidFill>
+              </a:rPr>
+              <a:t>62,560 (48.7%)</a:t>
+            </a:r>
+          </a:p>
+        </p:txBody>
+      </p:sp>
+      <p:sp>
+        <p:nvSpPr>
+          <p:cNvPr id="14" name="Rounded Rectangle 13"/>
+          <p:cNvSpPr/>
+          <p:nvPr/>
+        </p:nvSpPr>
+        <p:spPr>
+          <a:xfrm>
+            <a:off x="6217920" y="2834640"/>
+            <a:ext cx="5212080" cy="3291840"/>
+          </a:xfrm>
+          <a:prstGeom prst="roundRect">
+            <a:avLst/>
+          </a:prstGeom>
+          <a:solidFill>
+            <a:srgbClr val="F5F6F8"/>
+          </a:solidFill>
+          <a:ln>
+            <a:noFill/>
+          </a:ln>
+        </p:spPr>
+        <p:style>
+          <a:lnRef idx="1">
+            <a:schemeClr val="accent1"/>
+          </a:lnRef>
+          <a:fillRef idx="3">
+            <a:schemeClr val="accent1"/>
+          </a:fillRef>
+          <a:effectRef idx="2">
+            <a:schemeClr val="accent1"/>
+          </a:effectRef>
+          <a:fontRef idx="minor">
+            <a:schemeClr val="lt1"/>
+          </a:fontRef>
+        </p:style>
+        <p:txBody>
+          <a:bodyPr rtlCol="0" anchor="ctr"/>
+          <a:lstStyle/>
+          <a:p>
+            <a:pPr algn="ctr"/>
+          </a:p>
+        </p:txBody>
+      </p:sp>
+      <p:sp>
+        <p:nvSpPr>
+          <p:cNvPr id="15" name="TextBox 14"/>
+          <p:cNvSpPr txBox="1"/>
+          <p:nvPr/>
+        </p:nvSpPr>
+        <p:spPr>
+          <a:xfrm>
+            <a:off x="6400800" y="2926080"/>
+            <a:ext cx="4846320" cy="3108960"/>
+          </a:xfrm>
+          <a:prstGeom prst="rect">
+            <a:avLst/>
+          </a:prstGeom>
+          <a:noFill/>
+        </p:spPr>
+        <p:txBody>
+          <a:bodyPr wrap="square">
+            <a:spAutoFit/>
+          </a:bodyPr>
+          <a:lstStyle/>
+          <a:p>
+            <a:pPr>
+              <a:defRPr b="1" sz="1200">
+                <a:solidFill>
+                  <a:srgbClr val="1F9D63"/>
+                </a:solidFill>
+              </a:defRPr>
+            </a:pPr>
+            <a:r>
+              <a:t>SEGMENTATION &amp; FILTERS</a:t>
             </a:r>
           </a:p>
           <a:p>
@@ -6260,136 +9320,67 @@
               <a:spcBef>
                 <a:spcPts val="1200"/>
               </a:spcBef>
-              <a:defRPr b="1" sz="1400">
+              <a:defRPr sz="1200">
                 <a:solidFill>
                   <a:srgbClr val="111318"/>
                 </a:solidFill>
               </a:defRPr>
             </a:pPr>
             <a:r>
-              <a:t>Consent Verification Funnel performance:</a:t>
+              <a:t>Action Category split: Name Corrections = 68% (42,540) | Erasure Requests = 32% (20,020)</a:t>
             </a:r>
           </a:p>
           <a:p>
             <a:pPr>
               <a:spcBef>
-                <a:spcPts val="800"/>
+                <a:spcPts val="1000"/>
               </a:spcBef>
-              <a:defRPr sz="1300" b="1">
-                <a:solidFill>
-                  <a:srgbClr val="111318"/>
-                </a:solidFill>
-              </a:defRPr>
-            </a:pPr>
-            <a:r>
-              <a:t>• Total Portal Visits (Landing): </a:t>
-            </a:r>
-            <a:r>
-              <a:rPr b="0" sz="1300">
+              <a:defRPr sz="1200">
                 <a:solidFill>
                   <a:srgbClr val="4B5160"/>
                 </a:solidFill>
-              </a:rPr>
-              <a:t>128,450 sessions (100.0%)</a:t>
+              </a:defRPr>
+            </a:pPr>
+            <a:r>
+              <a:t>Device Splits: Mobile Web = 72% | Desktop Web = 28%</a:t>
+            </a:r>
+            <a:br/>
+            <a:r>
+              <a:t>Region Highlights: Karnataka (44%) | Maharashtra (28%)</a:t>
             </a:r>
           </a:p>
           <a:p>
             <a:pPr>
               <a:spcBef>
-                <a:spcPts val="800"/>
+                <a:spcPts val="1400"/>
               </a:spcBef>
-              <a:defRPr sz="1300" b="1">
-                <a:solidFill>
-                  <a:srgbClr val="111318"/>
-                </a:solidFill>
-              </a:defRPr>
-            </a:pPr>
-            <a:r>
-              <a:t>• Verify Screen Redirects (Intro): </a:t>
-            </a:r>
-            <a:r>
-              <a:rPr b="0" sz="1300">
+              <a:defRPr b="1" sz="1100">
+                <a:solidFill>
+                  <a:srgbClr val="2B5CE0"/>
+                </a:solidFill>
+              </a:defRPr>
+            </a:pPr>
+            <a:r>
+              <a:t>Available Dashboard Filters:</a:t>
+            </a:r>
+            <a:br/>
+            <a:r>
+              <a:t>Date Range  •  State/Region  •  Request Type  •  Device Group</a:t>
+            </a:r>
+          </a:p>
+          <a:p>
+            <a:pPr>
+              <a:spcBef>
+                <a:spcPts val="1400"/>
+              </a:spcBef>
+              <a:defRPr sz="1000" i="1">
                 <a:solidFill>
                   <a:srgbClr val="4B5160"/>
                 </a:solidFill>
-              </a:rPr>
-              <a:t>100,700 sessions (78.4%)</a:t>
-            </a:r>
-          </a:p>
-          <a:p>
-            <a:pPr>
-              <a:spcBef>
-                <a:spcPts val="800"/>
-              </a:spcBef>
-              <a:defRPr sz="1300" b="1">
-                <a:solidFill>
-                  <a:srgbClr val="111318"/>
-                </a:solidFill>
-              </a:defRPr>
-            </a:pPr>
-            <a:r>
-              <a:t>• Number Ownership Confirmed (OTP): </a:t>
-            </a:r>
-            <a:r>
-              <a:rPr b="0" sz="1300">
-                <a:solidFill>
-                  <a:srgbClr val="4B5160"/>
-                </a:solidFill>
-              </a:rPr>
-              <a:t>79,800 sessions (62.1% (Onboarding Success))</a:t>
-            </a:r>
-          </a:p>
-          <a:p>
-            <a:pPr>
-              <a:spcBef>
-                <a:spcPts val="800"/>
-              </a:spcBef>
-              <a:defRPr sz="1300" b="1">
-                <a:solidFill>
-                  <a:srgbClr val="111318"/>
-                </a:solidFill>
-              </a:defRPr>
-            </a:pPr>
-            <a:r>
-              <a:t>• Action Submissions (Correction/Erasure): </a:t>
-            </a:r>
-            <a:r>
-              <a:rPr b="0" sz="1300">
-                <a:solidFill>
-                  <a:srgbClr val="4B5160"/>
-                </a:solidFill>
-              </a:rPr>
-              <a:t>31,200 requests (24.3% of total visits)</a:t>
-            </a:r>
-          </a:p>
-          <a:p>
-            <a:pPr>
-              <a:spcBef>
-                <a:spcPts val="2000"/>
-              </a:spcBef>
-              <a:defRPr b="1" sz="1300">
-                <a:solidFill>
-                  <a:srgbClr val="2B5CE0"/>
-                </a:solidFill>
-              </a:defRPr>
-            </a:pPr>
-            <a:r>
-              <a:t>Submissions Segmentation: Name Correction Requests = 68% (21,216) | Erasure &amp; Unlisting Requests = 32% (9,984)</a:t>
-            </a:r>
-          </a:p>
-          <a:p>
-            <a:pPr>
-              <a:spcBef>
-                <a:spcPts val="800"/>
-              </a:spcBef>
-              <a:defRPr sz="1250" i="1">
-                <a:solidFill>
-                  <a:srgbClr val="1F9D63"/>
-                </a:solidFill>
-              </a:defRPr>
-            </a:pPr>
-            <a:r>
-              <a:t>Median Ticket Review SLA: 3.4 business days (within the 5-day Target) | Portal CSAT Score: 86.4% clear and helpful</a:t>
+              </a:defRPr>
+            </a:pPr>
+            <a:r>
+              <a:t>* All metrics listed above are illustrative target mocks for analytical visualization.</a:t>
             </a:r>
           </a:p>
         </p:txBody>
@@ -6487,7 +9478,7 @@
               </a:defRPr>
             </a:pPr>
             <a:r>
-              <a:t>Rollout Strategy &amp; Validation Stages</a:t>
+              <a:t>Phased Rollout Timeline &amp; UX Experimentation</a:t>
             </a:r>
           </a:p>
         </p:txBody>
@@ -6501,7 +9492,7 @@
         <p:spPr>
           <a:xfrm>
             <a:off x="731520" y="1645920"/>
-            <a:ext cx="3291840" cy="4389120"/>
+            <a:ext cx="2633472" cy="3474720"/>
           </a:xfrm>
           <a:prstGeom prst="roundRect">
             <a:avLst/>
@@ -6543,8 +9534,8 @@
         </p:nvSpPr>
         <p:spPr>
           <a:xfrm>
-            <a:off x="822960" y="1737360"/>
-            <a:ext cx="3108960" cy="4206240"/>
+            <a:off x="731520" y="1737360"/>
+            <a:ext cx="2633472" cy="3291840"/>
           </a:xfrm>
           <a:prstGeom prst="rect">
             <a:avLst/>
@@ -6565,7 +9556,22 @@
               </a:defRPr>
             </a:pPr>
             <a:r>
-              <a:t>PHASE 1: ALPHA PILOT</a:t>
+              <a:t>1. DOGFOOD</a:t>
+            </a:r>
+          </a:p>
+          <a:p>
+            <a:pPr>
+              <a:spcBef>
+                <a:spcPts val="800"/>
+              </a:spcBef>
+              <a:defRPr sz="1150">
+                <a:solidFill>
+                  <a:srgbClr val="111318"/>
+                </a:solidFill>
+              </a:defRPr>
+            </a:pPr>
+            <a:r>
+              <a:t>Employees &amp; internal alpha testing</a:t>
             </a:r>
           </a:p>
           <a:p>
@@ -6573,14 +9579,14 @@
               <a:spcBef>
                 <a:spcPts val="1200"/>
               </a:spcBef>
-              <a:defRPr b="1" sz="1300">
-                <a:solidFill>
-                  <a:srgbClr val="111318"/>
-                </a:solidFill>
-              </a:defRPr>
-            </a:pPr>
-            <a:r>
-              <a:t>Internal Employee Testing</a:t>
+              <a:defRPr b="1" sz="1100">
+                <a:solidFill>
+                  <a:srgbClr val="1F9D63"/>
+                </a:solidFill>
+              </a:defRPr>
+            </a:pPr>
+            <a:r>
+              <a:t>Key Metric: OTP validation checks</a:t>
             </a:r>
           </a:p>
           <a:p>
@@ -6588,14 +9594,14 @@
               <a:spcBef>
                 <a:spcPts val="800"/>
               </a:spcBef>
-              <a:defRPr sz="1200">
-                <a:solidFill>
-                  <a:srgbClr val="4B5160"/>
-                </a:solidFill>
-              </a:defRPr>
-            </a:pPr>
-            <a:r>
-              <a:t>Deploy prototype to internal employee channels. Validate basic SMS delivery, OTP box configurations, and test cancellation timelines. Verify that review queues route correctly without database errors.</a:t>
+              <a:defRPr b="1" sz="1100">
+                <a:solidFill>
+                  <a:srgbClr val="D33B3B"/>
+                </a:solidFill>
+              </a:defRPr>
+            </a:pPr>
+            <a:r>
+              <a:t>Rollback: Halt on route 404 bugs</a:t>
             </a:r>
           </a:p>
         </p:txBody>
@@ -6608,8 +9614,8 @@
         </p:nvSpPr>
         <p:spPr>
           <a:xfrm>
-            <a:off x="4389120" y="1645920"/>
-            <a:ext cx="3291840" cy="4389120"/>
+            <a:off x="3429000" y="1645920"/>
+            <a:ext cx="2633472" cy="3474720"/>
           </a:xfrm>
           <a:prstGeom prst="roundRect">
             <a:avLst/>
@@ -6651,8 +9657,8 @@
         </p:nvSpPr>
         <p:spPr>
           <a:xfrm>
-            <a:off x="4480560" y="1737360"/>
-            <a:ext cx="3108960" cy="4206240"/>
+            <a:off x="3429000" y="1737360"/>
+            <a:ext cx="2633472" cy="3291840"/>
           </a:xfrm>
           <a:prstGeom prst="rect">
             <a:avLst/>
@@ -6668,12 +9674,27 @@
             <a:pPr>
               <a:defRPr b="1" sz="1200">
                 <a:solidFill>
-                  <a:srgbClr val="1F9D63"/>
-                </a:solidFill>
-              </a:defRPr>
-            </a:pPr>
-            <a:r>
-              <a:t>PHASE 2: REGIONAL SOFT LAUNCH</a:t>
+                  <a:srgbClr val="2B5CE0"/>
+                </a:solidFill>
+              </a:defRPr>
+            </a:pPr>
+            <a:r>
+              <a:t>2. PILOT</a:t>
+            </a:r>
+          </a:p>
+          <a:p>
+            <a:pPr>
+              <a:spcBef>
+                <a:spcPts val="800"/>
+              </a:spcBef>
+              <a:defRPr sz="1150">
+                <a:solidFill>
+                  <a:srgbClr val="111318"/>
+                </a:solidFill>
+              </a:defRPr>
+            </a:pPr>
+            <a:r>
+              <a:t> Karnataka state soft launch cohort</a:t>
             </a:r>
           </a:p>
           <a:p>
@@ -6681,14 +9702,14 @@
               <a:spcBef>
                 <a:spcPts val="1200"/>
               </a:spcBef>
-              <a:defRPr b="1" sz="1300">
-                <a:solidFill>
-                  <a:srgbClr val="111318"/>
-                </a:solidFill>
-              </a:defRPr>
-            </a:pPr>
-            <a:r>
-              <a:t>Geographical Cohort Launch</a:t>
+              <a:defRPr b="1" sz="1100">
+                <a:solidFill>
+                  <a:srgbClr val="1F9D63"/>
+                </a:solidFill>
+              </a:defRPr>
+            </a:pPr>
+            <a:r>
+              <a:t>Key Metric: Verified Agency Rate</a:t>
             </a:r>
           </a:p>
           <a:p>
@@ -6696,14 +9717,14 @@
               <a:spcBef>
                 <a:spcPts val="800"/>
               </a:spcBef>
-              <a:defRPr sz="1200">
-                <a:solidFill>
-                  <a:srgbClr val="4B5160"/>
-                </a:solidFill>
-              </a:defRPr>
-            </a:pPr>
-            <a:r>
-              <a:t>Soft-launch unpromoted public web links in single regional states (e.g. Karnataka). Monitor organic check traffic, tracking SLA processing speeds and user-cancellation rates before global launch.</a:t>
+              <a:defRPr b="1" sz="1100">
+                <a:solidFill>
+                  <a:srgbClr val="D33B3B"/>
+                </a:solidFill>
+              </a:defRPr>
+            </a:pPr>
+            <a:r>
+              <a:t>Rollback: Halt on drop-off &gt; 20%</a:t>
             </a:r>
           </a:p>
         </p:txBody>
@@ -6716,8 +9737,8 @@
         </p:nvSpPr>
         <p:spPr>
           <a:xfrm>
-            <a:off x="8046720" y="1645920"/>
-            <a:ext cx="3383280" cy="4389120"/>
+            <a:off x="6126480" y="1645920"/>
+            <a:ext cx="2633472" cy="3474720"/>
           </a:xfrm>
           <a:prstGeom prst="roundRect">
             <a:avLst/>
@@ -6759,8 +9780,8 @@
         </p:nvSpPr>
         <p:spPr>
           <a:xfrm>
-            <a:off x="8138160" y="1737360"/>
-            <a:ext cx="3200400" cy="4206240"/>
+            <a:off x="6126480" y="1737360"/>
+            <a:ext cx="2633472" cy="3291840"/>
           </a:xfrm>
           <a:prstGeom prst="rect">
             <a:avLst/>
@@ -6776,12 +9797,27 @@
             <a:pPr>
               <a:defRPr b="1" sz="1200">
                 <a:solidFill>
-                  <a:srgbClr val="C57A11"/>
-                </a:solidFill>
-              </a:defRPr>
-            </a:pPr>
-            <a:r>
-              <a:t>A/B TESTING &amp; VALIDATION</a:t>
+                  <a:srgbClr val="2B5CE0"/>
+                </a:solidFill>
+              </a:defRPr>
+            </a:pPr>
+            <a:r>
+              <a:t>3. EXPANDED</a:t>
+            </a:r>
+          </a:p>
+          <a:p>
+            <a:pPr>
+              <a:spcBef>
+                <a:spcPts val="800"/>
+              </a:spcBef>
+              <a:defRPr sz="1150">
+                <a:solidFill>
+                  <a:srgbClr val="111318"/>
+                </a:solidFill>
+              </a:defRPr>
+            </a:pPr>
+            <a:r>
+              <a:t>Additional selected state registries</a:t>
             </a:r>
           </a:p>
           <a:p>
@@ -6789,14 +9825,14 @@
               <a:spcBef>
                 <a:spcPts val="1200"/>
               </a:spcBef>
-              <a:defRPr b="1" sz="1300">
-                <a:solidFill>
-                  <a:srgbClr val="111318"/>
-                </a:solidFill>
-              </a:defRPr>
-            </a:pPr>
-            <a:r>
-              <a:t>Regulatory Testing Constraints</a:t>
+              <a:defRPr b="1" sz="1100">
+                <a:solidFill>
+                  <a:srgbClr val="1F9D63"/>
+                </a:solidFill>
+              </a:defRPr>
+            </a:pPr>
+            <a:r>
+              <a:t>Key Metric: Median resolution SLA</a:t>
             </a:r>
           </a:p>
           <a:p>
@@ -6804,14 +9840,230 @@
               <a:spcBef>
                 <a:spcPts val="800"/>
               </a:spcBef>
+              <a:defRPr b="1" sz="1100">
+                <a:solidFill>
+                  <a:srgbClr val="D33B3B"/>
+                </a:solidFill>
+              </a:defRPr>
+            </a:pPr>
+            <a:r>
+              <a:t>Rollback: Halt on SLA &gt; 5 days</a:t>
+            </a:r>
+          </a:p>
+        </p:txBody>
+      </p:sp>
+      <p:sp>
+        <p:nvSpPr>
+          <p:cNvPr id="10" name="Rounded Rectangle 9"/>
+          <p:cNvSpPr/>
+          <p:nvPr/>
+        </p:nvSpPr>
+        <p:spPr>
+          <a:xfrm>
+            <a:off x="8823960" y="1645920"/>
+            <a:ext cx="2633472" cy="3474720"/>
+          </a:xfrm>
+          <a:prstGeom prst="roundRect">
+            <a:avLst/>
+          </a:prstGeom>
+          <a:solidFill>
+            <a:srgbClr val="F5F6F8"/>
+          </a:solidFill>
+          <a:ln>
+            <a:noFill/>
+          </a:ln>
+        </p:spPr>
+        <p:style>
+          <a:lnRef idx="1">
+            <a:schemeClr val="accent1"/>
+          </a:lnRef>
+          <a:fillRef idx="3">
+            <a:schemeClr val="accent1"/>
+          </a:fillRef>
+          <a:effectRef idx="2">
+            <a:schemeClr val="accent1"/>
+          </a:effectRef>
+          <a:fontRef idx="minor">
+            <a:schemeClr val="lt1"/>
+          </a:fontRef>
+        </p:style>
+        <p:txBody>
+          <a:bodyPr rtlCol="0" anchor="ctr"/>
+          <a:lstStyle/>
+          <a:p>
+            <a:pPr algn="ctr"/>
+          </a:p>
+        </p:txBody>
+      </p:sp>
+      <p:sp>
+        <p:nvSpPr>
+          <p:cNvPr id="11" name="TextBox 10"/>
+          <p:cNvSpPr txBox="1"/>
+          <p:nvPr/>
+        </p:nvSpPr>
+        <p:spPr>
+          <a:xfrm>
+            <a:off x="8823960" y="1737360"/>
+            <a:ext cx="2633472" cy="3291840"/>
+          </a:xfrm>
+          <a:prstGeom prst="rect">
+            <a:avLst/>
+          </a:prstGeom>
+          <a:noFill/>
+        </p:spPr>
+        <p:txBody>
+          <a:bodyPr wrap="square">
+            <a:spAutoFit/>
+          </a:bodyPr>
+          <a:lstStyle/>
+          <a:p>
+            <a:pPr>
+              <a:defRPr b="1" sz="1200">
+                <a:solidFill>
+                  <a:srgbClr val="2B5CE0"/>
+                </a:solidFill>
+              </a:defRPr>
+            </a:pPr>
+            <a:r>
+              <a:t>4. NATIONAL</a:t>
+            </a:r>
+          </a:p>
+          <a:p>
+            <a:pPr>
+              <a:spcBef>
+                <a:spcPts val="800"/>
+              </a:spcBef>
+              <a:defRPr sz="1150">
+                <a:solidFill>
+                  <a:srgbClr val="111318"/>
+                </a:solidFill>
+              </a:defRPr>
+            </a:pPr>
+            <a:r>
+              <a:t>India nationwide rollout</a:t>
+            </a:r>
+          </a:p>
+          <a:p>
+            <a:pPr>
+              <a:spcBef>
+                <a:spcPts val="1200"/>
+              </a:spcBef>
+              <a:defRPr b="1" sz="1100">
+                <a:solidFill>
+                  <a:srgbClr val="1F9D63"/>
+                </a:solidFill>
+              </a:defRPr>
+            </a:pPr>
+            <a:r>
+              <a:t>Key Metric: CSAT feedback scores</a:t>
+            </a:r>
+          </a:p>
+          <a:p>
+            <a:pPr>
+              <a:spcBef>
+                <a:spcPts val="800"/>
+              </a:spcBef>
+              <a:defRPr b="1" sz="1100">
+                <a:solidFill>
+                  <a:srgbClr val="D33B3B"/>
+                </a:solidFill>
+              </a:defRPr>
+            </a:pPr>
+            <a:r>
+              <a:t>Rollback: Halt on CSAT &lt; 75%</a:t>
+            </a:r>
+          </a:p>
+        </p:txBody>
+      </p:sp>
+      <p:sp>
+        <p:nvSpPr>
+          <p:cNvPr id="12" name="Rounded Rectangle 11"/>
+          <p:cNvSpPr/>
+          <p:nvPr/>
+        </p:nvSpPr>
+        <p:spPr>
+          <a:xfrm>
+            <a:off x="731520" y="5303520"/>
+            <a:ext cx="10725912" cy="1005840"/>
+          </a:xfrm>
+          <a:prstGeom prst="roundRect">
+            <a:avLst/>
+          </a:prstGeom>
+          <a:solidFill>
+            <a:srgbClr val="F5F6F8"/>
+          </a:solidFill>
+          <a:ln>
+            <a:noFill/>
+          </a:ln>
+        </p:spPr>
+        <p:style>
+          <a:lnRef idx="1">
+            <a:schemeClr val="accent1"/>
+          </a:lnRef>
+          <a:fillRef idx="3">
+            <a:schemeClr val="accent1"/>
+          </a:fillRef>
+          <a:effectRef idx="2">
+            <a:schemeClr val="accent1"/>
+          </a:effectRef>
+          <a:fontRef idx="minor">
+            <a:schemeClr val="lt1"/>
+          </a:fontRef>
+        </p:style>
+        <p:txBody>
+          <a:bodyPr rtlCol="0" anchor="ctr"/>
+          <a:lstStyle/>
+          <a:p>
+            <a:pPr algn="ctr"/>
+          </a:p>
+        </p:txBody>
+      </p:sp>
+      <p:sp>
+        <p:nvSpPr>
+          <p:cNvPr id="13" name="TextBox 12"/>
+          <p:cNvSpPr txBox="1"/>
+          <p:nvPr/>
+        </p:nvSpPr>
+        <p:spPr>
+          <a:xfrm>
+            <a:off x="914400" y="5394960"/>
+            <a:ext cx="10332720" cy="822960"/>
+          </a:xfrm>
+          <a:prstGeom prst="rect">
+            <a:avLst/>
+          </a:prstGeom>
+          <a:noFill/>
+        </p:spPr>
+        <p:txBody>
+          <a:bodyPr wrap="square">
+            <a:spAutoFit/>
+          </a:bodyPr>
+          <a:lstStyle/>
+          <a:p>
+            <a:pPr>
+              <a:defRPr b="1" sz="1100">
+                <a:solidFill>
+                  <a:srgbClr val="2B5CE0"/>
+                </a:solidFill>
+              </a:defRPr>
+            </a:pPr>
+            <a:r>
+              <a:t>UX EXPERIMENTATION HYPOTHESIS TESTING POLICY</a:t>
+            </a:r>
+          </a:p>
+          <a:p>
+            <a:pPr>
+              <a:spcBef>
+                <a:spcPts val="400"/>
+              </a:spcBef>
               <a:defRPr sz="1200">
                 <a:solidFill>
-                  <a:srgbClr val="4B5160"/>
-                </a:solidFill>
-              </a:defRPr>
-            </a:pPr>
-            <a:r>
-              <a:t>Under the DPDP Act, we cannot randomly deny privacy rights to control groups for A/B testing. Instead, compare verified consent rates pre/post rollout across state regions, and test warning copy variants.</a:t>
+                  <a:srgbClr val="111318"/>
+                </a:solidFill>
+              </a:defRPr>
+            </a:pPr>
+            <a:r>
+              <a:t>Mandatory rights access must NOT be withheld from control groups (legal compliance requirement). Instead, UX optimization experiments will test variants of layout copies, warning disclosure placements, and SMS resend reminders to maximize verification rates.</a:t>
             </a:r>
           </a:p>
         </p:txBody>

--- a/Truecaller_Identity_Rights_Center_Product_Thinking_Deck.pptx
+++ b/Truecaller_Identity_Rights_Center_Product_Thinking_Deck.pptx
@@ -4001,7 +4001,7 @@
               </a:defRPr>
             </a:pPr>
             <a:r>
-              <a:t>Erase requests hide displayName listings, but preserve underlying spam signals.</a:t>
+              <a:t>Separate public identity visibility from safety-signal retention; retention policy requires legal and Trust &amp; Safety review.</a:t>
             </a:r>
           </a:p>
         </p:txBody>
@@ -4437,7 +4437,7 @@
               </a:defRPr>
             </a:pPr>
             <a:r>
-              <a:t>Trigger filters isolate low-risk updates for instant approval (future scope).</a:t>
+              <a:t>Trigger filters isolate low-risk updates for instant approval.</a:t>
             </a:r>
           </a:p>
         </p:txBody>
@@ -4978,7 +4978,7 @@
               </a:defRPr>
             </a:pPr>
             <a:r>
-              <a:t>• Consents only for their own data processing.</a:t>
+              <a:t>• Authorizes contact syncing through the active-user experience, while listed third parties may have no direct interaction with the product.</a:t>
             </a:r>
           </a:p>
           <a:p>
@@ -5089,7 +5089,7 @@
               </a:defRPr>
             </a:pPr>
             <a:r>
-              <a:t>• DPDP Access &amp; Correction Rights: Data subjects must have accessible pathways to check and correct directory inaccuracies.</a:t>
+              <a:t>• Compliance design assumption: provide transparent pathways to understand listed data, correct inaccuracies, request erasure where applicable, and raise grievances.</a:t>
             </a:r>
           </a:p>
           <a:p>
@@ -5121,7 +5121,7 @@
               </a:defRPr>
             </a:pPr>
             <a:r>
-              <a:t>• Strategic Trust Advantage: Proactively offering agency avoids litigation risks and converts skeptics to active users.</a:t>
+              <a:t>• Strategic Trust Advantage: Proactively offering agency reduces regulatory and reputational exposure while strengthening trust.</a:t>
             </a:r>
           </a:p>
         </p:txBody>
@@ -6328,7 +6328,7 @@
               </a:defRPr>
             </a:pPr>
             <a:r>
-              <a:t>Buried opt-out forms</a:t>
+              <a:t>Buried opt-out screens</a:t>
             </a:r>
           </a:p>
         </p:txBody>
@@ -6724,7 +6724,7 @@
               </a:defRPr>
             </a:pPr>
             <a:r>
-              <a:t>1. VERIFY</a:t>
+              <a:t>1. Verify</a:t>
             </a:r>
           </a:p>
           <a:p>
@@ -6840,7 +6840,7 @@
               </a:defRPr>
             </a:pPr>
             <a:r>
-              <a:t>2. UNDERSTAND</a:t>
+              <a:t>2. Understand</a:t>
             </a:r>
           </a:p>
           <a:p>
@@ -6956,7 +6956,7 @@
               </a:defRPr>
             </a:pPr>
             <a:r>
-              <a:t>3. CONTROL</a:t>
+              <a:t>3. Control</a:t>
             </a:r>
           </a:p>
           <a:p>
@@ -7072,7 +7072,7 @@
               </a:defRPr>
             </a:pPr>
             <a:r>
-              <a:t>4. TRACK</a:t>
+              <a:t>4. Track</a:t>
             </a:r>
           </a:p>
           <a:p>
@@ -7084,7 +7084,7 @@
               </a:defRPr>
             </a:pPr>
             <a:r>
-              <a:t>Stepper Steer Detail</a:t>
+              <a:t>Request Status &amp; Timeline</a:t>
             </a:r>
           </a:p>
         </p:txBody>
@@ -7358,7 +7358,7 @@
               </a:defRPr>
             </a:pPr>
             <a:r>
-              <a:t>SUPPORTING METRICS</a:t>
+              <a:t>SUPPORTING OPERATIONAL METRICS</a:t>
             </a:r>
           </a:p>
           <a:p>
@@ -7373,7 +7373,7 @@
               </a:defRPr>
             </a:pPr>
             <a:r>
-              <a:t>• OTP Success Rate: Onboarding drop-offs.</a:t>
+              <a:t>• OTP Success Rate: Funnel onboarding check.</a:t>
             </a:r>
           </a:p>
           <a:p>
@@ -7388,7 +7388,7 @@
               </a:defRPr>
             </a:pPr>
             <a:r>
-              <a:t>• Rights Action rate: correction vs erasure.</a:t>
+              <a:t>• Rights Action Completion Rate: Actions submitted.</a:t>
             </a:r>
           </a:p>
           <a:p>
@@ -7403,7 +7403,7 @@
               </a:defRPr>
             </a:pPr>
             <a:r>
-              <a:t>• Median Resolution SLA: Target &lt; 3 days.</a:t>
+              <a:t>• Median Resolution Time: Review queue wait.</a:t>
             </a:r>
           </a:p>
           <a:p>
@@ -7418,7 +7418,7 @@
               </a:defRPr>
             </a:pPr>
             <a:r>
-              <a:t>• Reopen / Repeat Rate: Follow-up complaints.</a:t>
+              <a:t>• Reopen / Repeat Contact Rate: Recurring complaints.</a:t>
             </a:r>
           </a:p>
         </p:txBody>
@@ -7619,13 +7619,13 @@
               </a:defRPr>
             </a:pPr>
             <a:r>
-              <a:t>90-DAY SUCCESS CRITERIA</a:t>
+              <a:t>ILLUSTRATIVE 90-DAY TARGETS</a:t>
             </a:r>
           </a:p>
           <a:p>
             <a:pPr>
               <a:spcBef>
-                <a:spcPts val="600"/>
+                <a:spcPts val="500"/>
               </a:spcBef>
               <a:defRPr sz="1150">
                 <a:solidFill>
@@ -7634,13 +7634,13 @@
               </a:defRPr>
             </a:pPr>
             <a:r>
-              <a:t>• Verified Agency Rate: &gt; 75% target.</a:t>
+              <a:t>• Verified Data Agency Rate &gt;75%</a:t>
             </a:r>
           </a:p>
           <a:p>
             <a:pPr>
               <a:spcBef>
-                <a:spcPts val="600"/>
+                <a:spcPts val="500"/>
               </a:spcBef>
               <a:defRPr sz="1150">
                 <a:solidFill>
@@ -7649,13 +7649,13 @@
               </a:defRPr>
             </a:pPr>
             <a:r>
-              <a:t>• OTP Success Rate: &gt; 85% target.</a:t>
+              <a:t>• OTP Success Rate &gt;85%</a:t>
             </a:r>
           </a:p>
           <a:p>
             <a:pPr>
               <a:spcBef>
-                <a:spcPts val="600"/>
+                <a:spcPts val="500"/>
               </a:spcBef>
               <a:defRPr sz="1150">
                 <a:solidFill>
@@ -7664,13 +7664,13 @@
               </a:defRPr>
             </a:pPr>
             <a:r>
-              <a:t>• Median SLA: &lt; 3 business days target.</a:t>
+              <a:t>• Median Resolution Time &lt;3 business days</a:t>
             </a:r>
           </a:p>
           <a:p>
             <a:pPr>
               <a:spcBef>
-                <a:spcPts val="600"/>
+                <a:spcPts val="500"/>
               </a:spcBef>
               <a:defRPr sz="1150">
                 <a:solidFill>
@@ -7679,13 +7679,13 @@
               </a:defRPr>
             </a:pPr>
             <a:r>
-              <a:t>• Portal CSAT: &gt; 85% positive rating.</a:t>
+              <a:t>• 95% of requests resolved within 5 business days</a:t>
             </a:r>
           </a:p>
           <a:p>
             <a:pPr>
               <a:spcBef>
-                <a:spcPts val="600"/>
+                <a:spcPts val="500"/>
               </a:spcBef>
               <a:defRPr sz="1150">
                 <a:solidFill>
@@ -7694,7 +7694,22 @@
               </a:defRPr>
             </a:pPr>
             <a:r>
-              <a:t>• Illustrative targets based on soft-launch models.</a:t>
+              <a:t>• Portal CSAT &gt;85%</a:t>
+            </a:r>
+          </a:p>
+          <a:p>
+            <a:pPr>
+              <a:spcBef>
+                <a:spcPts val="500"/>
+              </a:spcBef>
+              <a:defRPr sz="1150">
+                <a:solidFill>
+                  <a:srgbClr val="111318"/>
+                </a:solidFill>
+              </a:defRPr>
+            </a:pPr>
+            <a:r>
+              <a:t>• Note: Targets are illustrative targets based on models.</a:t>
             </a:r>
           </a:p>
         </p:txBody>
@@ -8692,7 +8707,7 @@
               </a:defRPr>
             </a:pPr>
             <a:r>
-              <a:t>PM Analytics: Dashboard Performance (Illustrative Data)</a:t>
+              <a:t>PM Analytics Dashboard Mock (Illustrative Data)</a:t>
             </a:r>
           </a:p>
         </p:txBody>
@@ -8705,7 +8720,7 @@
         </p:nvSpPr>
         <p:spPr>
           <a:xfrm>
-            <a:off x="731520" y="1554480"/>
+            <a:off x="731520" y="1371600"/>
             <a:ext cx="2514600" cy="1051560"/>
           </a:xfrm>
           <a:prstGeom prst="roundRect">
@@ -8748,7 +8763,7 @@
         </p:nvSpPr>
         <p:spPr>
           <a:xfrm>
-            <a:off x="731520" y="1645920"/>
+            <a:off x="731520" y="1463040"/>
             <a:ext cx="2514600" cy="914400"/>
           </a:xfrm>
           <a:prstGeom prst="rect">
@@ -8798,7 +8813,7 @@
         </p:nvSpPr>
         <p:spPr>
           <a:xfrm>
-            <a:off x="3429000" y="1554480"/>
+            <a:off x="3429000" y="1371600"/>
             <a:ext cx="2514600" cy="1051560"/>
           </a:xfrm>
           <a:prstGeom prst="roundRect">
@@ -8841,7 +8856,7 @@
         </p:nvSpPr>
         <p:spPr>
           <a:xfrm>
-            <a:off x="3429000" y="1645920"/>
+            <a:off x="3429000" y="1463040"/>
             <a:ext cx="2514600" cy="914400"/>
           </a:xfrm>
           <a:prstGeom prst="rect">
@@ -8891,7 +8906,7 @@
         </p:nvSpPr>
         <p:spPr>
           <a:xfrm>
-            <a:off x="6126480" y="1554480"/>
+            <a:off x="6126480" y="1371600"/>
             <a:ext cx="2514600" cy="1051560"/>
           </a:xfrm>
           <a:prstGeom prst="roundRect">
@@ -8934,7 +8949,7 @@
         </p:nvSpPr>
         <p:spPr>
           <a:xfrm>
-            <a:off x="6126480" y="1645920"/>
+            <a:off x="6126480" y="1463040"/>
             <a:ext cx="2514600" cy="914400"/>
           </a:xfrm>
           <a:prstGeom prst="rect">
@@ -8984,7 +8999,7 @@
         </p:nvSpPr>
         <p:spPr>
           <a:xfrm>
-            <a:off x="8823960" y="1554480"/>
+            <a:off x="8823960" y="1371600"/>
             <a:ext cx="2514600" cy="1051560"/>
           </a:xfrm>
           <a:prstGeom prst="roundRect">
@@ -9027,7 +9042,7 @@
         </p:nvSpPr>
         <p:spPr>
           <a:xfrm>
-            <a:off x="8823960" y="1645920"/>
+            <a:off x="8823960" y="1463040"/>
             <a:ext cx="2514600" cy="914400"/>
           </a:xfrm>
           <a:prstGeom prst="rect">
@@ -9077,8 +9092,8 @@
         </p:nvSpPr>
         <p:spPr>
           <a:xfrm>
-            <a:off x="731520" y="2834640"/>
-            <a:ext cx="5303520" cy="3291840"/>
+            <a:off x="731520" y="2560320"/>
+            <a:ext cx="10698480" cy="502920"/>
           </a:xfrm>
           <a:prstGeom prst="roundRect">
             <a:avLst/>
@@ -9120,8 +9135,8 @@
         </p:nvSpPr>
         <p:spPr>
           <a:xfrm>
-            <a:off x="822960" y="2926080"/>
-            <a:ext cx="5120640" cy="3108960"/>
+            <a:off x="822960" y="2606040"/>
+            <a:ext cx="10515600" cy="411480"/>
           </a:xfrm>
           <a:prstGeom prst="rect">
             <a:avLst/>
@@ -9135,106 +9150,46 @@
           <a:lstStyle/>
           <a:p>
             <a:pPr>
-              <a:defRPr b="1" sz="1200">
+              <a:defRPr b="1" sz="1100">
+                <a:solidFill>
+                  <a:srgbClr val="111318"/>
+                </a:solidFill>
+              </a:defRPr>
+            </a:pPr>
+            <a:r>
+              <a:t>Filters:  </a:t>
+            </a:r>
+            <a:r>
+              <a:rPr b="0">
                 <a:solidFill>
                   <a:srgbClr val="2B5CE0"/>
                 </a:solidFill>
-              </a:defRPr>
-            </a:pPr>
-            <a:r>
-              <a:t>CONVERSION FUNNEL (MOCKUP)</a:t>
-            </a:r>
-          </a:p>
-          <a:p>
-            <a:pPr>
-              <a:spcBef>
-                <a:spcPts val="800"/>
-              </a:spcBef>
-              <a:defRPr b="1" sz="1200">
-                <a:solidFill>
-                  <a:srgbClr val="111318"/>
-                </a:solidFill>
-              </a:defRPr>
-            </a:pPr>
-            <a:r>
-              <a:t>1. Intro Visits: </a:t>
+              </a:rPr>
+              <a:t>[Date Range: Last 30 Days]   </a:t>
             </a:r>
             <a:r>
               <a:rPr b="0">
                 <a:solidFill>
-                  <a:srgbClr val="4B5160"/>
+                  <a:srgbClr val="2B5CE0"/>
                 </a:solidFill>
               </a:rPr>
-              <a:t>128,450 (100%)</a:t>
-            </a:r>
-          </a:p>
-          <a:p>
-            <a:pPr>
-              <a:spcBef>
-                <a:spcPts val="800"/>
-              </a:spcBef>
-              <a:defRPr b="1" sz="1200">
-                <a:solidFill>
-                  <a:srgbClr val="111318"/>
-                </a:solidFill>
-              </a:defRPr>
-            </a:pPr>
-            <a:r>
-              <a:t>2. Phone Entered: </a:t>
+              <a:t>[Region: All States]   </a:t>
             </a:r>
             <a:r>
               <a:rPr b="0">
                 <a:solidFill>
-                  <a:srgbClr val="4B5160"/>
+                  <a:srgbClr val="2B5CE0"/>
                 </a:solidFill>
               </a:rPr>
-              <a:t>100,700 (78.4%)</a:t>
-            </a:r>
-          </a:p>
-          <a:p>
-            <a:pPr>
-              <a:spcBef>
-                <a:spcPts val="800"/>
-              </a:spcBef>
-              <a:defRPr b="1" sz="1200">
-                <a:solidFill>
-                  <a:srgbClr val="111318"/>
-                </a:solidFill>
-              </a:defRPr>
-            </a:pPr>
-            <a:r>
-              <a:t>3. OTP Verified: </a:t>
+              <a:t>[Device: Mobile/Web]   </a:t>
             </a:r>
             <a:r>
               <a:rPr b="0">
                 <a:solidFill>
-                  <a:srgbClr val="4B5160"/>
+                  <a:srgbClr val="2B5CE0"/>
                 </a:solidFill>
               </a:rPr>
-              <a:t>79,800 (62.1%)</a:t>
-            </a:r>
-          </a:p>
-          <a:p>
-            <a:pPr>
-              <a:spcBef>
-                <a:spcPts val="800"/>
-              </a:spcBef>
-              <a:defRPr b="1" sz="1200">
-                <a:solidFill>
-                  <a:srgbClr val="111318"/>
-                </a:solidFill>
-              </a:defRPr>
-            </a:pPr>
-            <a:r>
-              <a:t>4. Action Submitted: </a:t>
-            </a:r>
-            <a:r>
-              <a:rPr b="0">
-                <a:solidFill>
-                  <a:srgbClr val="4B5160"/>
-                </a:solidFill>
-              </a:rPr>
-              <a:t>62,560 (48.7%)</a:t>
+              <a:t>[Request Type: All]   </a:t>
             </a:r>
           </a:p>
         </p:txBody>
@@ -9247,8 +9202,8 @@
         </p:nvSpPr>
         <p:spPr>
           <a:xfrm>
-            <a:off x="6217920" y="2834640"/>
-            <a:ext cx="5212080" cy="3291840"/>
+            <a:off x="731520" y="3200400"/>
+            <a:ext cx="5303520" cy="3017520"/>
           </a:xfrm>
           <a:prstGeom prst="roundRect">
             <a:avLst/>
@@ -9290,8 +9245,8 @@
         </p:nvSpPr>
         <p:spPr>
           <a:xfrm>
-            <a:off x="6400800" y="2926080"/>
-            <a:ext cx="4846320" cy="3108960"/>
+            <a:off x="822960" y="3291840"/>
+            <a:ext cx="5120640" cy="2834640"/>
           </a:xfrm>
           <a:prstGeom prst="rect">
             <a:avLst/>
@@ -9305,82 +9260,965 @@
           <a:lstStyle/>
           <a:p>
             <a:pPr>
+              <a:defRPr b="1" sz="1100">
+                <a:solidFill>
+                  <a:srgbClr val="2B5CE0"/>
+                </a:solidFill>
+              </a:defRPr>
+            </a:pPr>
+            <a:r>
+              <a:t>VERIFIED DATA AGENCY RATE (8-WEEK TREND)</a:t>
+            </a:r>
+          </a:p>
+          <a:p>
+            <a:pPr>
+              <a:spcBef>
+                <a:spcPts val="14000"/>
+              </a:spcBef>
+              <a:defRPr sz="1100">
+                <a:solidFill>
+                  <a:srgbClr val="111318"/>
+                </a:solidFill>
+              </a:defRPr>
+            </a:pPr>
+            <a:r>
+              <a:t>W1: 52%  •  W2: 58%  •  W3: 63%  •  W4: 67%  •  W5: 71%  •  W6: 74%  •  W7: 76%  •  W8: 78.4%</a:t>
+            </a:r>
+          </a:p>
+        </p:txBody>
+      </p:sp>
+      <p:sp>
+        <p:nvSpPr>
+          <p:cNvPr id="16" name="Oval 15"/>
+          <p:cNvSpPr/>
+          <p:nvPr/>
+        </p:nvSpPr>
+        <p:spPr>
+          <a:xfrm>
+            <a:off x="1920240" y="8686800"/>
+            <a:ext cx="109728" cy="109728"/>
+          </a:xfrm>
+          <a:prstGeom prst="ellipse">
+            <a:avLst/>
+          </a:prstGeom>
+          <a:solidFill>
+            <a:srgbClr val="2B5CE0"/>
+          </a:solidFill>
+          <a:ln>
+            <a:noFill/>
+          </a:ln>
+        </p:spPr>
+        <p:style>
+          <a:lnRef idx="1">
+            <a:schemeClr val="accent1"/>
+          </a:lnRef>
+          <a:fillRef idx="3">
+            <a:schemeClr val="accent1"/>
+          </a:fillRef>
+          <a:effectRef idx="2">
+            <a:schemeClr val="accent1"/>
+          </a:effectRef>
+          <a:fontRef idx="minor">
+            <a:schemeClr val="lt1"/>
+          </a:fontRef>
+        </p:style>
+        <p:txBody>
+          <a:bodyPr rtlCol="0" anchor="ctr"/>
+          <a:lstStyle/>
+          <a:p>
+            <a:pPr algn="ctr"/>
+          </a:p>
+        </p:txBody>
+      </p:sp>
+      <p:sp>
+        <p:nvSpPr>
+          <p:cNvPr id="17" name="Oval 16"/>
+          <p:cNvSpPr/>
+          <p:nvPr/>
+        </p:nvSpPr>
+        <p:spPr>
+          <a:xfrm>
+            <a:off x="2468880" y="8503920"/>
+            <a:ext cx="109728" cy="109728"/>
+          </a:xfrm>
+          <a:prstGeom prst="ellipse">
+            <a:avLst/>
+          </a:prstGeom>
+          <a:solidFill>
+            <a:srgbClr val="2B5CE0"/>
+          </a:solidFill>
+          <a:ln>
+            <a:noFill/>
+          </a:ln>
+        </p:spPr>
+        <p:style>
+          <a:lnRef idx="1">
+            <a:schemeClr val="accent1"/>
+          </a:lnRef>
+          <a:fillRef idx="3">
+            <a:schemeClr val="accent1"/>
+          </a:fillRef>
+          <a:effectRef idx="2">
+            <a:schemeClr val="accent1"/>
+          </a:effectRef>
+          <a:fontRef idx="minor">
+            <a:schemeClr val="lt1"/>
+          </a:fontRef>
+        </p:style>
+        <p:txBody>
+          <a:bodyPr rtlCol="0" anchor="ctr"/>
+          <a:lstStyle/>
+          <a:p>
+            <a:pPr algn="ctr"/>
+          </a:p>
+        </p:txBody>
+      </p:sp>
+      <p:sp>
+        <p:nvSpPr>
+          <p:cNvPr id="18" name="Oval 17"/>
+          <p:cNvSpPr/>
+          <p:nvPr/>
+        </p:nvSpPr>
+        <p:spPr>
+          <a:xfrm>
+            <a:off x="3017520" y="8229600"/>
+            <a:ext cx="109728" cy="109728"/>
+          </a:xfrm>
+          <a:prstGeom prst="ellipse">
+            <a:avLst/>
+          </a:prstGeom>
+          <a:solidFill>
+            <a:srgbClr val="2B5CE0"/>
+          </a:solidFill>
+          <a:ln>
+            <a:noFill/>
+          </a:ln>
+        </p:spPr>
+        <p:style>
+          <a:lnRef idx="1">
+            <a:schemeClr val="accent1"/>
+          </a:lnRef>
+          <a:fillRef idx="3">
+            <a:schemeClr val="accent1"/>
+          </a:fillRef>
+          <a:effectRef idx="2">
+            <a:schemeClr val="accent1"/>
+          </a:effectRef>
+          <a:fontRef idx="minor">
+            <a:schemeClr val="lt1"/>
+          </a:fontRef>
+        </p:style>
+        <p:txBody>
+          <a:bodyPr rtlCol="0" anchor="ctr"/>
+          <a:lstStyle/>
+          <a:p>
+            <a:pPr algn="ctr"/>
+          </a:p>
+        </p:txBody>
+      </p:sp>
+      <p:sp>
+        <p:nvSpPr>
+          <p:cNvPr id="19" name="Oval 18"/>
+          <p:cNvSpPr/>
+          <p:nvPr/>
+        </p:nvSpPr>
+        <p:spPr>
+          <a:xfrm>
+            <a:off x="3566160" y="8046720"/>
+            <a:ext cx="109728" cy="109728"/>
+          </a:xfrm>
+          <a:prstGeom prst="ellipse">
+            <a:avLst/>
+          </a:prstGeom>
+          <a:solidFill>
+            <a:srgbClr val="2B5CE0"/>
+          </a:solidFill>
+          <a:ln>
+            <a:noFill/>
+          </a:ln>
+        </p:spPr>
+        <p:style>
+          <a:lnRef idx="1">
+            <a:schemeClr val="accent1"/>
+          </a:lnRef>
+          <a:fillRef idx="3">
+            <a:schemeClr val="accent1"/>
+          </a:fillRef>
+          <a:effectRef idx="2">
+            <a:schemeClr val="accent1"/>
+          </a:effectRef>
+          <a:fontRef idx="minor">
+            <a:schemeClr val="lt1"/>
+          </a:fontRef>
+        </p:style>
+        <p:txBody>
+          <a:bodyPr rtlCol="0" anchor="ctr"/>
+          <a:lstStyle/>
+          <a:p>
+            <a:pPr algn="ctr"/>
+          </a:p>
+        </p:txBody>
+      </p:sp>
+      <p:sp>
+        <p:nvSpPr>
+          <p:cNvPr id="20" name="Oval 19"/>
+          <p:cNvSpPr/>
+          <p:nvPr/>
+        </p:nvSpPr>
+        <p:spPr>
+          <a:xfrm>
+            <a:off x="4114800" y="7772400"/>
+            <a:ext cx="109728" cy="109728"/>
+          </a:xfrm>
+          <a:prstGeom prst="ellipse">
+            <a:avLst/>
+          </a:prstGeom>
+          <a:solidFill>
+            <a:srgbClr val="2B5CE0"/>
+          </a:solidFill>
+          <a:ln>
+            <a:noFill/>
+          </a:ln>
+        </p:spPr>
+        <p:style>
+          <a:lnRef idx="1">
+            <a:schemeClr val="accent1"/>
+          </a:lnRef>
+          <a:fillRef idx="3">
+            <a:schemeClr val="accent1"/>
+          </a:fillRef>
+          <a:effectRef idx="2">
+            <a:schemeClr val="accent1"/>
+          </a:effectRef>
+          <a:fontRef idx="minor">
+            <a:schemeClr val="lt1"/>
+          </a:fontRef>
+        </p:style>
+        <p:txBody>
+          <a:bodyPr rtlCol="0" anchor="ctr"/>
+          <a:lstStyle/>
+          <a:p>
+            <a:pPr algn="ctr"/>
+          </a:p>
+        </p:txBody>
+      </p:sp>
+      <p:sp>
+        <p:nvSpPr>
+          <p:cNvPr id="21" name="Oval 20"/>
+          <p:cNvSpPr/>
+          <p:nvPr/>
+        </p:nvSpPr>
+        <p:spPr>
+          <a:xfrm>
+            <a:off x="4663440" y="7589520"/>
+            <a:ext cx="109728" cy="109728"/>
+          </a:xfrm>
+          <a:prstGeom prst="ellipse">
+            <a:avLst/>
+          </a:prstGeom>
+          <a:solidFill>
+            <a:srgbClr val="2B5CE0"/>
+          </a:solidFill>
+          <a:ln>
+            <a:noFill/>
+          </a:ln>
+        </p:spPr>
+        <p:style>
+          <a:lnRef idx="1">
+            <a:schemeClr val="accent1"/>
+          </a:lnRef>
+          <a:fillRef idx="3">
+            <a:schemeClr val="accent1"/>
+          </a:fillRef>
+          <a:effectRef idx="2">
+            <a:schemeClr val="accent1"/>
+          </a:effectRef>
+          <a:fontRef idx="minor">
+            <a:schemeClr val="lt1"/>
+          </a:fontRef>
+        </p:style>
+        <p:txBody>
+          <a:bodyPr rtlCol="0" anchor="ctr"/>
+          <a:lstStyle/>
+          <a:p>
+            <a:pPr algn="ctr"/>
+          </a:p>
+        </p:txBody>
+      </p:sp>
+      <p:sp>
+        <p:nvSpPr>
+          <p:cNvPr id="22" name="Oval 21"/>
+          <p:cNvSpPr/>
+          <p:nvPr/>
+        </p:nvSpPr>
+        <p:spPr>
+          <a:xfrm>
+            <a:off x="5212080" y="7406640"/>
+            <a:ext cx="109728" cy="109728"/>
+          </a:xfrm>
+          <a:prstGeom prst="ellipse">
+            <a:avLst/>
+          </a:prstGeom>
+          <a:solidFill>
+            <a:srgbClr val="2B5CE0"/>
+          </a:solidFill>
+          <a:ln>
+            <a:noFill/>
+          </a:ln>
+        </p:spPr>
+        <p:style>
+          <a:lnRef idx="1">
+            <a:schemeClr val="accent1"/>
+          </a:lnRef>
+          <a:fillRef idx="3">
+            <a:schemeClr val="accent1"/>
+          </a:fillRef>
+          <a:effectRef idx="2">
+            <a:schemeClr val="accent1"/>
+          </a:effectRef>
+          <a:fontRef idx="minor">
+            <a:schemeClr val="lt1"/>
+          </a:fontRef>
+        </p:style>
+        <p:txBody>
+          <a:bodyPr rtlCol="0" anchor="ctr"/>
+          <a:lstStyle/>
+          <a:p>
+            <a:pPr algn="ctr"/>
+          </a:p>
+        </p:txBody>
+      </p:sp>
+      <p:sp>
+        <p:nvSpPr>
+          <p:cNvPr id="23" name="Oval 22"/>
+          <p:cNvSpPr/>
+          <p:nvPr/>
+        </p:nvSpPr>
+        <p:spPr>
+          <a:xfrm>
+            <a:off x="5760720" y="7223760"/>
+            <a:ext cx="109728" cy="109728"/>
+          </a:xfrm>
+          <a:prstGeom prst="ellipse">
+            <a:avLst/>
+          </a:prstGeom>
+          <a:solidFill>
+            <a:srgbClr val="2B5CE0"/>
+          </a:solidFill>
+          <a:ln>
+            <a:noFill/>
+          </a:ln>
+        </p:spPr>
+        <p:style>
+          <a:lnRef idx="1">
+            <a:schemeClr val="accent1"/>
+          </a:lnRef>
+          <a:fillRef idx="3">
+            <a:schemeClr val="accent1"/>
+          </a:fillRef>
+          <a:effectRef idx="2">
+            <a:schemeClr val="accent1"/>
+          </a:effectRef>
+          <a:fontRef idx="minor">
+            <a:schemeClr val="lt1"/>
+          </a:fontRef>
+        </p:style>
+        <p:txBody>
+          <a:bodyPr rtlCol="0" anchor="ctr"/>
+          <a:lstStyle/>
+          <a:p>
+            <a:pPr algn="ctr"/>
+          </a:p>
+        </p:txBody>
+      </p:sp>
+      <p:sp>
+        <p:nvSpPr>
+          <p:cNvPr id="24" name="Rounded Rectangle 23"/>
+          <p:cNvSpPr/>
+          <p:nvPr/>
+        </p:nvSpPr>
+        <p:spPr>
+          <a:xfrm>
+            <a:off x="6217920" y="3200400"/>
+            <a:ext cx="5212080" cy="3017520"/>
+          </a:xfrm>
+          <a:prstGeom prst="roundRect">
+            <a:avLst/>
+          </a:prstGeom>
+          <a:solidFill>
+            <a:srgbClr val="F5F6F8"/>
+          </a:solidFill>
+          <a:ln>
+            <a:noFill/>
+          </a:ln>
+        </p:spPr>
+        <p:style>
+          <a:lnRef idx="1">
+            <a:schemeClr val="accent1"/>
+          </a:lnRef>
+          <a:fillRef idx="3">
+            <a:schemeClr val="accent1"/>
+          </a:fillRef>
+          <a:effectRef idx="2">
+            <a:schemeClr val="accent1"/>
+          </a:effectRef>
+          <a:fontRef idx="minor">
+            <a:schemeClr val="lt1"/>
+          </a:fontRef>
+        </p:style>
+        <p:txBody>
+          <a:bodyPr rtlCol="0" anchor="ctr"/>
+          <a:lstStyle/>
+          <a:p>
+            <a:pPr algn="ctr"/>
+          </a:p>
+        </p:txBody>
+      </p:sp>
+      <p:sp>
+        <p:nvSpPr>
+          <p:cNvPr id="25" name="TextBox 24"/>
+          <p:cNvSpPr txBox="1"/>
+          <p:nvPr/>
+        </p:nvSpPr>
+        <p:spPr>
+          <a:xfrm>
+            <a:off x="6400800" y="3291840"/>
+            <a:ext cx="4846320" cy="2834640"/>
+          </a:xfrm>
+          <a:prstGeom prst="rect">
+            <a:avLst/>
+          </a:prstGeom>
+          <a:noFill/>
+        </p:spPr>
+        <p:txBody>
+          <a:bodyPr wrap="square">
+            <a:spAutoFit/>
+          </a:bodyPr>
+          <a:lstStyle/>
+          <a:p>
+            <a:pPr>
+              <a:defRPr b="1" sz="1100">
+                <a:solidFill>
+                  <a:srgbClr val="2B5CE0"/>
+                </a:solidFill>
+              </a:defRPr>
+            </a:pPr>
+            <a:r>
+              <a:t>CONVERSION FUNNEL &amp; REQUEST SPLIT</a:t>
+            </a:r>
+          </a:p>
+          <a:p>
+            <a:pPr>
+              <a:spcBef>
+                <a:spcPts val="14000"/>
+              </a:spcBef>
               <a:defRPr b="1" sz="1200">
                 <a:solidFill>
-                  <a:srgbClr val="1F9D63"/>
-                </a:solidFill>
-              </a:defRPr>
-            </a:pPr>
-            <a:r>
-              <a:t>SEGMENTATION &amp; FILTERS</a:t>
+                  <a:srgbClr val="111318"/>
+                </a:solidFill>
+              </a:defRPr>
+            </a:pPr>
+            <a:r>
+              <a:t>Request Category Split: Name Corrections = 68% | Erasure Requests = 32%</a:t>
             </a:r>
           </a:p>
           <a:p>
             <a:pPr>
               <a:spcBef>
-                <a:spcPts val="1200"/>
+                <a:spcPts val="400"/>
               </a:spcBef>
-              <a:defRPr sz="1200">
+              <a:defRPr i="1" sz="1000">
+                <a:solidFill>
+                  <a:srgbClr val="4B5160"/>
+                </a:solidFill>
+              </a:defRPr>
+            </a:pPr>
+            <a:r>
+              <a:t>* All figures are mock metrics presented for illustrative dashboard planning.</a:t>
+            </a:r>
+          </a:p>
+        </p:txBody>
+      </p:sp>
+      <p:sp>
+        <p:nvSpPr>
+          <p:cNvPr id="26" name="Rounded Rectangle 25"/>
+          <p:cNvSpPr/>
+          <p:nvPr/>
+        </p:nvSpPr>
+        <p:spPr>
+          <a:xfrm>
+            <a:off x="6400800" y="3566160"/>
+            <a:ext cx="4114800" cy="292608"/>
+          </a:xfrm>
+          <a:prstGeom prst="roundRect">
+            <a:avLst/>
+          </a:prstGeom>
+          <a:solidFill>
+            <a:srgbClr val="FFFFFF"/>
+          </a:solidFill>
+          <a:ln>
+            <a:noFill/>
+          </a:ln>
+        </p:spPr>
+        <p:style>
+          <a:lnRef idx="1">
+            <a:schemeClr val="accent1"/>
+          </a:lnRef>
+          <a:fillRef idx="3">
+            <a:schemeClr val="accent1"/>
+          </a:fillRef>
+          <a:effectRef idx="2">
+            <a:schemeClr val="accent1"/>
+          </a:effectRef>
+          <a:fontRef idx="minor">
+            <a:schemeClr val="lt1"/>
+          </a:fontRef>
+        </p:style>
+        <p:txBody>
+          <a:bodyPr rtlCol="0" anchor="ctr"/>
+          <a:lstStyle/>
+          <a:p>
+            <a:pPr algn="ctr"/>
+          </a:p>
+        </p:txBody>
+      </p:sp>
+      <p:sp>
+        <p:nvSpPr>
+          <p:cNvPr id="27" name="Rounded Rectangle 26"/>
+          <p:cNvSpPr/>
+          <p:nvPr/>
+        </p:nvSpPr>
+        <p:spPr>
+          <a:xfrm>
+            <a:off x="6400800" y="3566160"/>
+            <a:ext cx="3840480" cy="292608"/>
+          </a:xfrm>
+          <a:prstGeom prst="roundRect">
+            <a:avLst/>
+          </a:prstGeom>
+          <a:solidFill>
+            <a:srgbClr val="1E42A8"/>
+          </a:solidFill>
+          <a:ln>
+            <a:noFill/>
+          </a:ln>
+        </p:spPr>
+        <p:style>
+          <a:lnRef idx="1">
+            <a:schemeClr val="accent1"/>
+          </a:lnRef>
+          <a:fillRef idx="3">
+            <a:schemeClr val="accent1"/>
+          </a:fillRef>
+          <a:effectRef idx="2">
+            <a:schemeClr val="accent1"/>
+          </a:effectRef>
+          <a:fontRef idx="minor">
+            <a:schemeClr val="lt1"/>
+          </a:fontRef>
+        </p:style>
+        <p:txBody>
+          <a:bodyPr rtlCol="0" anchor="ctr"/>
+          <a:lstStyle/>
+          <a:p>
+            <a:pPr algn="ctr"/>
+          </a:p>
+        </p:txBody>
+      </p:sp>
+      <p:sp>
+        <p:nvSpPr>
+          <p:cNvPr id="28" name="TextBox 27"/>
+          <p:cNvSpPr txBox="1"/>
+          <p:nvPr/>
+        </p:nvSpPr>
+        <p:spPr>
+          <a:xfrm>
+            <a:off x="10314432" y="3520440"/>
+            <a:ext cx="182880" cy="292608"/>
+          </a:xfrm>
+          <a:prstGeom prst="rect">
+            <a:avLst/>
+          </a:prstGeom>
+          <a:noFill/>
+        </p:spPr>
+        <p:txBody>
+          <a:bodyPr wrap="none">
+            <a:spAutoFit/>
+          </a:bodyPr>
+          <a:lstStyle/>
+          <a:p>
+            <a:pPr>
+              <a:defRPr sz="1000" b="1">
                 <a:solidFill>
                   <a:srgbClr val="111318"/>
                 </a:solidFill>
               </a:defRPr>
             </a:pPr>
             <a:r>
-              <a:t>Action Category split: Name Corrections = 68% (42,540) | Erasure Requests = 32% (20,020)</a:t>
-            </a:r>
-          </a:p>
-          <a:p>
-            <a:pPr>
-              <a:spcBef>
-                <a:spcPts val="1000"/>
-              </a:spcBef>
-              <a:defRPr sz="1200">
-                <a:solidFill>
-                  <a:srgbClr val="4B5160"/>
-                </a:solidFill>
-              </a:defRPr>
-            </a:pPr>
-            <a:r>
-              <a:t>Device Splits: Mobile Web = 72% | Desktop Web = 28%</a:t>
-            </a:r>
-            <a:br/>
-            <a:r>
-              <a:t>Region Highlights: Karnataka (44%) | Maharashtra (28%)</a:t>
-            </a:r>
-          </a:p>
-          <a:p>
-            <a:pPr>
-              <a:spcBef>
-                <a:spcPts val="1400"/>
-              </a:spcBef>
-              <a:defRPr b="1" sz="1100">
-                <a:solidFill>
-                  <a:srgbClr val="2B5CE0"/>
-                </a:solidFill>
-              </a:defRPr>
-            </a:pPr>
-            <a:r>
-              <a:t>Available Dashboard Filters:</a:t>
-            </a:r>
-            <a:br/>
-            <a:r>
-              <a:t>Date Range  •  State/Region  •  Request Type  •  Device Group</a:t>
-            </a:r>
-          </a:p>
-          <a:p>
-            <a:pPr>
-              <a:spcBef>
-                <a:spcPts val="1400"/>
-              </a:spcBef>
-              <a:defRPr sz="1000" i="1">
-                <a:solidFill>
-                  <a:srgbClr val="4B5160"/>
-                </a:solidFill>
-              </a:defRPr>
-            </a:pPr>
-            <a:r>
-              <a:t>* All metrics listed above are illustrative target mocks for analytical visualization.</a:t>
+              <a:t>Portal Visits (100%)</a:t>
+            </a:r>
+          </a:p>
+        </p:txBody>
+      </p:sp>
+      <p:sp>
+        <p:nvSpPr>
+          <p:cNvPr id="29" name="Rounded Rectangle 28"/>
+          <p:cNvSpPr/>
+          <p:nvPr/>
+        </p:nvSpPr>
+        <p:spPr>
+          <a:xfrm>
+            <a:off x="6400800" y="3950208"/>
+            <a:ext cx="4114800" cy="292608"/>
+          </a:xfrm>
+          <a:prstGeom prst="roundRect">
+            <a:avLst/>
+          </a:prstGeom>
+          <a:solidFill>
+            <a:srgbClr val="FFFFFF"/>
+          </a:solidFill>
+          <a:ln>
+            <a:noFill/>
+          </a:ln>
+        </p:spPr>
+        <p:style>
+          <a:lnRef idx="1">
+            <a:schemeClr val="accent1"/>
+          </a:lnRef>
+          <a:fillRef idx="3">
+            <a:schemeClr val="accent1"/>
+          </a:fillRef>
+          <a:effectRef idx="2">
+            <a:schemeClr val="accent1"/>
+          </a:effectRef>
+          <a:fontRef idx="minor">
+            <a:schemeClr val="lt1"/>
+          </a:fontRef>
+        </p:style>
+        <p:txBody>
+          <a:bodyPr rtlCol="0" anchor="ctr"/>
+          <a:lstStyle/>
+          <a:p>
+            <a:pPr algn="ctr"/>
+          </a:p>
+        </p:txBody>
+      </p:sp>
+      <p:sp>
+        <p:nvSpPr>
+          <p:cNvPr id="30" name="Rounded Rectangle 29"/>
+          <p:cNvSpPr/>
+          <p:nvPr/>
+        </p:nvSpPr>
+        <p:spPr>
+          <a:xfrm>
+            <a:off x="6400800" y="3950208"/>
+            <a:ext cx="3017520" cy="292608"/>
+          </a:xfrm>
+          <a:prstGeom prst="roundRect">
+            <a:avLst/>
+          </a:prstGeom>
+          <a:solidFill>
+            <a:srgbClr val="2B5CE0"/>
+          </a:solidFill>
+          <a:ln>
+            <a:noFill/>
+          </a:ln>
+        </p:spPr>
+        <p:style>
+          <a:lnRef idx="1">
+            <a:schemeClr val="accent1"/>
+          </a:lnRef>
+          <a:fillRef idx="3">
+            <a:schemeClr val="accent1"/>
+          </a:fillRef>
+          <a:effectRef idx="2">
+            <a:schemeClr val="accent1"/>
+          </a:effectRef>
+          <a:fontRef idx="minor">
+            <a:schemeClr val="lt1"/>
+          </a:fontRef>
+        </p:style>
+        <p:txBody>
+          <a:bodyPr rtlCol="0" anchor="ctr"/>
+          <a:lstStyle/>
+          <a:p>
+            <a:pPr algn="ctr"/>
+          </a:p>
+        </p:txBody>
+      </p:sp>
+      <p:sp>
+        <p:nvSpPr>
+          <p:cNvPr id="31" name="TextBox 30"/>
+          <p:cNvSpPr txBox="1"/>
+          <p:nvPr/>
+        </p:nvSpPr>
+        <p:spPr>
+          <a:xfrm>
+            <a:off x="9491472" y="3904488"/>
+            <a:ext cx="1005840" cy="292608"/>
+          </a:xfrm>
+          <a:prstGeom prst="rect">
+            <a:avLst/>
+          </a:prstGeom>
+          <a:noFill/>
+        </p:spPr>
+        <p:txBody>
+          <a:bodyPr wrap="none">
+            <a:spAutoFit/>
+          </a:bodyPr>
+          <a:lstStyle/>
+          <a:p>
+            <a:pPr>
+              <a:defRPr sz="1000" b="1">
+                <a:solidFill>
+                  <a:srgbClr val="111318"/>
+                </a:solidFill>
+              </a:defRPr>
+            </a:pPr>
+            <a:r>
+              <a:t>Phone Entered (78.4%)</a:t>
+            </a:r>
+          </a:p>
+        </p:txBody>
+      </p:sp>
+      <p:sp>
+        <p:nvSpPr>
+          <p:cNvPr id="32" name="Rounded Rectangle 31"/>
+          <p:cNvSpPr/>
+          <p:nvPr/>
+        </p:nvSpPr>
+        <p:spPr>
+          <a:xfrm>
+            <a:off x="6400800" y="4334256"/>
+            <a:ext cx="4114800" cy="292608"/>
+          </a:xfrm>
+          <a:prstGeom prst="roundRect">
+            <a:avLst/>
+          </a:prstGeom>
+          <a:solidFill>
+            <a:srgbClr val="FFFFFF"/>
+          </a:solidFill>
+          <a:ln>
+            <a:noFill/>
+          </a:ln>
+        </p:spPr>
+        <p:style>
+          <a:lnRef idx="1">
+            <a:schemeClr val="accent1"/>
+          </a:lnRef>
+          <a:fillRef idx="3">
+            <a:schemeClr val="accent1"/>
+          </a:fillRef>
+          <a:effectRef idx="2">
+            <a:schemeClr val="accent1"/>
+          </a:effectRef>
+          <a:fontRef idx="minor">
+            <a:schemeClr val="lt1"/>
+          </a:fontRef>
+        </p:style>
+        <p:txBody>
+          <a:bodyPr rtlCol="0" anchor="ctr"/>
+          <a:lstStyle/>
+          <a:p>
+            <a:pPr algn="ctr"/>
+          </a:p>
+        </p:txBody>
+      </p:sp>
+      <p:sp>
+        <p:nvSpPr>
+          <p:cNvPr id="33" name="Rounded Rectangle 32"/>
+          <p:cNvSpPr/>
+          <p:nvPr/>
+        </p:nvSpPr>
+        <p:spPr>
+          <a:xfrm>
+            <a:off x="6400800" y="4334256"/>
+            <a:ext cx="2377440" cy="292608"/>
+          </a:xfrm>
+          <a:prstGeom prst="roundRect">
+            <a:avLst/>
+          </a:prstGeom>
+          <a:solidFill>
+            <a:srgbClr val="1F9D63"/>
+          </a:solidFill>
+          <a:ln>
+            <a:noFill/>
+          </a:ln>
+        </p:spPr>
+        <p:style>
+          <a:lnRef idx="1">
+            <a:schemeClr val="accent1"/>
+          </a:lnRef>
+          <a:fillRef idx="3">
+            <a:schemeClr val="accent1"/>
+          </a:fillRef>
+          <a:effectRef idx="2">
+            <a:schemeClr val="accent1"/>
+          </a:effectRef>
+          <a:fontRef idx="minor">
+            <a:schemeClr val="lt1"/>
+          </a:fontRef>
+        </p:style>
+        <p:txBody>
+          <a:bodyPr rtlCol="0" anchor="ctr"/>
+          <a:lstStyle/>
+          <a:p>
+            <a:pPr algn="ctr"/>
+          </a:p>
+        </p:txBody>
+      </p:sp>
+      <p:sp>
+        <p:nvSpPr>
+          <p:cNvPr id="34" name="TextBox 33"/>
+          <p:cNvSpPr txBox="1"/>
+          <p:nvPr/>
+        </p:nvSpPr>
+        <p:spPr>
+          <a:xfrm>
+            <a:off x="8851392" y="4288536"/>
+            <a:ext cx="1645920" cy="292608"/>
+          </a:xfrm>
+          <a:prstGeom prst="rect">
+            <a:avLst/>
+          </a:prstGeom>
+          <a:noFill/>
+        </p:spPr>
+        <p:txBody>
+          <a:bodyPr wrap="none">
+            <a:spAutoFit/>
+          </a:bodyPr>
+          <a:lstStyle/>
+          <a:p>
+            <a:pPr>
+              <a:defRPr sz="1000" b="1">
+                <a:solidFill>
+                  <a:srgbClr val="111318"/>
+                </a:solidFill>
+              </a:defRPr>
+            </a:pPr>
+            <a:r>
+              <a:t>OTP Verified (62.1%)</a:t>
+            </a:r>
+          </a:p>
+        </p:txBody>
+      </p:sp>
+      <p:sp>
+        <p:nvSpPr>
+          <p:cNvPr id="35" name="Rounded Rectangle 34"/>
+          <p:cNvSpPr/>
+          <p:nvPr/>
+        </p:nvSpPr>
+        <p:spPr>
+          <a:xfrm>
+            <a:off x="6400800" y="4718304"/>
+            <a:ext cx="4114800" cy="292608"/>
+          </a:xfrm>
+          <a:prstGeom prst="roundRect">
+            <a:avLst/>
+          </a:prstGeom>
+          <a:solidFill>
+            <a:srgbClr val="FFFFFF"/>
+          </a:solidFill>
+          <a:ln>
+            <a:noFill/>
+          </a:ln>
+        </p:spPr>
+        <p:style>
+          <a:lnRef idx="1">
+            <a:schemeClr val="accent1"/>
+          </a:lnRef>
+          <a:fillRef idx="3">
+            <a:schemeClr val="accent1"/>
+          </a:fillRef>
+          <a:effectRef idx="2">
+            <a:schemeClr val="accent1"/>
+          </a:effectRef>
+          <a:fontRef idx="minor">
+            <a:schemeClr val="lt1"/>
+          </a:fontRef>
+        </p:style>
+        <p:txBody>
+          <a:bodyPr rtlCol="0" anchor="ctr"/>
+          <a:lstStyle/>
+          <a:p>
+            <a:pPr algn="ctr"/>
+          </a:p>
+        </p:txBody>
+      </p:sp>
+      <p:sp>
+        <p:nvSpPr>
+          <p:cNvPr id="36" name="Rounded Rectangle 35"/>
+          <p:cNvSpPr/>
+          <p:nvPr/>
+        </p:nvSpPr>
+        <p:spPr>
+          <a:xfrm>
+            <a:off x="6400800" y="4718304"/>
+            <a:ext cx="1828800" cy="292608"/>
+          </a:xfrm>
+          <a:prstGeom prst="roundRect">
+            <a:avLst/>
+          </a:prstGeom>
+          <a:solidFill>
+            <a:srgbClr val="C57A11"/>
+          </a:solidFill>
+          <a:ln>
+            <a:noFill/>
+          </a:ln>
+        </p:spPr>
+        <p:style>
+          <a:lnRef idx="1">
+            <a:schemeClr val="accent1"/>
+          </a:lnRef>
+          <a:fillRef idx="3">
+            <a:schemeClr val="accent1"/>
+          </a:fillRef>
+          <a:effectRef idx="2">
+            <a:schemeClr val="accent1"/>
+          </a:effectRef>
+          <a:fontRef idx="minor">
+            <a:schemeClr val="lt1"/>
+          </a:fontRef>
+        </p:style>
+        <p:txBody>
+          <a:bodyPr rtlCol="0" anchor="ctr"/>
+          <a:lstStyle/>
+          <a:p>
+            <a:pPr algn="ctr"/>
+          </a:p>
+        </p:txBody>
+      </p:sp>
+      <p:sp>
+        <p:nvSpPr>
+          <p:cNvPr id="37" name="TextBox 36"/>
+          <p:cNvSpPr txBox="1"/>
+          <p:nvPr/>
+        </p:nvSpPr>
+        <p:spPr>
+          <a:xfrm>
+            <a:off x="8302752" y="4672584"/>
+            <a:ext cx="2194560" cy="292608"/>
+          </a:xfrm>
+          <a:prstGeom prst="rect">
+            <a:avLst/>
+          </a:prstGeom>
+          <a:noFill/>
+        </p:spPr>
+        <p:txBody>
+          <a:bodyPr wrap="none">
+            <a:spAutoFit/>
+          </a:bodyPr>
+          <a:lstStyle/>
+          <a:p>
+            <a:pPr>
+              <a:defRPr sz="1000" b="1">
+                <a:solidFill>
+                  <a:srgbClr val="111318"/>
+                </a:solidFill>
+              </a:defRPr>
+            </a:pPr>
+            <a:r>
+              <a:t>Action Completed (48.7%)</a:t>
             </a:r>
           </a:p>
         </p:txBody>
@@ -9586,7 +10424,7 @@
               </a:defRPr>
             </a:pPr>
             <a:r>
-              <a:t>Key Metric: OTP validation checks</a:t>
+              <a:t>Key Metric: OTP Validation success</a:t>
             </a:r>
           </a:p>
           <a:p>
@@ -9601,7 +10439,7 @@
               </a:defRPr>
             </a:pPr>
             <a:r>
-              <a:t>Rollback: Halt on route 404 bugs</a:t>
+              <a:t>Rollback: Halt on critical journey failure rate &gt;1%</a:t>
             </a:r>
           </a:p>
         </p:txBody>
@@ -9694,7 +10532,7 @@
               </a:defRPr>
             </a:pPr>
             <a:r>
-              <a:t> Karnataka state soft launch cohort</a:t>
+              <a:t>Karnataka state soft launch cohort</a:t>
             </a:r>
           </a:p>
           <a:p>
@@ -9709,7 +10547,7 @@
               </a:defRPr>
             </a:pPr>
             <a:r>
-              <a:t>Key Metric: Verified Agency Rate</a:t>
+              <a:t>Key Metric: Verified Data Agency Rate</a:t>
             </a:r>
           </a:p>
           <a:p>
@@ -9724,7 +10562,7 @@
               </a:defRPr>
             </a:pPr>
             <a:r>
-              <a:t>Rollback: Halt on drop-off &gt; 20%</a:t>
+              <a:t>Rollback: Halt on critical journey failure rate &gt;1%</a:t>
             </a:r>
           </a:p>
         </p:txBody>
@@ -9817,7 +10655,7 @@
               </a:defRPr>
             </a:pPr>
             <a:r>
-              <a:t>Additional selected state registries</a:t>
+              <a:t>Additional state cohorts</a:t>
             </a:r>
           </a:p>
           <a:p>
@@ -9832,7 +10670,7 @@
               </a:defRPr>
             </a:pPr>
             <a:r>
-              <a:t>Key Metric: Median resolution SLA</a:t>
+              <a:t>Key Metric: Median Resolution Time</a:t>
             </a:r>
           </a:p>
           <a:p>
@@ -9847,7 +10685,7 @@
               </a:defRPr>
             </a:pPr>
             <a:r>
-              <a:t>Rollback: Halt on SLA &gt; 5 days</a:t>
+              <a:t>Rollback: Halt on critical journey failure rate &gt;1%</a:t>
             </a:r>
           </a:p>
         </p:txBody>
@@ -9970,7 +10808,7 @@
               </a:defRPr>
             </a:pPr>
             <a:r>
-              <a:t>Rollback: Halt on CSAT &lt; 75%</a:t>
+              <a:t>Rollback: Halt on critical journey failure rate &gt;1%</a:t>
             </a:r>
           </a:p>
         </p:txBody>
@@ -10063,7 +10901,7 @@
               </a:defRPr>
             </a:pPr>
             <a:r>
-              <a:t>Mandatory rights access must NOT be withheld from control groups (legal compliance requirement). Instead, UX optimization experiments will test variants of layout copies, warning disclosure placements, and SMS resend reminders to maximize verification rates.</a:t>
+              <a:t>Experimentation boundary: do not withhold core rights-access pathways from eligible users. Test UX elements such as copy, information hierarchy, progressive disclosure, and reminder timing instead.</a:t>
             </a:r>
           </a:p>
         </p:txBody>
